--- a/Self-Healing UI Automation (Samsung SDS) - 10 slides.pptx
+++ b/Self-Healing UI Automation (Samsung SDS) - 10 slides.pptx
@@ -708,27 +708,44 @@
           <a:lstStyle/>
           <a:p>
             <a:r>
-              <a:t>One GPU, many robots: "We buy the intelligence once, not once per robot."</a:t>
-            </a:r>
-          </a:p>
-          <a:p>
-            <a:r>
-              <a:t>Left box: the robot host keeps its existing script and gains one client file. That client is the agent's trigger - it fires the moment a lookup fails - and it runs the JavaScript harvest and the final bind. No GPU, no model; rollout is a package install.</a:t>
-            </a:r>
-          </a:p>
-          <a:p>
-            <a:r>
-              <a:t>The arrows between the boxes are the security story: element fingerprints cross the wire - never the page, never a screenshot, never the values the robot is typing - and the agent answers with an index, never a selector. The robot binds and proves it on the live page itself.</a:t>
-            </a:r>
-          </a:p>
-          <a:p>
-            <a:r>
-              <a:t>Top of the agent host: RAG memory. Every decision is grounded in fixes the fleet already proved and in what this element looked like the last time the step worked; every verified heal is written back, so a break one robot solves is free for every robot after it.</a:t>
-            </a:r>
-          </a:p>
-          <a:p>
-            <a:r>
-              <a:t>Right: every component is open source or open weights, on hardware we own.</a:t>
+              <a:rPr lang="en-US" dirty="0"/>
+              <a:t>One GPU, many robots, and a real agent: “We buy the intelligence once, not once per robot.”</a:t>
+            </a:r>
+          </a:p>
+          <a:p>
+            <a:r>
+              <a:rPr lang="en-US" dirty="0"/>
+              <a:t>Left: the robot keeps its existing script. When a lookup fails, the ReFlex Agent is invoked through bis.py, which runs the seven page tools right next to the browser: Step Reader, Page Scanner, Presence Check, Wait &amp; Rescan, Selector Options, Ask a Person and Report Absent. No GPU and no model on the robot; rollout is one file.</a:t>
+            </a:r>
+          </a:p>
+          <a:p>
+            <a:r>
+              <a:rPr lang="en-US" dirty="0"/>
+              <a:t>Right: the ReFlex Agent is an LLM planner with tool calling. It decides which tool to call next, reads what comes back and decides again - up to eight calls a repair. Its other tools run on the GPU host: RAG memory (Fleet Memory, Last-Good Compare), the similarity engine (Candidate Ranker, Element Inspector) and the fine-tuned LLM (LLM Judge, with the Laya Checker).</a:t>
+            </a:r>
+          </a:p>
+          <a:p>
+            <a:r>
+              <a:rPr lang="en-US" dirty="0"/>
+              <a:t>The numbered row is one example repair, call by call: memory had nothing, the page was scanned on the robot, the ranker narrowed it to eight, the fine-tuned LLM judge picked one at 0.93, and Commit Repair passed the policy. Each number sits on the arrow to the tool that answered it, in the same colour.</a:t>
+            </a:r>
+          </a:p>
+          <a:p>
+            <a:r>
+              <a:rPr lang="en-US" dirty="0"/>
+              <a:t>Bottom: the guardrail. Commit Repair goes through the execution policy, which applies a change only on calibrated confidence; otherwise a person reviews it, or it is refused. The LLM picks an element - it never writes a selector.</a:t>
+            </a:r>
+          </a:p>
+          <a:p>
+            <a:r>
+              <a:rPr lang="en-US" dirty="0"/>
+              <a:t>Security: page facts cross the wire - never the page, a screenshot or the values the robot types. Every verified heal is written back to RAG memory, so a break one robot solves is free for every robot after it.</a:t>
+            </a:r>
+          </a:p>
+          <a:p>
+            <a:r>
+              <a:rPr lang="en-US" dirty="0"/>
+              <a:t>The stack: Qwen3-4B-Instruct-2507 plans as the agent; the same model, fine-tuned on real breakages, is the LLM judge; Laya-421M is the checker and MiniLM-L6 the sentence embeddings. Open source and open weights, on hardware we own.</a:t>
             </a:r>
           </a:p>
         </p:txBody>
@@ -4626,7 +4643,7 @@
                 </a:solidFill>
                 <a:latin typeface="Inter"/>
               </a:rPr>
-              <a:t>One GPU host, shared RAG memory.</a:t>
+              <a:t>An LLM agent and its tools.</a:t>
             </a:r>
           </a:p>
         </p:txBody>
@@ -10887,7 +10904,7 @@
                 </a:solidFill>
                 <a:latin typeface="Inter"/>
               </a:rPr>
-              <a:t>ARCHITECTURE  ·  RAG MEMORY &amp; TECHNOLOGY STACK</a:t>
+              <a:t>ARCHITECTURE  ·  REFLEX AGENT, TOOLS &amp; TECHNOLOGY STACK</a:t>
             </a:r>
           </a:p>
         </p:txBody>
@@ -11207,7 +11224,7 @@
                 </a:solidFill>
                 <a:latin typeface="Inter"/>
               </a:rPr>
-              <a:t>One Healing Agent host serves the whole Ui automation fleet.</a:t>
+              <a:t>The ReFlex Agent plans every repair, one tool call at a time.</a:t>
             </a:r>
           </a:p>
         </p:txBody>
@@ -11242,21 +11259,21 @@
                 </a:solidFill>
                 <a:latin typeface="Inter"/>
               </a:rPr>
-              <a:t>Automation keep the browser. One shared host runs the agent, its fine-tuned AI and its RAG memory.</a:t>
-            </a:r>
-          </a:p>
-        </p:txBody>
-      </p:sp>
-      <p:sp>
-        <p:nvSpPr>
-          <p:cNvPr id="13" name="Rounded Rectangle 12"/>
+              <a:t>Robots keep the browser and the page tools; one GPU host runs the ReFlex Agent, its tools and its RAG memory.</a:t>
+            </a:r>
+          </a:p>
+        </p:txBody>
+      </p:sp>
+      <p:sp>
+        <p:nvSpPr>
+          <p:cNvPr id="201" name="Robot host"/>
           <p:cNvSpPr/>
           <p:nvPr/>
         </p:nvSpPr>
         <p:spPr>
           <a:xfrm>
-            <a:off x="667512" y="1325880"/>
-            <a:ext cx="1645920" cy="3200400"/>
+            <a:off x="667512" y="1280160"/>
+            <a:ext cx="1764792" cy="2688336"/>
           </a:xfrm>
           <a:prstGeom prst="roundRect">
             <a:avLst>
@@ -11274,650 +11291,72 @@
           </a:ln>
           <a:effectLst/>
         </p:spPr>
-        <p:style>
-          <a:lnRef idx="1">
-            <a:schemeClr val="accent1"/>
-          </a:lnRef>
-          <a:fillRef idx="3">
-            <a:schemeClr val="accent1"/>
-          </a:fillRef>
-          <a:effectRef idx="2">
-            <a:schemeClr val="accent1"/>
-          </a:effectRef>
-          <a:fontRef idx="minor">
-            <a:schemeClr val="lt1"/>
-          </a:fontRef>
-        </p:style>
-        <p:txBody>
-          <a:bodyPr rtlCol="0" anchor="ctr"/>
-          <a:lstStyle/>
-          <a:p>
-            <a:pPr algn="ctr"/>
-            <a:endParaRPr/>
-          </a:p>
-        </p:txBody>
-      </p:sp>
-      <p:sp>
-        <p:nvSpPr>
-          <p:cNvPr id="14" name="TextBox 13"/>
-          <p:cNvSpPr txBox="1"/>
-          <p:nvPr/>
-        </p:nvSpPr>
-        <p:spPr>
-          <a:xfrm>
-            <a:off x="777240" y="1417320"/>
-            <a:ext cx="1554480" cy="146304"/>
-          </a:xfrm>
-          <a:prstGeom prst="rect">
-            <a:avLst/>
-          </a:prstGeom>
-          <a:noFill/>
-        </p:spPr>
-        <p:txBody>
-          <a:bodyPr wrap="square" lIns="0" tIns="0" rIns="0" bIns="0" anchor="t">
-            <a:noAutofit/>
-          </a:bodyPr>
-          <a:lstStyle/>
-          <a:p>
-            <a:pPr algn="l"/>
-            <a:r>
-              <a:rPr sz="650" b="1" i="0" spc="90" dirty="0">
-                <a:solidFill>
-                  <a:srgbClr val="2A5C9E"/>
-                </a:solidFill>
-                <a:latin typeface="Inter"/>
-              </a:rPr>
-              <a:t>HOST  ·  NO GPU</a:t>
-            </a:r>
-          </a:p>
-        </p:txBody>
-      </p:sp>
-      <p:sp>
-        <p:nvSpPr>
-          <p:cNvPr id="15" name="Rounded Rectangle 14"/>
+        <p:txBody>
+          <a:bodyPr wrap="square" lIns="0" tIns="0" rIns="0" bIns="0" rtlCol="0" anchor="ctr">
+            <a:noAutofit/>
+          </a:bodyPr>
+          <a:lstStyle/>
+          <a:p>
+            <a:endParaRPr lang="en-US"/>
+          </a:p>
+        </p:txBody>
+      </p:sp>
+      <p:sp>
+        <p:nvSpPr>
+          <p:cNvPr id="202" name="ROBOT HOST  ·  NO GPU"/>
+          <p:cNvSpPr txBox="1"/>
+          <p:nvPr/>
+        </p:nvSpPr>
+        <p:spPr>
+          <a:xfrm>
+            <a:off x="777240" y="1371600"/>
+            <a:ext cx="1581912" cy="118872"/>
+          </a:xfrm>
+          <a:prstGeom prst="rect">
+            <a:avLst/>
+          </a:prstGeom>
+          <a:noFill/>
+        </p:spPr>
+        <p:txBody>
+          <a:bodyPr wrap="square" lIns="0" tIns="0" rIns="0" bIns="0" anchor="t">
+            <a:noAutofit/>
+          </a:bodyPr>
+          <a:lstStyle/>
+          <a:p>
+            <a:pPr algn="l">
+              <a:lnSpc>
+                <a:spcPct val="100000"/>
+              </a:lnSpc>
+              <a:spcBef>
+                <a:spcPts val="0"/>
+              </a:spcBef>
+            </a:pPr>
+            <a:r>
+              <a:rPr lang="en-US" sz="600" b="1" i="0" spc="110" dirty="0">
+                <a:solidFill>
+                  <a:srgbClr val="1428A0"/>
+                </a:solidFill>
+                <a:latin typeface="Inter"/>
+              </a:rPr>
+              <a:t>ROBOT HOST  ·  NO GPU</a:t>
+            </a:r>
+          </a:p>
+        </p:txBody>
+      </p:sp>
+      <p:sp>
+        <p:nvSpPr>
+          <p:cNvPr id="203" name="ReFlex Agent host"/>
           <p:cNvSpPr/>
           <p:nvPr/>
         </p:nvSpPr>
         <p:spPr>
           <a:xfrm>
-            <a:off x="777240" y="1709928"/>
-            <a:ext cx="1426464" cy="585216"/>
+            <a:off x="2935224" y="1280160"/>
+            <a:ext cx="5541264" cy="2688336"/>
           </a:xfrm>
           <a:prstGeom prst="roundRect">
             <a:avLst>
-              <a:gd name="adj" fmla="val 12000"/>
-            </a:avLst>
-          </a:prstGeom>
-          <a:solidFill>
-            <a:srgbClr val="FFFFFF"/>
-          </a:solidFill>
-          <a:ln w="9525">
-            <a:solidFill>
-              <a:srgbClr val="D7DEEA"/>
-            </a:solidFill>
-          </a:ln>
-          <a:effectLst/>
-        </p:spPr>
-        <p:style>
-          <a:lnRef idx="1">
-            <a:schemeClr val="accent1"/>
-          </a:lnRef>
-          <a:fillRef idx="3">
-            <a:schemeClr val="accent1"/>
-          </a:fillRef>
-          <a:effectRef idx="2">
-            <a:schemeClr val="accent1"/>
-          </a:effectRef>
-          <a:fontRef idx="minor">
-            <a:schemeClr val="lt1"/>
-          </a:fontRef>
-        </p:style>
-        <p:txBody>
-          <a:bodyPr rtlCol="0" anchor="ctr"/>
-          <a:lstStyle/>
-          <a:p>
-            <a:pPr algn="ctr"/>
-            <a:endParaRPr/>
-          </a:p>
-        </p:txBody>
-      </p:sp>
-      <p:pic>
-        <p:nvPicPr>
-          <p:cNvPr id="16" name="Picture 15" descr="LuFileCode_b.png"/>
-          <p:cNvPicPr>
-            <a:picLocks noChangeAspect="1"/>
-          </p:cNvPicPr>
-          <p:nvPr/>
-        </p:nvPicPr>
-        <p:blipFill>
-          <a:blip r:embed="rId3"/>
-          <a:stretch>
-            <a:fillRect/>
-          </a:stretch>
-        </p:blipFill>
-        <p:spPr>
-          <a:xfrm>
-            <a:off x="868680" y="1801368"/>
-            <a:ext cx="182880" cy="182880"/>
-          </a:xfrm>
-          <a:prstGeom prst="rect">
-            <a:avLst/>
-          </a:prstGeom>
-        </p:spPr>
-      </p:pic>
-      <p:sp>
-        <p:nvSpPr>
-          <p:cNvPr id="17" name="TextBox 16"/>
-          <p:cNvSpPr txBox="1"/>
-          <p:nvPr/>
-        </p:nvSpPr>
-        <p:spPr>
-          <a:xfrm>
-            <a:off x="1106424" y="1810512"/>
-            <a:ext cx="1042416" cy="164592"/>
-          </a:xfrm>
-          <a:prstGeom prst="rect">
-            <a:avLst/>
-          </a:prstGeom>
-          <a:noFill/>
-        </p:spPr>
-        <p:txBody>
-          <a:bodyPr wrap="square" lIns="0" tIns="0" rIns="0" bIns="0" anchor="t">
-            <a:noAutofit/>
-          </a:bodyPr>
-          <a:lstStyle/>
-          <a:p>
-            <a:pPr algn="l"/>
-            <a:r>
-              <a:rPr sz="800" b="1" i="0">
-                <a:solidFill>
-                  <a:srgbClr val="1A1A1E"/>
-                </a:solidFill>
-                <a:latin typeface="Inter"/>
-              </a:rPr>
-              <a:t>Automation script</a:t>
-            </a:r>
-          </a:p>
-        </p:txBody>
-      </p:sp>
-      <p:sp>
-        <p:nvSpPr>
-          <p:cNvPr id="18" name="TextBox 17"/>
-          <p:cNvSpPr txBox="1"/>
-          <p:nvPr/>
-        </p:nvSpPr>
-        <p:spPr>
-          <a:xfrm>
-            <a:off x="868680" y="2048256"/>
-            <a:ext cx="1261872" cy="182880"/>
-          </a:xfrm>
-          <a:prstGeom prst="rect">
-            <a:avLst/>
-          </a:prstGeom>
-          <a:noFill/>
-        </p:spPr>
-        <p:txBody>
-          <a:bodyPr wrap="square" lIns="0" tIns="0" rIns="0" bIns="0" anchor="t">
-            <a:noAutofit/>
-          </a:bodyPr>
-          <a:lstStyle/>
-          <a:p>
-            <a:pPr algn="l"/>
-            <a:r>
-              <a:rPr sz="700" b="0" i="0">
-                <a:solidFill>
-                  <a:srgbClr val="5A6472"/>
-                </a:solidFill>
-                <a:latin typeface="Inter"/>
-              </a:rPr>
-              <a:t>existing, unchanged</a:t>
-            </a:r>
-          </a:p>
-        </p:txBody>
-      </p:sp>
-      <p:sp>
-        <p:nvSpPr>
-          <p:cNvPr id="19" name="Rounded Rectangle 18"/>
-          <p:cNvSpPr/>
-          <p:nvPr/>
-        </p:nvSpPr>
-        <p:spPr>
-          <a:xfrm>
-            <a:off x="777240" y="2679192"/>
-            <a:ext cx="1426464" cy="585216"/>
-          </a:xfrm>
-          <a:prstGeom prst="roundRect">
-            <a:avLst>
-              <a:gd name="adj" fmla="val 12000"/>
-            </a:avLst>
-          </a:prstGeom>
-          <a:solidFill>
-            <a:srgbClr val="FFFFFF"/>
-          </a:solidFill>
-          <a:ln w="15875">
-            <a:solidFill>
-              <a:srgbClr val="1428A0"/>
-            </a:solidFill>
-          </a:ln>
-          <a:effectLst/>
-        </p:spPr>
-        <p:style>
-          <a:lnRef idx="1">
-            <a:schemeClr val="accent1"/>
-          </a:lnRef>
-          <a:fillRef idx="3">
-            <a:schemeClr val="accent1"/>
-          </a:fillRef>
-          <a:effectRef idx="2">
-            <a:schemeClr val="accent1"/>
-          </a:effectRef>
-          <a:fontRef idx="minor">
-            <a:schemeClr val="lt1"/>
-          </a:fontRef>
-        </p:style>
-        <p:txBody>
-          <a:bodyPr rtlCol="0" anchor="ctr"/>
-          <a:lstStyle/>
-          <a:p>
-            <a:pPr algn="ctr"/>
-            <a:endParaRPr/>
-          </a:p>
-        </p:txBody>
-      </p:sp>
-      <p:pic>
-        <p:nvPicPr>
-          <p:cNvPr id="20" name="Picture 19" descr="LuPackage_b.png"/>
-          <p:cNvPicPr>
-            <a:picLocks noChangeAspect="1"/>
-          </p:cNvPicPr>
-          <p:nvPr/>
-        </p:nvPicPr>
-        <p:blipFill>
-          <a:blip r:embed="rId4"/>
-          <a:stretch>
-            <a:fillRect/>
-          </a:stretch>
-        </p:blipFill>
-        <p:spPr>
-          <a:xfrm>
-            <a:off x="868680" y="2770632"/>
-            <a:ext cx="182880" cy="182880"/>
-          </a:xfrm>
-          <a:prstGeom prst="rect">
-            <a:avLst/>
-          </a:prstGeom>
-        </p:spPr>
-      </p:pic>
-      <p:sp>
-        <p:nvSpPr>
-          <p:cNvPr id="21" name="TextBox 20"/>
-          <p:cNvSpPr txBox="1"/>
-          <p:nvPr/>
-        </p:nvSpPr>
-        <p:spPr>
-          <a:xfrm>
-            <a:off x="1106424" y="2779776"/>
-            <a:ext cx="1042416" cy="164592"/>
-          </a:xfrm>
-          <a:prstGeom prst="rect">
-            <a:avLst/>
-          </a:prstGeom>
-          <a:noFill/>
-        </p:spPr>
-        <p:txBody>
-          <a:bodyPr wrap="square" lIns="0" tIns="0" rIns="0" bIns="0" anchor="t">
-            <a:noAutofit/>
-          </a:bodyPr>
-          <a:lstStyle/>
-          <a:p>
-            <a:pPr algn="l"/>
-            <a:r>
-              <a:rPr sz="800" b="1" i="0">
-                <a:solidFill>
-                  <a:srgbClr val="1A1A1E"/>
-                </a:solidFill>
-                <a:latin typeface="Inter"/>
-              </a:rPr>
-              <a:t>Agent client</a:t>
-            </a:r>
-          </a:p>
-        </p:txBody>
-      </p:sp>
-      <p:sp>
-        <p:nvSpPr>
-          <p:cNvPr id="22" name="TextBox 21"/>
-          <p:cNvSpPr txBox="1"/>
-          <p:nvPr/>
-        </p:nvSpPr>
-        <p:spPr>
-          <a:xfrm>
-            <a:off x="868680" y="3017520"/>
-            <a:ext cx="1261872" cy="182880"/>
-          </a:xfrm>
-          <a:prstGeom prst="rect">
-            <a:avLst/>
-          </a:prstGeom>
-          <a:noFill/>
-        </p:spPr>
-        <p:txBody>
-          <a:bodyPr wrap="square" lIns="0" tIns="0" rIns="0" bIns="0" anchor="t">
-            <a:noAutofit/>
-          </a:bodyPr>
-          <a:lstStyle/>
-          <a:p>
-            <a:pPr algn="l"/>
-            <a:r>
-              <a:rPr sz="700" b="0" i="0">
-                <a:solidFill>
-                  <a:srgbClr val="5A6472"/>
-                </a:solidFill>
-                <a:latin typeface="Inter"/>
-              </a:rPr>
-              <a:t>bis.py, fires on failure</a:t>
-            </a:r>
-          </a:p>
-        </p:txBody>
-      </p:sp>
-      <p:sp>
-        <p:nvSpPr>
-          <p:cNvPr id="23" name="Rounded Rectangle 22"/>
-          <p:cNvSpPr/>
-          <p:nvPr/>
-        </p:nvSpPr>
-        <p:spPr>
-          <a:xfrm>
-            <a:off x="777240" y="3648456"/>
-            <a:ext cx="1426464" cy="585216"/>
-          </a:xfrm>
-          <a:prstGeom prst="roundRect">
-            <a:avLst>
-              <a:gd name="adj" fmla="val 12000"/>
-            </a:avLst>
-          </a:prstGeom>
-          <a:solidFill>
-            <a:srgbClr val="FFFFFF"/>
-          </a:solidFill>
-          <a:ln w="9525">
-            <a:solidFill>
-              <a:srgbClr val="D7DEEA"/>
-            </a:solidFill>
-          </a:ln>
-          <a:effectLst/>
-        </p:spPr>
-        <p:style>
-          <a:lnRef idx="1">
-            <a:schemeClr val="accent1"/>
-          </a:lnRef>
-          <a:fillRef idx="3">
-            <a:schemeClr val="accent1"/>
-          </a:fillRef>
-          <a:effectRef idx="2">
-            <a:schemeClr val="accent1"/>
-          </a:effectRef>
-          <a:fontRef idx="minor">
-            <a:schemeClr val="lt1"/>
-          </a:fontRef>
-        </p:style>
-        <p:txBody>
-          <a:bodyPr rtlCol="0" anchor="ctr"/>
-          <a:lstStyle/>
-          <a:p>
-            <a:pPr algn="ctr"/>
-            <a:endParaRPr/>
-          </a:p>
-        </p:txBody>
-      </p:sp>
-      <p:pic>
-        <p:nvPicPr>
-          <p:cNvPr id="24" name="Picture 23" descr="LuGlobe_b.png"/>
-          <p:cNvPicPr>
-            <a:picLocks noChangeAspect="1"/>
-          </p:cNvPicPr>
-          <p:nvPr/>
-        </p:nvPicPr>
-        <p:blipFill>
-          <a:blip r:embed="rId5"/>
-          <a:stretch>
-            <a:fillRect/>
-          </a:stretch>
-        </p:blipFill>
-        <p:spPr>
-          <a:xfrm>
-            <a:off x="868680" y="3739896"/>
-            <a:ext cx="182880" cy="182880"/>
-          </a:xfrm>
-          <a:prstGeom prst="rect">
-            <a:avLst/>
-          </a:prstGeom>
-        </p:spPr>
-      </p:pic>
-      <p:sp>
-        <p:nvSpPr>
-          <p:cNvPr id="25" name="TextBox 24"/>
-          <p:cNvSpPr txBox="1"/>
-          <p:nvPr/>
-        </p:nvSpPr>
-        <p:spPr>
-          <a:xfrm>
-            <a:off x="1106424" y="3749040"/>
-            <a:ext cx="1042416" cy="164592"/>
-          </a:xfrm>
-          <a:prstGeom prst="rect">
-            <a:avLst/>
-          </a:prstGeom>
-          <a:noFill/>
-        </p:spPr>
-        <p:txBody>
-          <a:bodyPr wrap="square" lIns="0" tIns="0" rIns="0" bIns="0" anchor="t">
-            <a:noAutofit/>
-          </a:bodyPr>
-          <a:lstStyle/>
-          <a:p>
-            <a:pPr algn="l"/>
-            <a:r>
-              <a:rPr sz="800" b="1" i="0">
-                <a:solidFill>
-                  <a:srgbClr val="1A1A1E"/>
-                </a:solidFill>
-                <a:latin typeface="Inter"/>
-              </a:rPr>
-              <a:t>Browser</a:t>
-            </a:r>
-          </a:p>
-        </p:txBody>
-      </p:sp>
-      <p:sp>
-        <p:nvSpPr>
-          <p:cNvPr id="26" name="TextBox 25"/>
-          <p:cNvSpPr txBox="1"/>
-          <p:nvPr/>
-        </p:nvSpPr>
-        <p:spPr>
-          <a:xfrm>
-            <a:off x="868680" y="3986784"/>
-            <a:ext cx="1261872" cy="182880"/>
-          </a:xfrm>
-          <a:prstGeom prst="rect">
-            <a:avLst/>
-          </a:prstGeom>
-          <a:noFill/>
-        </p:spPr>
-        <p:txBody>
-          <a:bodyPr wrap="square" lIns="0" tIns="0" rIns="0" bIns="0" anchor="t">
-            <a:noAutofit/>
-          </a:bodyPr>
-          <a:lstStyle/>
-          <a:p>
-            <a:pPr algn="l"/>
-            <a:r>
-              <a:rPr sz="700" b="0" i="0">
-                <a:solidFill>
-                  <a:srgbClr val="5A6472"/>
-                </a:solidFill>
-                <a:latin typeface="Inter"/>
-              </a:rPr>
-              <a:t>Selenium or Playwright</a:t>
-            </a:r>
-          </a:p>
-        </p:txBody>
-      </p:sp>
-      <p:cxnSp>
-        <p:nvCxnSpPr>
-          <p:cNvPr id="27" name="Connector 26"/>
-          <p:cNvCxnSpPr/>
-          <p:nvPr/>
-        </p:nvCxnSpPr>
-        <p:spPr>
-          <a:xfrm>
-            <a:off x="1490472" y="2295144"/>
-            <a:ext cx="0" cy="384048"/>
-          </a:xfrm>
-          <a:prstGeom prst="line">
-            <a:avLst/>
-          </a:prstGeom>
-          <a:ln w="12700">
-            <a:solidFill>
-              <a:srgbClr val="5A6472"/>
-            </a:solidFill>
-            <a:tailEnd type="triangle" w="med" len="med"/>
-          </a:ln>
-        </p:spPr>
-        <p:style>
-          <a:lnRef idx="2">
-            <a:schemeClr val="accent1"/>
-          </a:lnRef>
-          <a:fillRef idx="0">
-            <a:schemeClr val="accent1"/>
-          </a:fillRef>
-          <a:effectRef idx="1">
-            <a:schemeClr val="accent1"/>
-          </a:effectRef>
-          <a:fontRef idx="minor">
-            <a:schemeClr val="tx1"/>
-          </a:fontRef>
-        </p:style>
-      </p:cxnSp>
-      <p:sp>
-        <p:nvSpPr>
-          <p:cNvPr id="28" name="TextBox 27"/>
-          <p:cNvSpPr txBox="1"/>
-          <p:nvPr/>
-        </p:nvSpPr>
-        <p:spPr>
-          <a:xfrm>
-            <a:off x="1563624" y="2404872"/>
-            <a:ext cx="731520" cy="146304"/>
-          </a:xfrm>
-          <a:prstGeom prst="rect">
-            <a:avLst/>
-          </a:prstGeom>
-          <a:noFill/>
-        </p:spPr>
-        <p:txBody>
-          <a:bodyPr wrap="square" lIns="0" tIns="0" rIns="0" bIns="0" anchor="t">
-            <a:noAutofit/>
-          </a:bodyPr>
-          <a:lstStyle/>
-          <a:p>
-            <a:pPr algn="l"/>
-            <a:r>
-              <a:rPr sz="650" b="0" i="0">
-                <a:solidFill>
-                  <a:srgbClr val="5A6472"/>
-                </a:solidFill>
-                <a:latin typeface="JetBrains Mono"/>
-              </a:rPr>
-              <a:t>find()</a:t>
-            </a:r>
-          </a:p>
-        </p:txBody>
-      </p:sp>
-      <p:cxnSp>
-        <p:nvCxnSpPr>
-          <p:cNvPr id="29" name="Connector 28"/>
-          <p:cNvCxnSpPr/>
-          <p:nvPr/>
-        </p:nvCxnSpPr>
-        <p:spPr>
-          <a:xfrm>
-            <a:off x="1490472" y="3264408"/>
-            <a:ext cx="0" cy="384048"/>
-          </a:xfrm>
-          <a:prstGeom prst="line">
-            <a:avLst/>
-          </a:prstGeom>
-          <a:ln w="12700">
-            <a:solidFill>
-              <a:srgbClr val="5A6472"/>
-            </a:solidFill>
-            <a:headEnd type="triangle" w="med" len="med"/>
-            <a:tailEnd type="triangle" w="med" len="med"/>
-          </a:ln>
-        </p:spPr>
-        <p:style>
-          <a:lnRef idx="2">
-            <a:schemeClr val="accent1"/>
-          </a:lnRef>
-          <a:fillRef idx="0">
-            <a:schemeClr val="accent1"/>
-          </a:fillRef>
-          <a:effectRef idx="1">
-            <a:schemeClr val="accent1"/>
-          </a:effectRef>
-          <a:fontRef idx="minor">
-            <a:schemeClr val="tx1"/>
-          </a:fontRef>
-        </p:style>
-      </p:cxnSp>
-      <p:sp>
-        <p:nvSpPr>
-          <p:cNvPr id="30" name="TextBox 29"/>
-          <p:cNvSpPr txBox="1"/>
-          <p:nvPr/>
-        </p:nvSpPr>
-        <p:spPr>
-          <a:xfrm>
-            <a:off x="1563624" y="3374136"/>
-            <a:ext cx="822960" cy="146304"/>
-          </a:xfrm>
-          <a:prstGeom prst="rect">
-            <a:avLst/>
-          </a:prstGeom>
-          <a:noFill/>
-        </p:spPr>
-        <p:txBody>
-          <a:bodyPr wrap="square" lIns="0" tIns="0" rIns="0" bIns="0" anchor="t">
-            <a:noAutofit/>
-          </a:bodyPr>
-          <a:lstStyle/>
-          <a:p>
-            <a:pPr algn="l"/>
-            <a:r>
-              <a:rPr sz="650" b="0" i="0">
-                <a:solidFill>
-                  <a:srgbClr val="5A6472"/>
-                </a:solidFill>
-                <a:latin typeface="JetBrains Mono"/>
-              </a:rPr>
-              <a:t>harvest, bind</a:t>
-            </a:r>
-          </a:p>
-        </p:txBody>
-      </p:sp>
-      <p:sp>
-        <p:nvSpPr>
-          <p:cNvPr id="31" name="Rounded Rectangle 30"/>
-          <p:cNvSpPr/>
-          <p:nvPr/>
-        </p:nvSpPr>
-        <p:spPr>
-          <a:xfrm>
-            <a:off x="2971800" y="1325880"/>
-            <a:ext cx="3017520" cy="3200400"/>
-          </a:xfrm>
-          <a:prstGeom prst="roundRect">
-            <a:avLst>
-              <a:gd name="adj" fmla="val 5000"/>
+              <a:gd name="adj" fmla="val 3000"/>
             </a:avLst>
           </a:prstGeom>
           <a:solidFill>
@@ -11931,74 +11370,276 @@
           </a:ln>
           <a:effectLst/>
         </p:spPr>
-        <p:style>
-          <a:lnRef idx="1">
-            <a:schemeClr val="accent1"/>
-          </a:lnRef>
-          <a:fillRef idx="3">
-            <a:schemeClr val="accent1"/>
-          </a:fillRef>
-          <a:effectRef idx="2">
-            <a:schemeClr val="accent1"/>
-          </a:effectRef>
-          <a:fontRef idx="minor">
-            <a:schemeClr val="lt1"/>
-          </a:fontRef>
-        </p:style>
-        <p:txBody>
-          <a:bodyPr rtlCol="0" anchor="ctr"/>
-          <a:lstStyle/>
-          <a:p>
-            <a:pPr algn="ctr"/>
-            <a:endParaRPr/>
-          </a:p>
-        </p:txBody>
-      </p:sp>
-      <p:sp>
-        <p:nvSpPr>
-          <p:cNvPr id="32" name="TextBox 31"/>
-          <p:cNvSpPr txBox="1"/>
-          <p:nvPr/>
-        </p:nvSpPr>
-        <p:spPr>
-          <a:xfrm>
-            <a:off x="3081528" y="1417320"/>
-            <a:ext cx="2286000" cy="146304"/>
-          </a:xfrm>
-          <a:prstGeom prst="rect">
-            <a:avLst/>
-          </a:prstGeom>
-          <a:noFill/>
-        </p:spPr>
-        <p:txBody>
-          <a:bodyPr wrap="square" lIns="0" tIns="0" rIns="0" bIns="0" anchor="t">
-            <a:noAutofit/>
-          </a:bodyPr>
-          <a:lstStyle/>
-          <a:p>
-            <a:pPr algn="l"/>
-            <a:r>
-              <a:rPr sz="650" b="1" i="0" spc="90">
+        <p:txBody>
+          <a:bodyPr wrap="square" lIns="0" tIns="0" rIns="0" bIns="0" rtlCol="0" anchor="ctr">
+            <a:noAutofit/>
+          </a:bodyPr>
+          <a:lstStyle/>
+          <a:p>
+            <a:endParaRPr lang="en-US"/>
+          </a:p>
+        </p:txBody>
+      </p:sp>
+      <p:sp>
+        <p:nvSpPr>
+          <p:cNvPr id="204" name="REFLEX AGENT HOST  ·  ONE GPU"/>
+          <p:cNvSpPr txBox="1"/>
+          <p:nvPr/>
+        </p:nvSpPr>
+        <p:spPr>
+          <a:xfrm>
+            <a:off x="3044952" y="1371600"/>
+            <a:ext cx="2743200" cy="118872"/>
+          </a:xfrm>
+          <a:prstGeom prst="rect">
+            <a:avLst/>
+          </a:prstGeom>
+          <a:noFill/>
+        </p:spPr>
+        <p:txBody>
+          <a:bodyPr wrap="square" lIns="0" tIns="0" rIns="0" bIns="0" anchor="t">
+            <a:noAutofit/>
+          </a:bodyPr>
+          <a:lstStyle/>
+          <a:p>
+            <a:pPr algn="l">
+              <a:lnSpc>
+                <a:spcPct val="100000"/>
+              </a:lnSpc>
+              <a:spcBef>
+                <a:spcPts val="0"/>
+              </a:spcBef>
+            </a:pPr>
+            <a:r>
+              <a:rPr lang="en-US" sz="600" b="1" i="0" spc="110" dirty="0">
                 <a:solidFill>
                   <a:srgbClr val="1428A0"/>
                 </a:solidFill>
                 <a:latin typeface="Inter"/>
               </a:rPr>
-              <a:t>HEALING AGENT HOST  ·  ONE GPU</a:t>
-            </a:r>
-          </a:p>
-        </p:txBody>
-      </p:sp>
-      <p:sp>
-        <p:nvSpPr>
-          <p:cNvPr id="41" name="Rounded Rectangle 40"/>
+              <a:t>REFLEX AGENT HOST  ·  ONE GPU</a:t>
+            </a:r>
+          </a:p>
+        </p:txBody>
+      </p:sp>
+      <p:sp>
+        <p:nvSpPr>
+          <p:cNvPr id="205" name="Automation script"/>
           <p:cNvSpPr/>
           <p:nvPr/>
         </p:nvSpPr>
         <p:spPr>
           <a:xfrm>
-            <a:off x="3081528" y="2679192"/>
-            <a:ext cx="1298448" cy="585216"/>
+            <a:off x="758952" y="1572768"/>
+            <a:ext cx="1581912" cy="420624"/>
+          </a:xfrm>
+          <a:prstGeom prst="roundRect">
+            <a:avLst>
+              <a:gd name="adj" fmla="val 12000"/>
+            </a:avLst>
+          </a:prstGeom>
+          <a:solidFill>
+            <a:srgbClr val="FFFFFF"/>
+          </a:solidFill>
+          <a:ln w="9525">
+            <a:solidFill>
+              <a:srgbClr val="D7DEEA"/>
+            </a:solidFill>
+          </a:ln>
+          <a:effectLst/>
+        </p:spPr>
+        <p:txBody>
+          <a:bodyPr wrap="square" lIns="0" tIns="0" rIns="0" bIns="0" rtlCol="0" anchor="ctr">
+            <a:noAutofit/>
+          </a:bodyPr>
+          <a:lstStyle/>
+          <a:p>
+            <a:endParaRPr lang="en-US"/>
+          </a:p>
+        </p:txBody>
+      </p:sp>
+      <p:pic>
+        <p:nvPicPr>
+          <p:cNvPr id="206" name="Automation script icon"/>
+          <p:cNvPicPr>
+            <a:picLocks noChangeAspect="1"/>
+          </p:cNvPicPr>
+          <p:nvPr/>
+        </p:nvPicPr>
+        <p:blipFill>
+          <a:blip r:embed="rId3"/>
+          <a:stretch>
+            <a:fillRect/>
+          </a:stretch>
+        </p:blipFill>
+        <p:spPr>
+          <a:xfrm>
+            <a:off x="850392" y="1655064"/>
+            <a:ext cx="164592" cy="164592"/>
+          </a:xfrm>
+          <a:prstGeom prst="rect">
+            <a:avLst/>
+          </a:prstGeom>
+        </p:spPr>
+      </p:pic>
+      <p:sp>
+        <p:nvSpPr>
+          <p:cNvPr id="207" name="Automation script"/>
+          <p:cNvSpPr txBox="1"/>
+          <p:nvPr/>
+        </p:nvSpPr>
+        <p:spPr>
+          <a:xfrm>
+            <a:off x="1069848" y="1650492"/>
+            <a:ext cx="1216152" cy="155448"/>
+          </a:xfrm>
+          <a:prstGeom prst="rect">
+            <a:avLst/>
+          </a:prstGeom>
+          <a:noFill/>
+        </p:spPr>
+        <p:txBody>
+          <a:bodyPr wrap="square" lIns="0" tIns="0" rIns="0" bIns="0" anchor="t">
+            <a:noAutofit/>
+          </a:bodyPr>
+          <a:lstStyle/>
+          <a:p>
+            <a:pPr algn="l">
+              <a:lnSpc>
+                <a:spcPct val="100000"/>
+              </a:lnSpc>
+              <a:spcBef>
+                <a:spcPts val="0"/>
+              </a:spcBef>
+            </a:pPr>
+            <a:r>
+              <a:rPr lang="en-US" sz="800" b="1" i="0" spc="0" dirty="0">
+                <a:solidFill>
+                  <a:srgbClr val="1A1A1E"/>
+                </a:solidFill>
+                <a:latin typeface="Inter"/>
+              </a:rPr>
+              <a:t>Automation script</a:t>
+            </a:r>
+          </a:p>
+        </p:txBody>
+      </p:sp>
+      <p:sp>
+        <p:nvSpPr>
+          <p:cNvPr id="208" name="Automation script detail"/>
+          <p:cNvSpPr txBox="1"/>
+          <p:nvPr/>
+        </p:nvSpPr>
+        <p:spPr>
+          <a:xfrm>
+            <a:off x="850392" y="1856232"/>
+            <a:ext cx="1417320" cy="109728"/>
+          </a:xfrm>
+          <a:prstGeom prst="rect">
+            <a:avLst/>
+          </a:prstGeom>
+          <a:noFill/>
+        </p:spPr>
+        <p:txBody>
+          <a:bodyPr wrap="square" lIns="0" tIns="0" rIns="0" bIns="0" anchor="t">
+            <a:noAutofit/>
+          </a:bodyPr>
+          <a:lstStyle/>
+          <a:p>
+            <a:pPr algn="l">
+              <a:lnSpc>
+                <a:spcPct val="100000"/>
+              </a:lnSpc>
+              <a:spcBef>
+                <a:spcPts val="0"/>
+              </a:spcBef>
+            </a:pPr>
+            <a:r>
+              <a:rPr lang="en-US" sz="650" b="0" i="0" spc="0" dirty="0">
+                <a:solidFill>
+                  <a:srgbClr val="5A6472"/>
+                </a:solidFill>
+                <a:latin typeface="Inter"/>
+              </a:rPr>
+              <a:t>existing, unchanged</a:t>
+            </a:r>
+          </a:p>
+        </p:txBody>
+      </p:sp>
+      <p:cxnSp>
+        <p:nvCxnSpPr>
+          <p:cNvPr id="209" name="find fails"/>
+          <p:cNvCxnSpPr/>
+          <p:nvPr/>
+        </p:nvCxnSpPr>
+        <p:spPr>
+          <a:xfrm>
+            <a:off x="1549908" y="1993392"/>
+            <a:ext cx="0" cy="219456"/>
+          </a:xfrm>
+          <a:prstGeom prst="line">
+            <a:avLst/>
+          </a:prstGeom>
+          <a:ln w="9525">
+            <a:solidFill>
+              <a:srgbClr val="8A94A6"/>
+            </a:solidFill>
+            <a:tailEnd type="triangle" w="sm" len="sm"/>
+          </a:ln>
+        </p:spPr>
+      </p:cxnSp>
+      <p:sp>
+        <p:nvSpPr>
+          <p:cNvPr id="210" name="find fails label"/>
+          <p:cNvSpPr txBox="1"/>
+          <p:nvPr/>
+        </p:nvSpPr>
+        <p:spPr>
+          <a:xfrm>
+            <a:off x="1613916" y="2043684"/>
+            <a:ext cx="822960" cy="109728"/>
+          </a:xfrm>
+          <a:prstGeom prst="rect">
+            <a:avLst/>
+          </a:prstGeom>
+          <a:noFill/>
+        </p:spPr>
+        <p:txBody>
+          <a:bodyPr wrap="square" lIns="0" tIns="0" rIns="0" bIns="0" anchor="t">
+            <a:noAutofit/>
+          </a:bodyPr>
+          <a:lstStyle/>
+          <a:p>
+            <a:pPr algn="l">
+              <a:lnSpc>
+                <a:spcPct val="100000"/>
+              </a:lnSpc>
+              <a:spcBef>
+                <a:spcPts val="0"/>
+              </a:spcBef>
+            </a:pPr>
+            <a:r>
+              <a:rPr lang="en-US" sz="600" b="0" i="0" spc="0" dirty="0">
+                <a:solidFill>
+                  <a:srgbClr val="5A6472"/>
+                </a:solidFill>
+                <a:latin typeface="JetBrains Mono"/>
+              </a:rPr>
+              <a:t>find() fails</a:t>
+            </a:r>
+          </a:p>
+        </p:txBody>
+      </p:sp>
+      <p:sp>
+        <p:nvSpPr>
+          <p:cNvPr id="211" name="Agent invoked"/>
+          <p:cNvSpPr/>
+          <p:nvPr/>
+        </p:nvSpPr>
+        <p:spPr>
+          <a:xfrm>
+            <a:off x="758952" y="2212848"/>
+            <a:ext cx="1581912" cy="1188720"/>
           </a:xfrm>
           <a:prstGeom prst="roundRect">
             <a:avLst>
@@ -12015,47 +11656,34 @@
           </a:ln>
           <a:effectLst/>
         </p:spPr>
-        <p:style>
-          <a:lnRef idx="1">
-            <a:schemeClr val="accent1"/>
-          </a:lnRef>
-          <a:fillRef idx="3">
-            <a:schemeClr val="accent1"/>
-          </a:fillRef>
-          <a:effectRef idx="2">
-            <a:schemeClr val="accent1"/>
-          </a:effectRef>
-          <a:fontRef idx="minor">
-            <a:schemeClr val="lt1"/>
-          </a:fontRef>
-        </p:style>
-        <p:txBody>
-          <a:bodyPr rtlCol="0" anchor="ctr"/>
-          <a:lstStyle/>
-          <a:p>
-            <a:pPr algn="ctr"/>
-            <a:endParaRPr/>
+        <p:txBody>
+          <a:bodyPr wrap="square" lIns="0" tIns="0" rIns="0" bIns="0" rtlCol="0" anchor="ctr">
+            <a:noAutofit/>
+          </a:bodyPr>
+          <a:lstStyle/>
+          <a:p>
+            <a:endParaRPr lang="en-US"/>
           </a:p>
         </p:txBody>
       </p:sp>
       <p:pic>
         <p:nvPicPr>
-          <p:cNvPr id="42" name="Picture 41" descr="LuServer_b.png"/>
+          <p:cNvPr id="212" name="Agent invoked icon"/>
           <p:cNvPicPr>
             <a:picLocks noChangeAspect="1"/>
           </p:cNvPicPr>
           <p:nvPr/>
         </p:nvPicPr>
         <p:blipFill>
-          <a:blip r:embed="rId6"/>
+          <a:blip r:embed="rId4"/>
           <a:stretch>
             <a:fillRect/>
           </a:stretch>
         </p:blipFill>
         <p:spPr>
           <a:xfrm>
-            <a:off x="3172968" y="2770632"/>
-            <a:ext cx="182880" cy="182880"/>
+            <a:off x="850392" y="2295144"/>
+            <a:ext cx="164592" cy="164592"/>
           </a:xfrm>
           <a:prstGeom prst="rect">
             <a:avLst/>
@@ -12064,84 +11692,527 @@
       </p:pic>
       <p:sp>
         <p:nvSpPr>
-          <p:cNvPr id="43" name="TextBox 42"/>
-          <p:cNvSpPr txBox="1"/>
-          <p:nvPr/>
-        </p:nvSpPr>
-        <p:spPr>
-          <a:xfrm>
-            <a:off x="3410712" y="2779776"/>
-            <a:ext cx="914400" cy="164592"/>
-          </a:xfrm>
-          <a:prstGeom prst="rect">
-            <a:avLst/>
-          </a:prstGeom>
-          <a:noFill/>
-        </p:spPr>
-        <p:txBody>
-          <a:bodyPr wrap="square" lIns="0" tIns="0" rIns="0" bIns="0" anchor="t">
-            <a:noAutofit/>
-          </a:bodyPr>
-          <a:lstStyle/>
-          <a:p>
-            <a:pPr algn="l"/>
-            <a:r>
-              <a:rPr sz="800" b="1" i="0">
+          <p:cNvPr id="213" name="Agent invoked"/>
+          <p:cNvSpPr txBox="1"/>
+          <p:nvPr/>
+        </p:nvSpPr>
+        <p:spPr>
+          <a:xfrm>
+            <a:off x="1069848" y="2290572"/>
+            <a:ext cx="1216152" cy="155448"/>
+          </a:xfrm>
+          <a:prstGeom prst="rect">
+            <a:avLst/>
+          </a:prstGeom>
+          <a:noFill/>
+        </p:spPr>
+        <p:txBody>
+          <a:bodyPr wrap="square" lIns="0" tIns="0" rIns="0" bIns="0" anchor="t">
+            <a:noAutofit/>
+          </a:bodyPr>
+          <a:lstStyle/>
+          <a:p>
+            <a:pPr algn="l">
+              <a:lnSpc>
+                <a:spcPct val="100000"/>
+              </a:lnSpc>
+              <a:spcBef>
+                <a:spcPts val="0"/>
+              </a:spcBef>
+            </a:pPr>
+            <a:r>
+              <a:rPr lang="en-US" sz="800" b="1" i="0" spc="0" dirty="0">
                 <a:solidFill>
                   <a:srgbClr val="1A1A1E"/>
                 </a:solidFill>
                 <a:latin typeface="Inter"/>
               </a:rPr>
-              <a:t>Healing Agent</a:t>
-            </a:r>
-          </a:p>
-        </p:txBody>
-      </p:sp>
-      <p:sp>
-        <p:nvSpPr>
-          <p:cNvPr id="44" name="TextBox 43"/>
-          <p:cNvSpPr txBox="1"/>
-          <p:nvPr/>
-        </p:nvSpPr>
-        <p:spPr>
-          <a:xfrm>
-            <a:off x="3172968" y="3017520"/>
-            <a:ext cx="1133856" cy="182880"/>
-          </a:xfrm>
-          <a:prstGeom prst="rect">
-            <a:avLst/>
-          </a:prstGeom>
-          <a:noFill/>
-        </p:spPr>
-        <p:txBody>
-          <a:bodyPr wrap="square" lIns="0" tIns="0" rIns="0" bIns="0" anchor="t">
-            <a:noAutofit/>
-          </a:bodyPr>
-          <a:lstStyle/>
-          <a:p>
-            <a:pPr algn="l"/>
-            <a:r>
-              <a:rPr sz="700" b="0" i="0">
+              <a:t>Agent invoked</a:t>
+            </a:r>
+          </a:p>
+        </p:txBody>
+      </p:sp>
+      <p:sp>
+        <p:nvSpPr>
+          <p:cNvPr id="214" name="Agent invoked detail"/>
+          <p:cNvSpPr txBox="1"/>
+          <p:nvPr/>
+        </p:nvSpPr>
+        <p:spPr>
+          <a:xfrm>
+            <a:off x="850392" y="2496312"/>
+            <a:ext cx="1417320" cy="109728"/>
+          </a:xfrm>
+          <a:prstGeom prst="rect">
+            <a:avLst/>
+          </a:prstGeom>
+          <a:noFill/>
+        </p:spPr>
+        <p:txBody>
+          <a:bodyPr wrap="square" lIns="0" tIns="0" rIns="0" bIns="0" anchor="t">
+            <a:noAutofit/>
+          </a:bodyPr>
+          <a:lstStyle/>
+          <a:p>
+            <a:pPr algn="l">
+              <a:lnSpc>
+                <a:spcPct val="100000"/>
+              </a:lnSpc>
+              <a:spcBef>
+                <a:spcPts val="0"/>
+              </a:spcBef>
+            </a:pPr>
+            <a:r>
+              <a:rPr lang="en-US" sz="650" b="0" i="0" spc="0" dirty="0">
                 <a:solidFill>
                   <a:srgbClr val="5A6472"/>
                 </a:solidFill>
                 <a:latin typeface="Inter"/>
               </a:rPr>
-              <a:t>FastAPI over HTTPS</a:t>
-            </a:r>
-          </a:p>
-        </p:txBody>
-      </p:sp>
-      <p:sp>
-        <p:nvSpPr>
-          <p:cNvPr id="45" name="Rounded Rectangle 44"/>
+              <a:t>bis.py · runs the page tools</a:t>
+            </a:r>
+          </a:p>
+        </p:txBody>
+      </p:sp>
+      <p:sp>
+        <p:nvSpPr>
+          <p:cNvPr id="215" name="PAGE TOOLS"/>
+          <p:cNvSpPr txBox="1"/>
+          <p:nvPr/>
+        </p:nvSpPr>
+        <p:spPr>
+          <a:xfrm>
+            <a:off x="850392" y="2656332"/>
+            <a:ext cx="1097280" cy="100584"/>
+          </a:xfrm>
+          <a:prstGeom prst="rect">
+            <a:avLst/>
+          </a:prstGeom>
+          <a:noFill/>
+        </p:spPr>
+        <p:txBody>
+          <a:bodyPr wrap="square" lIns="0" tIns="0" rIns="0" bIns="0" anchor="t">
+            <a:noAutofit/>
+          </a:bodyPr>
+          <a:lstStyle/>
+          <a:p>
+            <a:pPr algn="l">
+              <a:lnSpc>
+                <a:spcPct val="100000"/>
+              </a:lnSpc>
+              <a:spcBef>
+                <a:spcPts val="0"/>
+              </a:spcBef>
+            </a:pPr>
+            <a:r>
+              <a:rPr lang="en-US" sz="500" b="1" i="0" spc="120" dirty="0">
+                <a:solidFill>
+                  <a:srgbClr val="5A6472"/>
+                </a:solidFill>
+                <a:latin typeface="Inter"/>
+              </a:rPr>
+              <a:t>PAGE TOOLS</a:t>
+            </a:r>
+          </a:p>
+        </p:txBody>
+      </p:sp>
+      <p:sp>
+        <p:nvSpPr>
+          <p:cNvPr id="216" name="Tool: Step Reader"/>
           <p:cNvSpPr/>
           <p:nvPr/>
         </p:nvSpPr>
         <p:spPr>
           <a:xfrm>
-            <a:off x="4636008" y="2679192"/>
-            <a:ext cx="1298448" cy="585216"/>
+            <a:off x="841248" y="2779776"/>
+            <a:ext cx="713232" cy="128016"/>
+          </a:xfrm>
+          <a:prstGeom prst="roundRect">
+            <a:avLst>
+              <a:gd name="adj" fmla="val 50000"/>
+            </a:avLst>
+          </a:prstGeom>
+          <a:solidFill>
+            <a:srgbClr val="FFFFFF"/>
+          </a:solidFill>
+          <a:ln w="9525">
+            <a:solidFill>
+              <a:srgbClr val="1428A0"/>
+            </a:solidFill>
+          </a:ln>
+          <a:effectLst/>
+        </p:spPr>
+        <p:txBody>
+          <a:bodyPr wrap="square" lIns="0" tIns="0" rIns="0" bIns="0" rtlCol="0" anchor="ctr">
+            <a:noAutofit/>
+          </a:bodyPr>
+          <a:lstStyle/>
+          <a:p>
+            <a:pPr algn="ctr">
+              <a:lnSpc>
+                <a:spcPct val="100000"/>
+              </a:lnSpc>
+              <a:spcBef>
+                <a:spcPts val="0"/>
+              </a:spcBef>
+            </a:pPr>
+            <a:r>
+              <a:rPr lang="en-US" sz="550" b="1" i="0" spc="0" dirty="0">
+                <a:solidFill>
+                  <a:srgbClr val="1428A0"/>
+                </a:solidFill>
+                <a:latin typeface="Inter"/>
+              </a:rPr>
+              <a:t>Step Reader</a:t>
+            </a:r>
+          </a:p>
+        </p:txBody>
+      </p:sp>
+      <p:sp>
+        <p:nvSpPr>
+          <p:cNvPr id="217" name="Tool: Page Scanner"/>
+          <p:cNvSpPr/>
+          <p:nvPr/>
+        </p:nvSpPr>
+        <p:spPr>
+          <a:xfrm>
+            <a:off x="1581912" y="2779776"/>
+            <a:ext cx="713232" cy="128016"/>
+          </a:xfrm>
+          <a:prstGeom prst="roundRect">
+            <a:avLst>
+              <a:gd name="adj" fmla="val 50000"/>
+            </a:avLst>
+          </a:prstGeom>
+          <a:solidFill>
+            <a:srgbClr val="FFFFFF"/>
+          </a:solidFill>
+          <a:ln w="9525">
+            <a:solidFill>
+              <a:srgbClr val="1428A0"/>
+            </a:solidFill>
+          </a:ln>
+          <a:effectLst/>
+        </p:spPr>
+        <p:txBody>
+          <a:bodyPr wrap="square" lIns="0" tIns="0" rIns="0" bIns="0" rtlCol="0" anchor="ctr">
+            <a:noAutofit/>
+          </a:bodyPr>
+          <a:lstStyle/>
+          <a:p>
+            <a:pPr algn="ctr">
+              <a:lnSpc>
+                <a:spcPct val="100000"/>
+              </a:lnSpc>
+              <a:spcBef>
+                <a:spcPts val="0"/>
+              </a:spcBef>
+            </a:pPr>
+            <a:r>
+              <a:rPr lang="en-US" sz="550" b="1" i="0" spc="0" dirty="0">
+                <a:solidFill>
+                  <a:srgbClr val="1428A0"/>
+                </a:solidFill>
+                <a:latin typeface="Inter"/>
+              </a:rPr>
+              <a:t>Page Scanner</a:t>
+            </a:r>
+          </a:p>
+        </p:txBody>
+      </p:sp>
+      <p:sp>
+        <p:nvSpPr>
+          <p:cNvPr id="218" name="Tool: Presence Check"/>
+          <p:cNvSpPr/>
+          <p:nvPr/>
+        </p:nvSpPr>
+        <p:spPr>
+          <a:xfrm>
+            <a:off x="841248" y="2930652"/>
+            <a:ext cx="713232" cy="128016"/>
+          </a:xfrm>
+          <a:prstGeom prst="roundRect">
+            <a:avLst>
+              <a:gd name="adj" fmla="val 50000"/>
+            </a:avLst>
+          </a:prstGeom>
+          <a:solidFill>
+            <a:srgbClr val="FFFFFF"/>
+          </a:solidFill>
+          <a:ln w="9525">
+            <a:solidFill>
+              <a:srgbClr val="1428A0"/>
+            </a:solidFill>
+          </a:ln>
+          <a:effectLst/>
+        </p:spPr>
+        <p:txBody>
+          <a:bodyPr wrap="square" lIns="0" tIns="0" rIns="0" bIns="0" rtlCol="0" anchor="ctr">
+            <a:noAutofit/>
+          </a:bodyPr>
+          <a:lstStyle/>
+          <a:p>
+            <a:pPr algn="ctr">
+              <a:lnSpc>
+                <a:spcPct val="100000"/>
+              </a:lnSpc>
+              <a:spcBef>
+                <a:spcPts val="0"/>
+              </a:spcBef>
+            </a:pPr>
+            <a:r>
+              <a:rPr lang="en-US" sz="550" b="1" i="0" spc="0" dirty="0">
+                <a:solidFill>
+                  <a:srgbClr val="1428A0"/>
+                </a:solidFill>
+                <a:latin typeface="Inter"/>
+              </a:rPr>
+              <a:t>Presence Check</a:t>
+            </a:r>
+          </a:p>
+        </p:txBody>
+      </p:sp>
+      <p:sp>
+        <p:nvSpPr>
+          <p:cNvPr id="219" name="Tool: Wait &amp; Rescan"/>
+          <p:cNvSpPr/>
+          <p:nvPr/>
+        </p:nvSpPr>
+        <p:spPr>
+          <a:xfrm>
+            <a:off x="1581912" y="2930652"/>
+            <a:ext cx="713232" cy="128016"/>
+          </a:xfrm>
+          <a:prstGeom prst="roundRect">
+            <a:avLst>
+              <a:gd name="adj" fmla="val 50000"/>
+            </a:avLst>
+          </a:prstGeom>
+          <a:solidFill>
+            <a:srgbClr val="FFFFFF"/>
+          </a:solidFill>
+          <a:ln w="9525">
+            <a:solidFill>
+              <a:srgbClr val="1428A0"/>
+            </a:solidFill>
+          </a:ln>
+          <a:effectLst/>
+        </p:spPr>
+        <p:txBody>
+          <a:bodyPr wrap="square" lIns="0" tIns="0" rIns="0" bIns="0" rtlCol="0" anchor="ctr">
+            <a:noAutofit/>
+          </a:bodyPr>
+          <a:lstStyle/>
+          <a:p>
+            <a:pPr algn="ctr">
+              <a:lnSpc>
+                <a:spcPct val="100000"/>
+              </a:lnSpc>
+              <a:spcBef>
+                <a:spcPts val="0"/>
+              </a:spcBef>
+            </a:pPr>
+            <a:r>
+              <a:rPr lang="en-US" sz="550" b="1" i="0" spc="0" dirty="0">
+                <a:solidFill>
+                  <a:srgbClr val="1428A0"/>
+                </a:solidFill>
+                <a:latin typeface="Inter"/>
+              </a:rPr>
+              <a:t>Wait &amp; Rescan</a:t>
+            </a:r>
+          </a:p>
+        </p:txBody>
+      </p:sp>
+      <p:sp>
+        <p:nvSpPr>
+          <p:cNvPr id="220" name="Tool: Selector Options"/>
+          <p:cNvSpPr/>
+          <p:nvPr/>
+        </p:nvSpPr>
+        <p:spPr>
+          <a:xfrm>
+            <a:off x="841248" y="3081528"/>
+            <a:ext cx="713232" cy="128016"/>
+          </a:xfrm>
+          <a:prstGeom prst="roundRect">
+            <a:avLst>
+              <a:gd name="adj" fmla="val 50000"/>
+            </a:avLst>
+          </a:prstGeom>
+          <a:solidFill>
+            <a:srgbClr val="FFFFFF"/>
+          </a:solidFill>
+          <a:ln w="9525">
+            <a:solidFill>
+              <a:srgbClr val="1428A0"/>
+            </a:solidFill>
+          </a:ln>
+          <a:effectLst/>
+        </p:spPr>
+        <p:txBody>
+          <a:bodyPr wrap="square" lIns="0" tIns="0" rIns="0" bIns="0" rtlCol="0" anchor="ctr">
+            <a:noAutofit/>
+          </a:bodyPr>
+          <a:lstStyle/>
+          <a:p>
+            <a:pPr algn="ctr">
+              <a:lnSpc>
+                <a:spcPct val="100000"/>
+              </a:lnSpc>
+              <a:spcBef>
+                <a:spcPts val="0"/>
+              </a:spcBef>
+            </a:pPr>
+            <a:r>
+              <a:rPr lang="en-US" sz="550" b="1" i="0" spc="0" dirty="0">
+                <a:solidFill>
+                  <a:srgbClr val="1428A0"/>
+                </a:solidFill>
+                <a:latin typeface="Inter"/>
+              </a:rPr>
+              <a:t>Selector Options</a:t>
+            </a:r>
+          </a:p>
+        </p:txBody>
+      </p:sp>
+      <p:sp>
+        <p:nvSpPr>
+          <p:cNvPr id="221" name="Tool: Ask a Person"/>
+          <p:cNvSpPr/>
+          <p:nvPr/>
+        </p:nvSpPr>
+        <p:spPr>
+          <a:xfrm>
+            <a:off x="1581912" y="3081528"/>
+            <a:ext cx="713232" cy="128016"/>
+          </a:xfrm>
+          <a:prstGeom prst="roundRect">
+            <a:avLst>
+              <a:gd name="adj" fmla="val 50000"/>
+            </a:avLst>
+          </a:prstGeom>
+          <a:solidFill>
+            <a:srgbClr val="FFFFFF"/>
+          </a:solidFill>
+          <a:ln w="9525">
+            <a:solidFill>
+              <a:srgbClr val="1428A0"/>
+            </a:solidFill>
+          </a:ln>
+          <a:effectLst/>
+        </p:spPr>
+        <p:txBody>
+          <a:bodyPr wrap="square" lIns="0" tIns="0" rIns="0" bIns="0" rtlCol="0" anchor="ctr">
+            <a:noAutofit/>
+          </a:bodyPr>
+          <a:lstStyle/>
+          <a:p>
+            <a:pPr algn="ctr">
+              <a:lnSpc>
+                <a:spcPct val="100000"/>
+              </a:lnSpc>
+              <a:spcBef>
+                <a:spcPts val="0"/>
+              </a:spcBef>
+            </a:pPr>
+            <a:r>
+              <a:rPr lang="en-US" sz="550" b="1" i="0" spc="0" dirty="0">
+                <a:solidFill>
+                  <a:srgbClr val="1428A0"/>
+                </a:solidFill>
+                <a:latin typeface="Inter"/>
+              </a:rPr>
+              <a:t>Ask a Person</a:t>
+            </a:r>
+          </a:p>
+        </p:txBody>
+      </p:sp>
+      <p:sp>
+        <p:nvSpPr>
+          <p:cNvPr id="222" name="Tool: Report Absent"/>
+          <p:cNvSpPr/>
+          <p:nvPr/>
+        </p:nvSpPr>
+        <p:spPr>
+          <a:xfrm>
+            <a:off x="841248" y="3232404"/>
+            <a:ext cx="713232" cy="128016"/>
+          </a:xfrm>
+          <a:prstGeom prst="roundRect">
+            <a:avLst>
+              <a:gd name="adj" fmla="val 50000"/>
+            </a:avLst>
+          </a:prstGeom>
+          <a:solidFill>
+            <a:srgbClr val="FFFFFF"/>
+          </a:solidFill>
+          <a:ln w="9525">
+            <a:solidFill>
+              <a:srgbClr val="1428A0"/>
+            </a:solidFill>
+          </a:ln>
+          <a:effectLst/>
+        </p:spPr>
+        <p:txBody>
+          <a:bodyPr wrap="square" lIns="0" tIns="0" rIns="0" bIns="0" rtlCol="0" anchor="ctr">
+            <a:noAutofit/>
+          </a:bodyPr>
+          <a:lstStyle/>
+          <a:p>
+            <a:pPr algn="ctr">
+              <a:lnSpc>
+                <a:spcPct val="100000"/>
+              </a:lnSpc>
+              <a:spcBef>
+                <a:spcPts val="0"/>
+              </a:spcBef>
+            </a:pPr>
+            <a:r>
+              <a:rPr lang="en-US" sz="550" b="1" i="0" spc="0" dirty="0">
+                <a:solidFill>
+                  <a:srgbClr val="1428A0"/>
+                </a:solidFill>
+                <a:latin typeface="Inter"/>
+              </a:rPr>
+              <a:t>Report Absent</a:t>
+            </a:r>
+          </a:p>
+        </p:txBody>
+      </p:sp>
+      <p:cxnSp>
+        <p:nvCxnSpPr>
+          <p:cNvPr id="223" name="page tools act on the browser"/>
+          <p:cNvCxnSpPr/>
+          <p:nvPr/>
+        </p:nvCxnSpPr>
+        <p:spPr>
+          <a:xfrm>
+            <a:off x="1549908" y="3401568"/>
+            <a:ext cx="0" cy="128016"/>
+          </a:xfrm>
+          <a:prstGeom prst="line">
+            <a:avLst/>
+          </a:prstGeom>
+          <a:ln w="9525">
+            <a:solidFill>
+              <a:srgbClr val="8A94A6"/>
+            </a:solidFill>
+            <a:headEnd type="triangle" w="sm" len="sm"/>
+            <a:tailEnd type="triangle" w="sm" len="sm"/>
+          </a:ln>
+        </p:spPr>
+      </p:cxnSp>
+      <p:sp>
+        <p:nvSpPr>
+          <p:cNvPr id="224" name="Browser"/>
+          <p:cNvSpPr/>
+          <p:nvPr/>
+        </p:nvSpPr>
+        <p:spPr>
+          <a:xfrm>
+            <a:off x="758952" y="3529584"/>
+            <a:ext cx="1581912" cy="365760"/>
           </a:xfrm>
           <a:prstGeom prst="roundRect">
             <a:avLst>
@@ -12158,47 +12229,34 @@
           </a:ln>
           <a:effectLst/>
         </p:spPr>
-        <p:style>
-          <a:lnRef idx="1">
-            <a:schemeClr val="accent1"/>
-          </a:lnRef>
-          <a:fillRef idx="3">
-            <a:schemeClr val="accent1"/>
-          </a:fillRef>
-          <a:effectRef idx="2">
-            <a:schemeClr val="accent1"/>
-          </a:effectRef>
-          <a:fontRef idx="minor">
-            <a:schemeClr val="lt1"/>
-          </a:fontRef>
-        </p:style>
-        <p:txBody>
-          <a:bodyPr rtlCol="0" anchor="ctr"/>
-          <a:lstStyle/>
-          <a:p>
-            <a:pPr algn="ctr"/>
-            <a:endParaRPr/>
+        <p:txBody>
+          <a:bodyPr wrap="square" lIns="0" tIns="0" rIns="0" bIns="0" rtlCol="0" anchor="ctr">
+            <a:noAutofit/>
+          </a:bodyPr>
+          <a:lstStyle/>
+          <a:p>
+            <a:endParaRPr lang="en-US"/>
           </a:p>
         </p:txBody>
       </p:sp>
       <p:pic>
         <p:nvPicPr>
-          <p:cNvPr id="46" name="Picture 45" descr="LuListFilter_b.png"/>
+          <p:cNvPr id="225" name="Browser icon"/>
           <p:cNvPicPr>
             <a:picLocks noChangeAspect="1"/>
           </p:cNvPicPr>
           <p:nvPr/>
         </p:nvPicPr>
         <p:blipFill>
-          <a:blip r:embed="rId7"/>
+          <a:blip r:embed="rId5"/>
           <a:stretch>
             <a:fillRect/>
           </a:stretch>
         </p:blipFill>
         <p:spPr>
           <a:xfrm>
-            <a:off x="4727448" y="2770632"/>
-            <a:ext cx="182880" cy="182880"/>
+            <a:off x="850392" y="3630168"/>
+            <a:ext cx="164592" cy="164592"/>
           </a:xfrm>
           <a:prstGeom prst="rect">
             <a:avLst/>
@@ -12207,660 +12265,142 @@
       </p:pic>
       <p:sp>
         <p:nvSpPr>
-          <p:cNvPr id="47" name="TextBox 46"/>
-          <p:cNvSpPr txBox="1"/>
-          <p:nvPr/>
-        </p:nvSpPr>
-        <p:spPr>
-          <a:xfrm>
-            <a:off x="4965192" y="2779776"/>
-            <a:ext cx="914400" cy="164592"/>
-          </a:xfrm>
-          <a:prstGeom prst="rect">
-            <a:avLst/>
-          </a:prstGeom>
-          <a:noFill/>
-        </p:spPr>
-        <p:txBody>
-          <a:bodyPr wrap="square" lIns="0" tIns="0" rIns="0" bIns="0" anchor="t">
-            <a:noAutofit/>
-          </a:bodyPr>
-          <a:lstStyle/>
-          <a:p>
-            <a:pPr algn="l"/>
-            <a:r>
-              <a:rPr sz="800" b="1" i="0">
+          <p:cNvPr id="226" name="Browser"/>
+          <p:cNvSpPr txBox="1"/>
+          <p:nvPr/>
+        </p:nvSpPr>
+        <p:spPr>
+          <a:xfrm>
+            <a:off x="1069848" y="3589020"/>
+            <a:ext cx="1188720" cy="137160"/>
+          </a:xfrm>
+          <a:prstGeom prst="rect">
+            <a:avLst/>
+          </a:prstGeom>
+          <a:noFill/>
+        </p:spPr>
+        <p:txBody>
+          <a:bodyPr wrap="square" lIns="0" tIns="0" rIns="0" bIns="0" anchor="t">
+            <a:noAutofit/>
+          </a:bodyPr>
+          <a:lstStyle/>
+          <a:p>
+            <a:pPr algn="l">
+              <a:lnSpc>
+                <a:spcPct val="100000"/>
+              </a:lnSpc>
+              <a:spcBef>
+                <a:spcPts val="0"/>
+              </a:spcBef>
+            </a:pPr>
+            <a:r>
+              <a:rPr lang="en-US" sz="800" b="1" i="0" spc="0" dirty="0">
                 <a:solidFill>
                   <a:srgbClr val="1A1A1E"/>
                 </a:solidFill>
                 <a:latin typeface="Inter"/>
               </a:rPr>
-              <a:t>Similarity engine</a:t>
-            </a:r>
-          </a:p>
-        </p:txBody>
-      </p:sp>
-      <p:sp>
-        <p:nvSpPr>
-          <p:cNvPr id="48" name="TextBox 47"/>
-          <p:cNvSpPr txBox="1"/>
-          <p:nvPr/>
-        </p:nvSpPr>
-        <p:spPr>
-          <a:xfrm>
-            <a:off x="4727448" y="3017520"/>
-            <a:ext cx="1133856" cy="182880"/>
-          </a:xfrm>
-          <a:prstGeom prst="rect">
-            <a:avLst/>
-          </a:prstGeom>
-          <a:noFill/>
-        </p:spPr>
-        <p:txBody>
-          <a:bodyPr wrap="square" lIns="0" tIns="0" rIns="0" bIns="0" anchor="t">
-            <a:noAutofit/>
-          </a:bodyPr>
-          <a:lstStyle/>
-          <a:p>
-            <a:pPr algn="l"/>
-            <a:r>
-              <a:rPr sz="700" b="0" i="0">
+              <a:t>Browser</a:t>
+            </a:r>
+          </a:p>
+        </p:txBody>
+      </p:sp>
+      <p:sp>
+        <p:nvSpPr>
+          <p:cNvPr id="227" name="Browser detail"/>
+          <p:cNvSpPr txBox="1"/>
+          <p:nvPr/>
+        </p:nvSpPr>
+        <p:spPr>
+          <a:xfrm>
+            <a:off x="1069848" y="3735324"/>
+            <a:ext cx="1234440" cy="109728"/>
+          </a:xfrm>
+          <a:prstGeom prst="rect">
+            <a:avLst/>
+          </a:prstGeom>
+          <a:noFill/>
+        </p:spPr>
+        <p:txBody>
+          <a:bodyPr wrap="square" lIns="0" tIns="0" rIns="0" bIns="0" anchor="t">
+            <a:noAutofit/>
+          </a:bodyPr>
+          <a:lstStyle/>
+          <a:p>
+            <a:pPr algn="l">
+              <a:lnSpc>
+                <a:spcPct val="100000"/>
+              </a:lnSpc>
+              <a:spcBef>
+                <a:spcPts val="0"/>
+              </a:spcBef>
+            </a:pPr>
+            <a:r>
+              <a:rPr lang="en-US" sz="650" b="0" i="0" spc="0" dirty="0">
                 <a:solidFill>
                   <a:srgbClr val="5A6472"/>
                 </a:solidFill>
                 <a:latin typeface="Inter"/>
               </a:rPr>
-              <a:t>8 signals + embeddings</a:t>
-            </a:r>
-          </a:p>
-        </p:txBody>
-      </p:sp>
-      <p:sp>
-        <p:nvSpPr>
-          <p:cNvPr id="49" name="Rounded Rectangle 48"/>
-          <p:cNvSpPr/>
-          <p:nvPr/>
-        </p:nvSpPr>
-        <p:spPr>
-          <a:xfrm>
-            <a:off x="3081528" y="3648456"/>
-            <a:ext cx="1298448" cy="585216"/>
-          </a:xfrm>
-          <a:prstGeom prst="roundRect">
-            <a:avLst>
-              <a:gd name="adj" fmla="val 12000"/>
-            </a:avLst>
-          </a:prstGeom>
-          <a:solidFill>
-            <a:srgbClr val="FFFFFF"/>
-          </a:solidFill>
-          <a:ln w="9525">
-            <a:solidFill>
-              <a:srgbClr val="D7DEEA"/>
-            </a:solidFill>
-          </a:ln>
-          <a:effectLst/>
-        </p:spPr>
-        <p:style>
-          <a:lnRef idx="1">
-            <a:schemeClr val="accent1"/>
-          </a:lnRef>
-          <a:fillRef idx="3">
-            <a:schemeClr val="accent1"/>
-          </a:fillRef>
-          <a:effectRef idx="2">
-            <a:schemeClr val="accent1"/>
-          </a:effectRef>
-          <a:fontRef idx="minor">
-            <a:schemeClr val="lt1"/>
-          </a:fontRef>
-        </p:style>
-        <p:txBody>
-          <a:bodyPr rtlCol="0" anchor="ctr"/>
-          <a:lstStyle/>
-          <a:p>
-            <a:pPr algn="ctr"/>
-            <a:endParaRPr/>
-          </a:p>
-        </p:txBody>
-      </p:sp>
-      <p:pic>
-        <p:nvPicPr>
-          <p:cNvPr id="50" name="Picture 49" descr="LuGauge_b.png"/>
-          <p:cNvPicPr>
-            <a:picLocks noChangeAspect="1"/>
-          </p:cNvPicPr>
-          <p:nvPr/>
-        </p:nvPicPr>
-        <p:blipFill>
-          <a:blip r:embed="rId8"/>
-          <a:stretch>
-            <a:fillRect/>
-          </a:stretch>
-        </p:blipFill>
-        <p:spPr>
-          <a:xfrm>
-            <a:off x="3172968" y="3739896"/>
-            <a:ext cx="182880" cy="182880"/>
-          </a:xfrm>
-          <a:prstGeom prst="rect">
-            <a:avLst/>
-          </a:prstGeom>
-        </p:spPr>
-      </p:pic>
-      <p:sp>
-        <p:nvSpPr>
-          <p:cNvPr id="51" name="TextBox 50"/>
-          <p:cNvSpPr txBox="1"/>
-          <p:nvPr/>
-        </p:nvSpPr>
-        <p:spPr>
-          <a:xfrm>
-            <a:off x="3410712" y="3749040"/>
-            <a:ext cx="914400" cy="164592"/>
-          </a:xfrm>
-          <a:prstGeom prst="rect">
-            <a:avLst/>
-          </a:prstGeom>
-          <a:noFill/>
-        </p:spPr>
-        <p:txBody>
-          <a:bodyPr wrap="square" lIns="0" tIns="0" rIns="0" bIns="0" anchor="t">
-            <a:noAutofit/>
-          </a:bodyPr>
-          <a:lstStyle/>
-          <a:p>
-            <a:pPr algn="l"/>
-            <a:r>
-              <a:rPr sz="800" b="1" i="0">
-                <a:solidFill>
-                  <a:srgbClr val="1A1A1E"/>
-                </a:solidFill>
-                <a:latin typeface="Inter"/>
-              </a:rPr>
-              <a:t>Execution policy</a:t>
-            </a:r>
-          </a:p>
-        </p:txBody>
-      </p:sp>
-      <p:sp>
-        <p:nvSpPr>
-          <p:cNvPr id="52" name="TextBox 51"/>
-          <p:cNvSpPr txBox="1"/>
-          <p:nvPr/>
-        </p:nvSpPr>
-        <p:spPr>
-          <a:xfrm>
-            <a:off x="3172968" y="3986784"/>
-            <a:ext cx="1133856" cy="182880"/>
-          </a:xfrm>
-          <a:prstGeom prst="rect">
-            <a:avLst/>
-          </a:prstGeom>
-          <a:noFill/>
-        </p:spPr>
-        <p:txBody>
-          <a:bodyPr wrap="square" lIns="0" tIns="0" rIns="0" bIns="0" anchor="t">
-            <a:noAutofit/>
-          </a:bodyPr>
-          <a:lstStyle/>
-          <a:p>
-            <a:pPr algn="l"/>
-            <a:r>
-              <a:rPr sz="700" b="0" i="0">
-                <a:solidFill>
-                  <a:srgbClr val="5A6472"/>
-                </a:solidFill>
-                <a:latin typeface="Inter"/>
-              </a:rPr>
-              <a:t>confidence-based</a:t>
-            </a:r>
-          </a:p>
-        </p:txBody>
-      </p:sp>
-      <p:sp>
-        <p:nvSpPr>
-          <p:cNvPr id="53" name="Rounded Rectangle 52"/>
-          <p:cNvSpPr/>
-          <p:nvPr/>
-        </p:nvSpPr>
-        <p:spPr>
-          <a:xfrm>
-            <a:off x="4636008" y="3648456"/>
-            <a:ext cx="1298448" cy="585216"/>
-          </a:xfrm>
-          <a:prstGeom prst="roundRect">
-            <a:avLst>
-              <a:gd name="adj" fmla="val 12000"/>
-            </a:avLst>
-          </a:prstGeom>
-          <a:solidFill>
-            <a:srgbClr val="FFFFFF"/>
-          </a:solidFill>
-          <a:ln w="15875">
-            <a:solidFill>
-              <a:srgbClr val="C1702D"/>
-            </a:solidFill>
-          </a:ln>
-          <a:effectLst/>
-        </p:spPr>
-        <p:style>
-          <a:lnRef idx="1">
-            <a:schemeClr val="accent1"/>
-          </a:lnRef>
-          <a:fillRef idx="3">
-            <a:schemeClr val="accent1"/>
-          </a:fillRef>
-          <a:effectRef idx="2">
-            <a:schemeClr val="accent1"/>
-          </a:effectRef>
-          <a:fontRef idx="minor">
-            <a:schemeClr val="lt1"/>
-          </a:fontRef>
-        </p:style>
-        <p:txBody>
-          <a:bodyPr rtlCol="0" anchor="ctr"/>
-          <a:lstStyle/>
-          <a:p>
-            <a:pPr algn="ctr"/>
-            <a:endParaRPr/>
-          </a:p>
-        </p:txBody>
-      </p:sp>
-      <p:pic>
-        <p:nvPicPr>
-          <p:cNvPr id="54" name="Picture 53" descr="LuBrain_o.png"/>
-          <p:cNvPicPr>
-            <a:picLocks noChangeAspect="1"/>
-          </p:cNvPicPr>
-          <p:nvPr/>
-        </p:nvPicPr>
-        <p:blipFill>
-          <a:blip r:embed="rId9"/>
-          <a:stretch>
-            <a:fillRect/>
-          </a:stretch>
-        </p:blipFill>
-        <p:spPr>
-          <a:xfrm>
-            <a:off x="4727448" y="3739896"/>
-            <a:ext cx="182880" cy="182880"/>
-          </a:xfrm>
-          <a:prstGeom prst="rect">
-            <a:avLst/>
-          </a:prstGeom>
-        </p:spPr>
-      </p:pic>
-      <p:sp>
-        <p:nvSpPr>
-          <p:cNvPr id="55" name="TextBox 54"/>
-          <p:cNvSpPr txBox="1"/>
-          <p:nvPr/>
-        </p:nvSpPr>
-        <p:spPr>
-          <a:xfrm>
-            <a:off x="4965192" y="3749040"/>
-            <a:ext cx="914400" cy="164592"/>
-          </a:xfrm>
-          <a:prstGeom prst="rect">
-            <a:avLst/>
-          </a:prstGeom>
-          <a:noFill/>
-        </p:spPr>
-        <p:txBody>
-          <a:bodyPr wrap="square" lIns="0" tIns="0" rIns="0" bIns="0" anchor="t">
-            <a:noAutofit/>
-          </a:bodyPr>
-          <a:lstStyle/>
-          <a:p>
-            <a:pPr algn="l"/>
-            <a:r>
-              <a:rPr sz="800" b="1" i="0">
-                <a:solidFill>
-                  <a:srgbClr val="1A1A1E"/>
-                </a:solidFill>
-                <a:latin typeface="Inter"/>
-              </a:rPr>
-              <a:t>Fine-tuned AI</a:t>
-            </a:r>
-          </a:p>
-        </p:txBody>
-      </p:sp>
-      <p:sp>
-        <p:nvSpPr>
-          <p:cNvPr id="56" name="TextBox 55"/>
-          <p:cNvSpPr txBox="1"/>
-          <p:nvPr/>
-        </p:nvSpPr>
-        <p:spPr>
-          <a:xfrm>
-            <a:off x="4727448" y="3986784"/>
-            <a:ext cx="1133856" cy="182880"/>
-          </a:xfrm>
-          <a:prstGeom prst="rect">
-            <a:avLst/>
-          </a:prstGeom>
-          <a:noFill/>
-        </p:spPr>
-        <p:txBody>
-          <a:bodyPr wrap="square" lIns="0" tIns="0" rIns="0" bIns="0" anchor="t">
-            <a:noAutofit/>
-          </a:bodyPr>
-          <a:lstStyle/>
-          <a:p>
-            <a:pPr algn="l"/>
-            <a:r>
-              <a:rPr sz="700" b="0" i="0">
-                <a:solidFill>
-                  <a:srgbClr val="5A6472"/>
-                </a:solidFill>
-                <a:latin typeface="Inter"/>
-              </a:rPr>
-              <a:t>checker + LLM on GPU</a:t>
+              <a:t>Selenium or Playwright</a:t>
             </a:r>
           </a:p>
         </p:txBody>
       </p:sp>
       <p:cxnSp>
         <p:nvCxnSpPr>
-          <p:cNvPr id="57" name="Connector 56"/>
+          <p:cNvPr id="228" name="results to the agent"/>
           <p:cNvCxnSpPr/>
           <p:nvPr/>
         </p:nvCxnSpPr>
         <p:spPr>
-          <a:xfrm flipV="1">
-            <a:off x="3730752" y="2295144"/>
-            <a:ext cx="0" cy="384048"/>
+          <a:xfrm>
+            <a:off x="2340864" y="2834640"/>
+            <a:ext cx="704088" cy="0"/>
           </a:xfrm>
           <a:prstGeom prst="line">
             <a:avLst/>
           </a:prstGeom>
           <a:ln w="12700">
             <a:solidFill>
-              <a:srgbClr val="5F8B2F"/>
+              <a:srgbClr val="1428A0"/>
             </a:solidFill>
-            <a:prstDash val="dash"/>
-            <a:tailEnd type="triangle" w="med" len="med"/>
+            <a:tailEnd type="triangle" w="sm" len="sm"/>
           </a:ln>
         </p:spPr>
-        <p:style>
-          <a:lnRef idx="2">
-            <a:schemeClr val="accent1"/>
-          </a:lnRef>
-          <a:fillRef idx="0">
-            <a:schemeClr val="accent1"/>
-          </a:fillRef>
-          <a:effectRef idx="1">
-            <a:schemeClr val="accent1"/>
-          </a:effectRef>
-          <a:fontRef idx="minor">
-            <a:schemeClr val="tx1"/>
-          </a:fontRef>
-        </p:style>
       </p:cxnSp>
       <p:cxnSp>
         <p:nvCxnSpPr>
-          <p:cNvPr id="58" name="Connector 57"/>
+          <p:cNvPr id="229" name="tool calls to the robot"/>
           <p:cNvCxnSpPr/>
           <p:nvPr/>
         </p:nvCxnSpPr>
         <p:spPr>
-          <a:xfrm>
-            <a:off x="5285232" y="2295144"/>
-            <a:ext cx="0" cy="384048"/>
+          <a:xfrm flipH="1">
+            <a:off x="2340864" y="3090672"/>
+            <a:ext cx="704088" cy="0"/>
           </a:xfrm>
           <a:prstGeom prst="line">
             <a:avLst/>
           </a:prstGeom>
           <a:ln w="12700">
-            <a:solidFill>
-              <a:srgbClr val="5F8B2F"/>
-            </a:solidFill>
-            <a:prstDash val="dash"/>
-            <a:tailEnd type="triangle" w="med" len="med"/>
-          </a:ln>
-        </p:spPr>
-        <p:style>
-          <a:lnRef idx="2">
-            <a:schemeClr val="accent1"/>
-          </a:lnRef>
-          <a:fillRef idx="0">
-            <a:schemeClr val="accent1"/>
-          </a:fillRef>
-          <a:effectRef idx="1">
-            <a:schemeClr val="accent1"/>
-          </a:effectRef>
-          <a:fontRef idx="minor">
-            <a:schemeClr val="tx1"/>
-          </a:fontRef>
-        </p:style>
-      </p:cxnSp>
-      <p:cxnSp>
-        <p:nvCxnSpPr>
-          <p:cNvPr id="59" name="Connector 58"/>
-          <p:cNvCxnSpPr/>
-          <p:nvPr/>
-        </p:nvCxnSpPr>
-        <p:spPr>
-          <a:xfrm>
-            <a:off x="4379976" y="2971800"/>
-            <a:ext cx="256032" cy="0"/>
-          </a:xfrm>
-          <a:prstGeom prst="line">
-            <a:avLst/>
-          </a:prstGeom>
-          <a:ln w="12700">
-            <a:solidFill>
-              <a:srgbClr val="5A6472"/>
-            </a:solidFill>
-            <a:tailEnd type="triangle" w="med" len="med"/>
-          </a:ln>
-        </p:spPr>
-        <p:style>
-          <a:lnRef idx="2">
-            <a:schemeClr val="accent1"/>
-          </a:lnRef>
-          <a:fillRef idx="0">
-            <a:schemeClr val="accent1"/>
-          </a:fillRef>
-          <a:effectRef idx="1">
-            <a:schemeClr val="accent1"/>
-          </a:effectRef>
-          <a:fontRef idx="minor">
-            <a:schemeClr val="tx1"/>
-          </a:fontRef>
-        </p:style>
-      </p:cxnSp>
-      <p:cxnSp>
-        <p:nvCxnSpPr>
-          <p:cNvPr id="60" name="Connector 59"/>
-          <p:cNvCxnSpPr/>
-          <p:nvPr/>
-        </p:nvCxnSpPr>
-        <p:spPr>
-          <a:xfrm>
-            <a:off x="5285232" y="3264408"/>
-            <a:ext cx="0" cy="384048"/>
-          </a:xfrm>
-          <a:prstGeom prst="line">
-            <a:avLst/>
-          </a:prstGeom>
-          <a:ln w="12700">
-            <a:solidFill>
-              <a:srgbClr val="5A6472"/>
-            </a:solidFill>
-            <a:tailEnd type="triangle" w="med" len="med"/>
-          </a:ln>
-        </p:spPr>
-        <p:style>
-          <a:lnRef idx="2">
-            <a:schemeClr val="accent1"/>
-          </a:lnRef>
-          <a:fillRef idx="0">
-            <a:schemeClr val="accent1"/>
-          </a:fillRef>
-          <a:effectRef idx="1">
-            <a:schemeClr val="accent1"/>
-          </a:effectRef>
-          <a:fontRef idx="minor">
-            <a:schemeClr val="tx1"/>
-          </a:fontRef>
-        </p:style>
-      </p:cxnSp>
-      <p:cxnSp>
-        <p:nvCxnSpPr>
-          <p:cNvPr id="61" name="Connector 60"/>
-          <p:cNvCxnSpPr/>
-          <p:nvPr/>
-        </p:nvCxnSpPr>
-        <p:spPr>
-          <a:xfrm flipH="1">
-            <a:off x="4379976" y="3941064"/>
-            <a:ext cx="256032" cy="0"/>
-          </a:xfrm>
-          <a:prstGeom prst="line">
-            <a:avLst/>
-          </a:prstGeom>
-          <a:ln w="12700">
-            <a:solidFill>
-              <a:srgbClr val="5A6472"/>
-            </a:solidFill>
-            <a:tailEnd type="triangle" w="med" len="med"/>
-          </a:ln>
-        </p:spPr>
-        <p:style>
-          <a:lnRef idx="2">
-            <a:schemeClr val="accent1"/>
-          </a:lnRef>
-          <a:fillRef idx="0">
-            <a:schemeClr val="accent1"/>
-          </a:fillRef>
-          <a:effectRef idx="1">
-            <a:schemeClr val="accent1"/>
-          </a:effectRef>
-          <a:fontRef idx="minor">
-            <a:schemeClr val="tx1"/>
-          </a:fontRef>
-        </p:style>
-      </p:cxnSp>
-      <p:cxnSp>
-        <p:nvCxnSpPr>
-          <p:cNvPr id="62" name="Connector 61"/>
-          <p:cNvCxnSpPr/>
-          <p:nvPr/>
-        </p:nvCxnSpPr>
-        <p:spPr>
-          <a:xfrm flipV="1">
-            <a:off x="3730752" y="3264408"/>
-            <a:ext cx="0" cy="384048"/>
-          </a:xfrm>
-          <a:prstGeom prst="line">
-            <a:avLst/>
-          </a:prstGeom>
-          <a:ln w="12700">
-            <a:solidFill>
-              <a:srgbClr val="5A6472"/>
-            </a:solidFill>
-            <a:tailEnd type="triangle" w="med" len="med"/>
-          </a:ln>
-        </p:spPr>
-        <p:style>
-          <a:lnRef idx="2">
-            <a:schemeClr val="accent1"/>
-          </a:lnRef>
-          <a:fillRef idx="0">
-            <a:schemeClr val="accent1"/>
-          </a:fillRef>
-          <a:effectRef idx="1">
-            <a:schemeClr val="accent1"/>
-          </a:effectRef>
-          <a:fontRef idx="minor">
-            <a:schemeClr val="tx1"/>
-          </a:fontRef>
-        </p:style>
-      </p:cxnSp>
-      <p:cxnSp>
-        <p:nvCxnSpPr>
-          <p:cNvPr id="63" name="Connector 62"/>
-          <p:cNvCxnSpPr/>
-          <p:nvPr/>
-        </p:nvCxnSpPr>
-        <p:spPr>
-          <a:xfrm>
-            <a:off x="2203704" y="2880360"/>
-            <a:ext cx="877824" cy="0"/>
-          </a:xfrm>
-          <a:prstGeom prst="line">
-            <a:avLst/>
-          </a:prstGeom>
-          <a:ln w="15875">
             <a:solidFill>
               <a:srgbClr val="1428A0"/>
             </a:solidFill>
-            <a:tailEnd type="triangle" w="med" len="med"/>
+            <a:tailEnd type="triangle" w="sm" len="sm"/>
           </a:ln>
         </p:spPr>
-        <p:style>
-          <a:lnRef idx="2">
-            <a:schemeClr val="accent1"/>
-          </a:lnRef>
-          <a:fillRef idx="0">
-            <a:schemeClr val="accent1"/>
-          </a:fillRef>
-          <a:effectRef idx="1">
-            <a:schemeClr val="accent1"/>
-          </a:effectRef>
-          <a:fontRef idx="minor">
-            <a:schemeClr val="tx1"/>
-          </a:fontRef>
-        </p:style>
       </p:cxnSp>
-      <p:cxnSp>
-        <p:nvCxnSpPr>
-          <p:cNvPr id="64" name="Connector 63"/>
-          <p:cNvCxnSpPr/>
-          <p:nvPr/>
-        </p:nvCxnSpPr>
-        <p:spPr>
-          <a:xfrm flipH="1">
-            <a:off x="2203704" y="3063240"/>
-            <a:ext cx="877824" cy="0"/>
-          </a:xfrm>
-          <a:prstGeom prst="line">
-            <a:avLst/>
-          </a:prstGeom>
-          <a:ln w="15875">
-            <a:solidFill>
-              <a:srgbClr val="1428A0"/>
-            </a:solidFill>
-            <a:tailEnd type="triangle" w="med" len="med"/>
-          </a:ln>
-        </p:spPr>
-        <p:style>
-          <a:lnRef idx="2">
-            <a:schemeClr val="accent1"/>
-          </a:lnRef>
-          <a:fillRef idx="0">
-            <a:schemeClr val="accent1"/>
-          </a:fillRef>
-          <a:effectRef idx="1">
-            <a:schemeClr val="accent1"/>
-          </a:effectRef>
-          <a:fontRef idx="minor">
-            <a:schemeClr val="tx1"/>
-          </a:fontRef>
-        </p:style>
-      </p:cxnSp>
-      <p:sp>
-        <p:nvSpPr>
-          <p:cNvPr id="65" name="TextBox 64"/>
-          <p:cNvSpPr txBox="1"/>
-          <p:nvPr/>
-        </p:nvSpPr>
-        <p:spPr>
-          <a:xfrm>
-            <a:off x="2258568" y="2496312"/>
-            <a:ext cx="786384" cy="310896"/>
+      <p:sp>
+        <p:nvSpPr>
+          <p:cNvPr id="230" name="results label"/>
+          <p:cNvSpPr txBox="1"/>
+          <p:nvPr/>
+        </p:nvSpPr>
+        <p:spPr>
+          <a:xfrm>
+            <a:off x="2427732" y="2711196"/>
+            <a:ext cx="512064" cy="109728"/>
           </a:xfrm>
           <a:prstGeom prst="rect">
             <a:avLst/>
@@ -12875,186 +12415,76 @@
           <a:p>
             <a:pPr algn="ctr">
               <a:lnSpc>
-                <a:spcPct val="95000"/>
+                <a:spcPct val="100000"/>
               </a:lnSpc>
+              <a:spcBef>
+                <a:spcPts val="0"/>
+              </a:spcBef>
             </a:pPr>
             <a:r>
-              <a:rPr sz="650" b="1" i="0">
+              <a:rPr lang="en-US" sz="600" b="1" i="0" spc="0" dirty="0">
                 <a:solidFill>
                   <a:srgbClr val="1428A0"/>
                 </a:solidFill>
                 <a:latin typeface="Inter"/>
               </a:rPr>
-              <a:t>fingerprints</a:t>
-            </a:r>
-          </a:p>
+              <a:t>results</a:t>
+            </a:r>
+          </a:p>
+        </p:txBody>
+      </p:sp>
+      <p:sp>
+        <p:nvSpPr>
+          <p:cNvPr id="231" name="tool calls label"/>
+          <p:cNvSpPr txBox="1"/>
+          <p:nvPr/>
+        </p:nvSpPr>
+        <p:spPr>
+          <a:xfrm>
+            <a:off x="2427732" y="3127248"/>
+            <a:ext cx="512064" cy="109728"/>
+          </a:xfrm>
+          <a:prstGeom prst="rect">
+            <a:avLst/>
+          </a:prstGeom>
+          <a:noFill/>
+        </p:spPr>
+        <p:txBody>
+          <a:bodyPr wrap="square" lIns="0" tIns="0" rIns="0" bIns="0" anchor="t">
+            <a:noAutofit/>
+          </a:bodyPr>
+          <a:lstStyle/>
           <a:p>
             <a:pPr algn="ctr">
               <a:lnSpc>
-                <a:spcPct val="95000"/>
+                <a:spcPct val="100000"/>
               </a:lnSpc>
+              <a:spcBef>
+                <a:spcPts val="0"/>
+              </a:spcBef>
             </a:pPr>
             <a:r>
-              <a:rPr sz="650" b="1" i="0">
+              <a:rPr lang="en-US" sz="600" b="1" i="0" spc="0" dirty="0">
                 <a:solidFill>
                   <a:srgbClr val="1428A0"/>
                 </a:solidFill>
                 <a:latin typeface="Inter"/>
               </a:rPr>
-              <a:t>only</a:t>
-            </a:r>
-          </a:p>
-        </p:txBody>
-      </p:sp>
-      <p:sp>
-        <p:nvSpPr>
-          <p:cNvPr id="66" name="TextBox 65"/>
-          <p:cNvSpPr txBox="1"/>
-          <p:nvPr/>
-        </p:nvSpPr>
-        <p:spPr>
-          <a:xfrm>
-            <a:off x="2258568" y="3145536"/>
-            <a:ext cx="786384" cy="310896"/>
-          </a:xfrm>
-          <a:prstGeom prst="rect">
-            <a:avLst/>
-          </a:prstGeom>
-          <a:noFill/>
-        </p:spPr>
-        <p:txBody>
-          <a:bodyPr wrap="square" lIns="0" tIns="0" rIns="0" bIns="0" anchor="t">
-            <a:noAutofit/>
-          </a:bodyPr>
-          <a:lstStyle/>
-          <a:p>
-            <a:pPr algn="ctr">
-              <a:lnSpc>
-                <a:spcPct val="95000"/>
-              </a:lnSpc>
-            </a:pPr>
-            <a:r>
-              <a:rPr sz="650" b="1" i="0">
-                <a:solidFill>
-                  <a:srgbClr val="1428A0"/>
-                </a:solidFill>
-                <a:latin typeface="Inter"/>
-              </a:rPr>
-              <a:t>an index,</a:t>
-            </a:r>
-          </a:p>
-          <a:p>
-            <a:pPr algn="ctr">
-              <a:lnSpc>
-                <a:spcPct val="95000"/>
-              </a:lnSpc>
-            </a:pPr>
-            <a:r>
-              <a:rPr sz="650" b="1" i="0">
-                <a:solidFill>
-                  <a:srgbClr val="1428A0"/>
-                </a:solidFill>
-                <a:latin typeface="Inter"/>
-              </a:rPr>
-              <a:t>not a selector</a:t>
-            </a:r>
-          </a:p>
-        </p:txBody>
-      </p:sp>
-      <p:sp>
-        <p:nvSpPr>
-          <p:cNvPr id="67" name="TextBox 66"/>
-          <p:cNvSpPr txBox="1"/>
-          <p:nvPr/>
-        </p:nvSpPr>
-        <p:spPr>
-          <a:xfrm>
-            <a:off x="6217920" y="1325880"/>
-            <a:ext cx="2258568" cy="146304"/>
-          </a:xfrm>
-          <a:prstGeom prst="rect">
-            <a:avLst/>
-          </a:prstGeom>
-          <a:noFill/>
-        </p:spPr>
-        <p:txBody>
-          <a:bodyPr wrap="square" lIns="0" tIns="0" rIns="0" bIns="0" anchor="t">
-            <a:noAutofit/>
-          </a:bodyPr>
-          <a:lstStyle/>
-          <a:p>
-            <a:pPr algn="l"/>
-            <a:r>
-              <a:rPr sz="700" b="1" i="0" spc="90">
-                <a:solidFill>
-                  <a:srgbClr val="1428A0"/>
-                </a:solidFill>
-                <a:latin typeface="Inter"/>
-              </a:rPr>
-              <a:t>TECHNOLOGY STACK</a:t>
-            </a:r>
-          </a:p>
-        </p:txBody>
-      </p:sp>
-      <p:sp>
-        <p:nvSpPr>
-          <p:cNvPr id="68" name="Rounded Rectangle 67"/>
+              <a:t>tool calls</a:t>
+            </a:r>
+          </a:p>
+        </p:txBody>
+      </p:sp>
+      <p:sp>
+        <p:nvSpPr>
+          <p:cNvPr id="232" name="Call 2"/>
           <p:cNvSpPr/>
           <p:nvPr/>
         </p:nvSpPr>
         <p:spPr>
           <a:xfrm>
-            <a:off x="6217920" y="1536192"/>
-            <a:ext cx="2258568" cy="530352"/>
-          </a:xfrm>
-          <a:prstGeom prst="roundRect">
-            <a:avLst>
-              <a:gd name="adj" fmla="val 12000"/>
-            </a:avLst>
-          </a:prstGeom>
-          <a:solidFill>
-            <a:srgbClr val="F4F6FA"/>
-          </a:solidFill>
-          <a:ln w="7620">
-            <a:solidFill>
-              <a:srgbClr val="D7DEEA"/>
-            </a:solidFill>
-          </a:ln>
-          <a:effectLst/>
-        </p:spPr>
-        <p:style>
-          <a:lnRef idx="1">
-            <a:schemeClr val="accent1"/>
-          </a:lnRef>
-          <a:fillRef idx="3">
-            <a:schemeClr val="accent1"/>
-          </a:fillRef>
-          <a:effectRef idx="2">
-            <a:schemeClr val="accent1"/>
-          </a:effectRef>
-          <a:fontRef idx="minor">
-            <a:schemeClr val="lt1"/>
-          </a:fontRef>
-        </p:style>
-        <p:txBody>
-          <a:bodyPr rtlCol="0" anchor="ctr"/>
-          <a:lstStyle/>
-          <a:p>
-            <a:pPr algn="ctr"/>
-            <a:endParaRPr/>
-          </a:p>
-        </p:txBody>
-      </p:sp>
-      <p:sp>
-        <p:nvSpPr>
-          <p:cNvPr id="69" name="Oval 68"/>
-          <p:cNvSpPr/>
-          <p:nvPr/>
-        </p:nvSpPr>
-        <p:spPr>
-          <a:xfrm>
-            <a:off x="6327648" y="1664208"/>
-            <a:ext cx="274320" cy="274320"/>
+            <a:off x="2615184" y="2894076"/>
+            <a:ext cx="137160" cy="137160"/>
           </a:xfrm>
           <a:prstGeom prst="ellipse">
             <a:avLst/>
@@ -13067,905 +12497,42 @@
           </a:ln>
           <a:effectLst/>
         </p:spPr>
-        <p:style>
-          <a:lnRef idx="1">
-            <a:schemeClr val="accent1"/>
-          </a:lnRef>
-          <a:fillRef idx="3">
-            <a:schemeClr val="accent1"/>
-          </a:fillRef>
-          <a:effectRef idx="2">
-            <a:schemeClr val="accent1"/>
-          </a:effectRef>
-          <a:fontRef idx="minor">
-            <a:schemeClr val="lt1"/>
-          </a:fontRef>
-        </p:style>
-        <p:txBody>
-          <a:bodyPr rtlCol="0" anchor="ctr"/>
-          <a:lstStyle/>
-          <a:p>
-            <a:pPr algn="ctr"/>
-            <a:endParaRPr/>
-          </a:p>
-        </p:txBody>
-      </p:sp>
-      <p:pic>
-        <p:nvPicPr>
-          <p:cNvPr id="70" name="Picture 69" descr="LuBot_w.png"/>
-          <p:cNvPicPr>
-            <a:picLocks noChangeAspect="1"/>
-          </p:cNvPicPr>
-          <p:nvPr/>
-        </p:nvPicPr>
-        <p:blipFill>
-          <a:blip r:embed="rId10"/>
-          <a:stretch>
-            <a:fillRect/>
-          </a:stretch>
-        </p:blipFill>
-        <p:spPr>
-          <a:xfrm>
-            <a:off x="6393485" y="1730045"/>
-            <a:ext cx="142646" cy="142646"/>
-          </a:xfrm>
-          <a:prstGeom prst="rect">
-            <a:avLst/>
-          </a:prstGeom>
-        </p:spPr>
-      </p:pic>
-      <p:sp>
-        <p:nvSpPr>
-          <p:cNvPr id="71" name="TextBox 70"/>
-          <p:cNvSpPr txBox="1"/>
-          <p:nvPr/>
-        </p:nvSpPr>
-        <p:spPr>
-          <a:xfrm>
-            <a:off x="6711696" y="1600200"/>
-            <a:ext cx="1645920" cy="146304"/>
-          </a:xfrm>
-          <a:prstGeom prst="rect">
-            <a:avLst/>
-          </a:prstGeom>
-          <a:noFill/>
-        </p:spPr>
-        <p:txBody>
-          <a:bodyPr wrap="square" lIns="0" tIns="0" rIns="0" bIns="0" anchor="t">
-            <a:noAutofit/>
-          </a:bodyPr>
-          <a:lstStyle/>
-          <a:p>
-            <a:pPr algn="l"/>
-            <a:r>
-              <a:rPr lang="en-US" sz="650" b="1" i="0" spc="90" dirty="0">
-                <a:solidFill>
-                  <a:srgbClr val="1428A0"/>
-                </a:solidFill>
-                <a:latin typeface="Inter"/>
-              </a:rPr>
-              <a:t>ROBOT</a:t>
-            </a:r>
-          </a:p>
-        </p:txBody>
-      </p:sp>
-      <p:sp>
-        <p:nvSpPr>
-          <p:cNvPr id="72" name="TextBox 71"/>
-          <p:cNvSpPr txBox="1"/>
-          <p:nvPr/>
-        </p:nvSpPr>
-        <p:spPr>
-          <a:xfrm>
-            <a:off x="6711696" y="1737360"/>
-            <a:ext cx="1673352" cy="292608"/>
-          </a:xfrm>
-          <a:prstGeom prst="rect">
-            <a:avLst/>
-          </a:prstGeom>
-          <a:noFill/>
-        </p:spPr>
-        <p:txBody>
-          <a:bodyPr wrap="square" lIns="0" tIns="0" rIns="0" bIns="0" anchor="t">
-            <a:noAutofit/>
-          </a:bodyPr>
-          <a:lstStyle/>
-          <a:p>
-            <a:pPr algn="l">
+        <p:txBody>
+          <a:bodyPr wrap="square" lIns="0" tIns="0" rIns="0" bIns="0" rtlCol="0" anchor="ctr">
+            <a:noAutofit/>
+          </a:bodyPr>
+          <a:lstStyle/>
+          <a:p>
+            <a:pPr algn="ctr">
               <a:lnSpc>
-                <a:spcPct val="105000"/>
+                <a:spcPct val="100000"/>
               </a:lnSpc>
+              <a:spcBef>
+                <a:spcPts val="0"/>
+              </a:spcBef>
             </a:pPr>
             <a:r>
-              <a:rPr sz="800" b="0" i="0" dirty="0">
-                <a:solidFill>
-                  <a:srgbClr val="1A1A1E"/>
-                </a:solidFill>
-                <a:latin typeface="Inter"/>
-              </a:rPr>
-              <a:t>Python · Selenium · Playwright</a:t>
-            </a:r>
-          </a:p>
-        </p:txBody>
-      </p:sp>
-      <p:sp>
-        <p:nvSpPr>
-          <p:cNvPr id="73" name="Rounded Rectangle 72"/>
+              <a:rPr lang="en-US" sz="550" b="1" i="0" spc="0" dirty="0">
+                <a:solidFill>
+                  <a:srgbClr val="FFFFFF"/>
+                </a:solidFill>
+                <a:latin typeface="Inter"/>
+              </a:rPr>
+              <a:t>2</a:t>
+            </a:r>
+          </a:p>
+        </p:txBody>
+      </p:sp>
+      <p:sp>
+        <p:nvSpPr>
+          <p:cNvPr id="233" name="RAG memory"/>
           <p:cNvSpPr/>
           <p:nvPr/>
         </p:nvSpPr>
         <p:spPr>
           <a:xfrm>
-            <a:off x="6217920" y="2139696"/>
-            <a:ext cx="2258568" cy="530352"/>
-          </a:xfrm>
-          <a:prstGeom prst="roundRect">
-            <a:avLst>
-              <a:gd name="adj" fmla="val 12000"/>
-            </a:avLst>
-          </a:prstGeom>
-          <a:solidFill>
-            <a:srgbClr val="F4F6FA"/>
-          </a:solidFill>
-          <a:ln w="7620">
-            <a:solidFill>
-              <a:srgbClr val="D7DEEA"/>
-            </a:solidFill>
-          </a:ln>
-          <a:effectLst/>
-        </p:spPr>
-        <p:style>
-          <a:lnRef idx="1">
-            <a:schemeClr val="accent1"/>
-          </a:lnRef>
-          <a:fillRef idx="3">
-            <a:schemeClr val="accent1"/>
-          </a:fillRef>
-          <a:effectRef idx="2">
-            <a:schemeClr val="accent1"/>
-          </a:effectRef>
-          <a:fontRef idx="minor">
-            <a:schemeClr val="lt1"/>
-          </a:fontRef>
-        </p:style>
-        <p:txBody>
-          <a:bodyPr rtlCol="0" anchor="ctr"/>
-          <a:lstStyle/>
-          <a:p>
-            <a:pPr algn="ctr"/>
-            <a:endParaRPr/>
-          </a:p>
-        </p:txBody>
-      </p:sp>
-      <p:sp>
-        <p:nvSpPr>
-          <p:cNvPr id="74" name="Oval 73"/>
-          <p:cNvSpPr/>
-          <p:nvPr/>
-        </p:nvSpPr>
-        <p:spPr>
-          <a:xfrm>
-            <a:off x="6327648" y="2267712"/>
-            <a:ext cx="274320" cy="274320"/>
-          </a:xfrm>
-          <a:prstGeom prst="ellipse">
-            <a:avLst/>
-          </a:prstGeom>
-          <a:solidFill>
-            <a:srgbClr val="2A5C9E"/>
-          </a:solidFill>
-          <a:ln>
-            <a:noFill/>
-          </a:ln>
-          <a:effectLst/>
-        </p:spPr>
-        <p:style>
-          <a:lnRef idx="1">
-            <a:schemeClr val="accent1"/>
-          </a:lnRef>
-          <a:fillRef idx="3">
-            <a:schemeClr val="accent1"/>
-          </a:fillRef>
-          <a:effectRef idx="2">
-            <a:schemeClr val="accent1"/>
-          </a:effectRef>
-          <a:fontRef idx="minor">
-            <a:schemeClr val="lt1"/>
-          </a:fontRef>
-        </p:style>
-        <p:txBody>
-          <a:bodyPr rtlCol="0" anchor="ctr"/>
-          <a:lstStyle/>
-          <a:p>
-            <a:pPr algn="ctr"/>
-            <a:endParaRPr/>
-          </a:p>
-        </p:txBody>
-      </p:sp>
-      <p:pic>
-        <p:nvPicPr>
-          <p:cNvPr id="75" name="Picture 74" descr="LuServer_w.png"/>
-          <p:cNvPicPr>
-            <a:picLocks noChangeAspect="1"/>
-          </p:cNvPicPr>
-          <p:nvPr/>
-        </p:nvPicPr>
-        <p:blipFill>
-          <a:blip r:embed="rId11"/>
-          <a:stretch>
-            <a:fillRect/>
-          </a:stretch>
-        </p:blipFill>
-        <p:spPr>
-          <a:xfrm>
-            <a:off x="6393485" y="2333549"/>
-            <a:ext cx="142646" cy="142646"/>
-          </a:xfrm>
-          <a:prstGeom prst="rect">
-            <a:avLst/>
-          </a:prstGeom>
-        </p:spPr>
-      </p:pic>
-      <p:sp>
-        <p:nvSpPr>
-          <p:cNvPr id="76" name="TextBox 75"/>
-          <p:cNvSpPr txBox="1"/>
-          <p:nvPr/>
-        </p:nvSpPr>
-        <p:spPr>
-          <a:xfrm>
-            <a:off x="6711696" y="2203704"/>
-            <a:ext cx="1645920" cy="146304"/>
-          </a:xfrm>
-          <a:prstGeom prst="rect">
-            <a:avLst/>
-          </a:prstGeom>
-          <a:noFill/>
-        </p:spPr>
-        <p:txBody>
-          <a:bodyPr wrap="square" lIns="0" tIns="0" rIns="0" bIns="0" anchor="t">
-            <a:noAutofit/>
-          </a:bodyPr>
-          <a:lstStyle/>
-          <a:p>
-            <a:pPr algn="l"/>
-            <a:r>
-              <a:rPr sz="650" b="1" i="0" spc="90">
-                <a:solidFill>
-                  <a:srgbClr val="2A5C9E"/>
-                </a:solidFill>
-                <a:latin typeface="Inter"/>
-              </a:rPr>
-              <a:t>HEALING AGENT</a:t>
-            </a:r>
-          </a:p>
-        </p:txBody>
-      </p:sp>
-      <p:sp>
-        <p:nvSpPr>
-          <p:cNvPr id="77" name="TextBox 76"/>
-          <p:cNvSpPr txBox="1"/>
-          <p:nvPr/>
-        </p:nvSpPr>
-        <p:spPr>
-          <a:xfrm>
-            <a:off x="6711696" y="2340864"/>
-            <a:ext cx="1673352" cy="292608"/>
-          </a:xfrm>
-          <a:prstGeom prst="rect">
-            <a:avLst/>
-          </a:prstGeom>
-          <a:noFill/>
-        </p:spPr>
-        <p:txBody>
-          <a:bodyPr wrap="square" lIns="0" tIns="0" rIns="0" bIns="0" anchor="t">
-            <a:noAutofit/>
-          </a:bodyPr>
-          <a:lstStyle/>
-          <a:p>
-            <a:pPr algn="l">
-              <a:lnSpc>
-                <a:spcPct val="105000"/>
-              </a:lnSpc>
-            </a:pPr>
-            <a:r>
-              <a:rPr sz="800" b="0" i="0">
-                <a:solidFill>
-                  <a:srgbClr val="1A1A1E"/>
-                </a:solidFill>
-                <a:latin typeface="Inter"/>
-              </a:rPr>
-              <a:t>FastAPI · Uvicorn</a:t>
-            </a:r>
-          </a:p>
-        </p:txBody>
-      </p:sp>
-      <p:sp>
-        <p:nvSpPr>
-          <p:cNvPr id="78" name="Rounded Rectangle 77"/>
-          <p:cNvSpPr/>
-          <p:nvPr/>
-        </p:nvSpPr>
-        <p:spPr>
-          <a:xfrm>
-            <a:off x="6217920" y="2743200"/>
-            <a:ext cx="2258568" cy="530352"/>
-          </a:xfrm>
-          <a:prstGeom prst="roundRect">
-            <a:avLst>
-              <a:gd name="adj" fmla="val 12000"/>
-            </a:avLst>
-          </a:prstGeom>
-          <a:solidFill>
-            <a:srgbClr val="F4F6FA"/>
-          </a:solidFill>
-          <a:ln w="7620">
-            <a:solidFill>
-              <a:srgbClr val="D7DEEA"/>
-            </a:solidFill>
-          </a:ln>
-          <a:effectLst/>
-        </p:spPr>
-        <p:style>
-          <a:lnRef idx="1">
-            <a:schemeClr val="accent1"/>
-          </a:lnRef>
-          <a:fillRef idx="3">
-            <a:schemeClr val="accent1"/>
-          </a:fillRef>
-          <a:effectRef idx="2">
-            <a:schemeClr val="accent1"/>
-          </a:effectRef>
-          <a:fontRef idx="minor">
-            <a:schemeClr val="lt1"/>
-          </a:fontRef>
-        </p:style>
-        <p:txBody>
-          <a:bodyPr rtlCol="0" anchor="ctr"/>
-          <a:lstStyle/>
-          <a:p>
-            <a:pPr algn="ctr"/>
-            <a:endParaRPr/>
-          </a:p>
-        </p:txBody>
-      </p:sp>
-      <p:sp>
-        <p:nvSpPr>
-          <p:cNvPr id="79" name="Oval 78"/>
-          <p:cNvSpPr/>
-          <p:nvPr/>
-        </p:nvSpPr>
-        <p:spPr>
-          <a:xfrm>
-            <a:off x="6327648" y="2871216"/>
-            <a:ext cx="274320" cy="274320"/>
-          </a:xfrm>
-          <a:prstGeom prst="ellipse">
-            <a:avLst/>
-          </a:prstGeom>
-          <a:solidFill>
-            <a:srgbClr val="C1702D"/>
-          </a:solidFill>
-          <a:ln>
-            <a:noFill/>
-          </a:ln>
-          <a:effectLst/>
-        </p:spPr>
-        <p:style>
-          <a:lnRef idx="1">
-            <a:schemeClr val="accent1"/>
-          </a:lnRef>
-          <a:fillRef idx="3">
-            <a:schemeClr val="accent1"/>
-          </a:fillRef>
-          <a:effectRef idx="2">
-            <a:schemeClr val="accent1"/>
-          </a:effectRef>
-          <a:fontRef idx="minor">
-            <a:schemeClr val="lt1"/>
-          </a:fontRef>
-        </p:style>
-        <p:txBody>
-          <a:bodyPr rtlCol="0" anchor="ctr"/>
-          <a:lstStyle/>
-          <a:p>
-            <a:pPr algn="ctr"/>
-            <a:endParaRPr/>
-          </a:p>
-        </p:txBody>
-      </p:sp>
-      <p:pic>
-        <p:nvPicPr>
-          <p:cNvPr id="80" name="Picture 79" descr="LuBrain_w.png"/>
-          <p:cNvPicPr>
-            <a:picLocks noChangeAspect="1"/>
-          </p:cNvPicPr>
-          <p:nvPr/>
-        </p:nvPicPr>
-        <p:blipFill>
-          <a:blip r:embed="rId12"/>
-          <a:stretch>
-            <a:fillRect/>
-          </a:stretch>
-        </p:blipFill>
-        <p:spPr>
-          <a:xfrm>
-            <a:off x="6393485" y="2937053"/>
-            <a:ext cx="142646" cy="142646"/>
-          </a:xfrm>
-          <a:prstGeom prst="rect">
-            <a:avLst/>
-          </a:prstGeom>
-        </p:spPr>
-      </p:pic>
-      <p:sp>
-        <p:nvSpPr>
-          <p:cNvPr id="81" name="TextBox 80"/>
-          <p:cNvSpPr txBox="1"/>
-          <p:nvPr/>
-        </p:nvSpPr>
-        <p:spPr>
-          <a:xfrm>
-            <a:off x="6711696" y="2807208"/>
-            <a:ext cx="1645920" cy="146304"/>
-          </a:xfrm>
-          <a:prstGeom prst="rect">
-            <a:avLst/>
-          </a:prstGeom>
-          <a:noFill/>
-        </p:spPr>
-        <p:txBody>
-          <a:bodyPr wrap="square" lIns="0" tIns="0" rIns="0" bIns="0" anchor="t">
-            <a:noAutofit/>
-          </a:bodyPr>
-          <a:lstStyle/>
-          <a:p>
-            <a:pPr algn="l"/>
-            <a:r>
-              <a:rPr sz="650" b="1" i="0" spc="90">
-                <a:solidFill>
-                  <a:srgbClr val="C1702D"/>
-                </a:solidFill>
-                <a:latin typeface="Inter"/>
-              </a:rPr>
-              <a:t>AI</a:t>
-            </a:r>
-          </a:p>
-        </p:txBody>
-      </p:sp>
-      <p:sp>
-        <p:nvSpPr>
-          <p:cNvPr id="82" name="TextBox 81"/>
-          <p:cNvSpPr txBox="1"/>
-          <p:nvPr/>
-        </p:nvSpPr>
-        <p:spPr>
-          <a:xfrm>
-            <a:off x="6711696" y="2944368"/>
-            <a:ext cx="1673352" cy="292608"/>
-          </a:xfrm>
-          <a:prstGeom prst="rect">
-            <a:avLst/>
-          </a:prstGeom>
-          <a:noFill/>
-        </p:spPr>
-        <p:txBody>
-          <a:bodyPr wrap="square" lIns="0" tIns="0" rIns="0" bIns="0" anchor="t">
-            <a:noAutofit/>
-          </a:bodyPr>
-          <a:lstStyle/>
-          <a:p>
-            <a:pPr algn="l">
-              <a:lnSpc>
-                <a:spcPct val="105000"/>
-              </a:lnSpc>
-            </a:pPr>
-            <a:r>
-              <a:rPr sz="800" b="0" i="0" dirty="0">
-                <a:solidFill>
-                  <a:srgbClr val="1A1A1E"/>
-                </a:solidFill>
-                <a:latin typeface="Inter"/>
-              </a:rPr>
-              <a:t>Fine-tuned LLM + checker · llama.cpp · CUDA</a:t>
-            </a:r>
-          </a:p>
-        </p:txBody>
-      </p:sp>
-      <p:sp>
-        <p:nvSpPr>
-          <p:cNvPr id="83" name="Rounded Rectangle 82"/>
-          <p:cNvSpPr/>
-          <p:nvPr/>
-        </p:nvSpPr>
-        <p:spPr>
-          <a:xfrm>
-            <a:off x="6217920" y="3346704"/>
-            <a:ext cx="2258568" cy="530352"/>
-          </a:xfrm>
-          <a:prstGeom prst="roundRect">
-            <a:avLst>
-              <a:gd name="adj" fmla="val 12000"/>
-            </a:avLst>
-          </a:prstGeom>
-          <a:solidFill>
-            <a:srgbClr val="F4F6FA"/>
-          </a:solidFill>
-          <a:ln w="7620">
-            <a:solidFill>
-              <a:srgbClr val="D7DEEA"/>
-            </a:solidFill>
-          </a:ln>
-          <a:effectLst/>
-        </p:spPr>
-        <p:style>
-          <a:lnRef idx="1">
-            <a:schemeClr val="accent1"/>
-          </a:lnRef>
-          <a:fillRef idx="3">
-            <a:schemeClr val="accent1"/>
-          </a:fillRef>
-          <a:effectRef idx="2">
-            <a:schemeClr val="accent1"/>
-          </a:effectRef>
-          <a:fontRef idx="minor">
-            <a:schemeClr val="lt1"/>
-          </a:fontRef>
-        </p:style>
-        <p:txBody>
-          <a:bodyPr rtlCol="0" anchor="ctr"/>
-          <a:lstStyle/>
-          <a:p>
-            <a:pPr algn="ctr"/>
-            <a:endParaRPr/>
-          </a:p>
-        </p:txBody>
-      </p:sp>
-      <p:sp>
-        <p:nvSpPr>
-          <p:cNvPr id="84" name="Oval 83"/>
-          <p:cNvSpPr/>
-          <p:nvPr/>
-        </p:nvSpPr>
-        <p:spPr>
-          <a:xfrm>
-            <a:off x="6327648" y="3474720"/>
-            <a:ext cx="274320" cy="274320"/>
-          </a:xfrm>
-          <a:prstGeom prst="ellipse">
-            <a:avLst/>
-          </a:prstGeom>
-          <a:solidFill>
-            <a:srgbClr val="5F8B2F"/>
-          </a:solidFill>
-          <a:ln>
-            <a:noFill/>
-          </a:ln>
-          <a:effectLst/>
-        </p:spPr>
-        <p:style>
-          <a:lnRef idx="1">
-            <a:schemeClr val="accent1"/>
-          </a:lnRef>
-          <a:fillRef idx="3">
-            <a:schemeClr val="accent1"/>
-          </a:fillRef>
-          <a:effectRef idx="2">
-            <a:schemeClr val="accent1"/>
-          </a:effectRef>
-          <a:fontRef idx="minor">
-            <a:schemeClr val="lt1"/>
-          </a:fontRef>
-        </p:style>
-        <p:txBody>
-          <a:bodyPr rtlCol="0" anchor="ctr"/>
-          <a:lstStyle/>
-          <a:p>
-            <a:pPr algn="ctr"/>
-            <a:endParaRPr/>
-          </a:p>
-        </p:txBody>
-      </p:sp>
-      <p:pic>
-        <p:nvPicPr>
-          <p:cNvPr id="85" name="Picture 84" descr="LuDatabase_w.png"/>
-          <p:cNvPicPr>
-            <a:picLocks noChangeAspect="1"/>
-          </p:cNvPicPr>
-          <p:nvPr/>
-        </p:nvPicPr>
-        <p:blipFill>
-          <a:blip r:embed="rId13"/>
-          <a:stretch>
-            <a:fillRect/>
-          </a:stretch>
-        </p:blipFill>
-        <p:spPr>
-          <a:xfrm>
-            <a:off x="6393485" y="3540557"/>
-            <a:ext cx="142646" cy="142646"/>
-          </a:xfrm>
-          <a:prstGeom prst="rect">
-            <a:avLst/>
-          </a:prstGeom>
-        </p:spPr>
-      </p:pic>
-      <p:sp>
-        <p:nvSpPr>
-          <p:cNvPr id="86" name="TextBox 85"/>
-          <p:cNvSpPr txBox="1"/>
-          <p:nvPr/>
-        </p:nvSpPr>
-        <p:spPr>
-          <a:xfrm>
-            <a:off x="6711696" y="3410712"/>
-            <a:ext cx="1645920" cy="146304"/>
-          </a:xfrm>
-          <a:prstGeom prst="rect">
-            <a:avLst/>
-          </a:prstGeom>
-          <a:noFill/>
-        </p:spPr>
-        <p:txBody>
-          <a:bodyPr wrap="square" lIns="0" tIns="0" rIns="0" bIns="0" anchor="t">
-            <a:noAutofit/>
-          </a:bodyPr>
-          <a:lstStyle/>
-          <a:p>
-            <a:pPr algn="l"/>
-            <a:r>
-              <a:rPr sz="650" b="1" i="0" spc="90">
-                <a:solidFill>
-                  <a:srgbClr val="5F8B2F"/>
-                </a:solidFill>
-                <a:latin typeface="Inter"/>
-              </a:rPr>
-              <a:t>RAG MEMORY</a:t>
-            </a:r>
-          </a:p>
-        </p:txBody>
-      </p:sp>
-      <p:sp>
-        <p:nvSpPr>
-          <p:cNvPr id="87" name="TextBox 86"/>
-          <p:cNvSpPr txBox="1"/>
-          <p:nvPr/>
-        </p:nvSpPr>
-        <p:spPr>
-          <a:xfrm>
-            <a:off x="6711696" y="3547872"/>
-            <a:ext cx="1673352" cy="292608"/>
-          </a:xfrm>
-          <a:prstGeom prst="rect">
-            <a:avLst/>
-          </a:prstGeom>
-          <a:noFill/>
-        </p:spPr>
-        <p:txBody>
-          <a:bodyPr wrap="square" lIns="0" tIns="0" rIns="0" bIns="0" anchor="t">
-            <a:noAutofit/>
-          </a:bodyPr>
-          <a:lstStyle/>
-          <a:p>
-            <a:pPr algn="l">
-              <a:lnSpc>
-                <a:spcPct val="105000"/>
-              </a:lnSpc>
-            </a:pPr>
-            <a:r>
-              <a:rPr sz="800" b="0" i="0">
-                <a:solidFill>
-                  <a:srgbClr val="1A1A1E"/>
-                </a:solidFill>
-                <a:latin typeface="Inter"/>
-              </a:rPr>
-              <a:t>SQLite fixes · JSON fingerprints</a:t>
-            </a:r>
-          </a:p>
-        </p:txBody>
-      </p:sp>
-      <p:sp>
-        <p:nvSpPr>
-          <p:cNvPr id="88" name="Rounded Rectangle 87"/>
-          <p:cNvSpPr/>
-          <p:nvPr/>
-        </p:nvSpPr>
-        <p:spPr>
-          <a:xfrm>
-            <a:off x="6217920" y="3950208"/>
-            <a:ext cx="2258568" cy="530352"/>
-          </a:xfrm>
-          <a:prstGeom prst="roundRect">
-            <a:avLst>
-              <a:gd name="adj" fmla="val 12000"/>
-            </a:avLst>
-          </a:prstGeom>
-          <a:solidFill>
-            <a:srgbClr val="F4F6FA"/>
-          </a:solidFill>
-          <a:ln w="7620">
-            <a:solidFill>
-              <a:srgbClr val="D7DEEA"/>
-            </a:solidFill>
-          </a:ln>
-          <a:effectLst/>
-        </p:spPr>
-        <p:style>
-          <a:lnRef idx="1">
-            <a:schemeClr val="accent1"/>
-          </a:lnRef>
-          <a:fillRef idx="3">
-            <a:schemeClr val="accent1"/>
-          </a:fillRef>
-          <a:effectRef idx="2">
-            <a:schemeClr val="accent1"/>
-          </a:effectRef>
-          <a:fontRef idx="minor">
-            <a:schemeClr val="lt1"/>
-          </a:fontRef>
-        </p:style>
-        <p:txBody>
-          <a:bodyPr rtlCol="0" anchor="ctr"/>
-          <a:lstStyle/>
-          <a:p>
-            <a:pPr algn="ctr"/>
-            <a:endParaRPr/>
-          </a:p>
-        </p:txBody>
-      </p:sp>
-      <p:sp>
-        <p:nvSpPr>
-          <p:cNvPr id="89" name="Oval 88"/>
-          <p:cNvSpPr/>
-          <p:nvPr/>
-        </p:nvSpPr>
-        <p:spPr>
-          <a:xfrm>
-            <a:off x="6327648" y="4078224"/>
-            <a:ext cx="274320" cy="274320"/>
-          </a:xfrm>
-          <a:prstGeom prst="ellipse">
-            <a:avLst/>
-          </a:prstGeom>
-          <a:solidFill>
-            <a:srgbClr val="1A2340"/>
-          </a:solidFill>
-          <a:ln>
-            <a:noFill/>
-          </a:ln>
-          <a:effectLst/>
-        </p:spPr>
-        <p:style>
-          <a:lnRef idx="1">
-            <a:schemeClr val="accent1"/>
-          </a:lnRef>
-          <a:fillRef idx="3">
-            <a:schemeClr val="accent1"/>
-          </a:fillRef>
-          <a:effectRef idx="2">
-            <a:schemeClr val="accent1"/>
-          </a:effectRef>
-          <a:fontRef idx="minor">
-            <a:schemeClr val="lt1"/>
-          </a:fontRef>
-        </p:style>
-        <p:txBody>
-          <a:bodyPr rtlCol="0" anchor="ctr"/>
-          <a:lstStyle/>
-          <a:p>
-            <a:pPr algn="ctr"/>
-            <a:endParaRPr/>
-          </a:p>
-        </p:txBody>
-      </p:sp>
-      <p:pic>
-        <p:nvPicPr>
-          <p:cNvPr id="90" name="Picture 89" descr="LuHardDrive_w.png"/>
-          <p:cNvPicPr>
-            <a:picLocks noChangeAspect="1"/>
-          </p:cNvPicPr>
-          <p:nvPr/>
-        </p:nvPicPr>
-        <p:blipFill>
-          <a:blip r:embed="rId14"/>
-          <a:stretch>
-            <a:fillRect/>
-          </a:stretch>
-        </p:blipFill>
-        <p:spPr>
-          <a:xfrm>
-            <a:off x="6393485" y="4144061"/>
-            <a:ext cx="142646" cy="142646"/>
-          </a:xfrm>
-          <a:prstGeom prst="rect">
-            <a:avLst/>
-          </a:prstGeom>
-        </p:spPr>
-      </p:pic>
-      <p:sp>
-        <p:nvSpPr>
-          <p:cNvPr id="91" name="TextBox 90"/>
-          <p:cNvSpPr txBox="1"/>
-          <p:nvPr/>
-        </p:nvSpPr>
-        <p:spPr>
-          <a:xfrm>
-            <a:off x="6711696" y="4014216"/>
-            <a:ext cx="1645920" cy="146304"/>
-          </a:xfrm>
-          <a:prstGeom prst="rect">
-            <a:avLst/>
-          </a:prstGeom>
-          <a:noFill/>
-        </p:spPr>
-        <p:txBody>
-          <a:bodyPr wrap="square" lIns="0" tIns="0" rIns="0" bIns="0" anchor="t">
-            <a:noAutofit/>
-          </a:bodyPr>
-          <a:lstStyle/>
-          <a:p>
-            <a:pPr algn="l"/>
-            <a:r>
-              <a:rPr sz="650" b="1" i="0" spc="90">
-                <a:solidFill>
-                  <a:srgbClr val="1A2340"/>
-                </a:solidFill>
-                <a:latin typeface="Inter"/>
-              </a:rPr>
-              <a:t>INFRASTRUCTURE</a:t>
-            </a:r>
-          </a:p>
-        </p:txBody>
-      </p:sp>
-      <p:sp>
-        <p:nvSpPr>
-          <p:cNvPr id="92" name="TextBox 91"/>
-          <p:cNvSpPr txBox="1"/>
-          <p:nvPr/>
-        </p:nvSpPr>
-        <p:spPr>
-          <a:xfrm>
-            <a:off x="6711696" y="4151376"/>
-            <a:ext cx="1673352" cy="292608"/>
-          </a:xfrm>
-          <a:prstGeom prst="rect">
-            <a:avLst/>
-          </a:prstGeom>
-          <a:noFill/>
-        </p:spPr>
-        <p:txBody>
-          <a:bodyPr wrap="square" lIns="0" tIns="0" rIns="0" bIns="0" anchor="t">
-            <a:noAutofit/>
-          </a:bodyPr>
-          <a:lstStyle/>
-          <a:p>
-            <a:pPr algn="l">
-              <a:lnSpc>
-                <a:spcPct val="105000"/>
-              </a:lnSpc>
-            </a:pPr>
-            <a:r>
-              <a:rPr sz="800" b="0" i="0">
-                <a:solidFill>
-                  <a:srgbClr val="1A1A1E"/>
-                </a:solidFill>
-                <a:latin typeface="Inter"/>
-              </a:rPr>
-              <a:t>24 GB GPU server · internal HTTPS</a:t>
-            </a:r>
-          </a:p>
-        </p:txBody>
-      </p:sp>
-      <p:sp>
-        <p:nvSpPr>
-          <p:cNvPr id="93" name="RAG memory"/>
-          <p:cNvSpPr/>
-          <p:nvPr/>
-        </p:nvSpPr>
-        <p:spPr>
-          <a:xfrm>
-            <a:off x="3081528" y="1709928"/>
-            <a:ext cx="2852928" cy="585216"/>
+            <a:off x="3044952" y="1572768"/>
+            <a:ext cx="1694688" cy="768096"/>
           </a:xfrm>
           <a:prstGeom prst="roundRect">
             <a:avLst>
@@ -13982,32 +12549,19 @@
           </a:ln>
           <a:effectLst/>
         </p:spPr>
-        <p:style>
-          <a:lnRef idx="1">
-            <a:schemeClr val="accent1"/>
-          </a:lnRef>
-          <a:fillRef idx="3">
-            <a:schemeClr val="accent1"/>
-          </a:fillRef>
-          <a:effectRef idx="2">
-            <a:schemeClr val="accent1"/>
-          </a:effectRef>
-          <a:fontRef idx="minor">
-            <a:schemeClr val="lt1"/>
-          </a:fontRef>
-        </p:style>
-        <p:txBody>
-          <a:bodyPr rtlCol="0" anchor="ctr"/>
-          <a:lstStyle/>
-          <a:p>
-            <a:pPr algn="ctr"/>
-            <a:endParaRPr/>
+        <p:txBody>
+          <a:bodyPr wrap="square" lIns="0" tIns="0" rIns="0" bIns="0" rtlCol="0" anchor="ctr">
+            <a:noAutofit/>
+          </a:bodyPr>
+          <a:lstStyle/>
+          <a:p>
+            <a:endParaRPr lang="en-US"/>
           </a:p>
         </p:txBody>
       </p:sp>
       <p:pic>
         <p:nvPicPr>
-          <p:cNvPr id="94" name="RAG memory icon" descr="Lu-database-5F8B2F.png"/>
+          <p:cNvPr id="234" name="RAG memory icon"/>
           <p:cNvPicPr>
             <a:picLocks noChangeAspect="1"/>
           </p:cNvPicPr>
@@ -14021,8 +12575,8 @@
         </p:blipFill>
         <p:spPr>
           <a:xfrm>
-            <a:off x="3191256" y="1801368"/>
-            <a:ext cx="201168" cy="201168"/>
+            <a:off x="3136392" y="1655064"/>
+            <a:ext cx="164592" cy="164592"/>
           </a:xfrm>
           <a:prstGeom prst="rect">
             <a:avLst/>
@@ -14031,29 +12585,36 @@
       </p:pic>
       <p:sp>
         <p:nvSpPr>
-          <p:cNvPr id="95" name="RAG memory title"/>
-          <p:cNvSpPr txBox="1"/>
-          <p:nvPr/>
-        </p:nvSpPr>
-        <p:spPr>
-          <a:xfrm>
-            <a:off x="3474720" y="1815084"/>
-            <a:ext cx="1280160" cy="164592"/>
-          </a:xfrm>
-          <a:prstGeom prst="rect">
-            <a:avLst/>
-          </a:prstGeom>
-          <a:noFill/>
-        </p:spPr>
-        <p:txBody>
-          <a:bodyPr wrap="square" lIns="0" tIns="0" rIns="0" bIns="0" anchor="t">
-            <a:noAutofit/>
-          </a:bodyPr>
-          <a:lstStyle/>
-          <a:p>
-            <a:pPr algn="l"/>
-            <a:r>
-              <a:rPr lang="en-US" sz="850" b="1" i="0" dirty="0">
+          <p:cNvPr id="235" name="RAG memory"/>
+          <p:cNvSpPr txBox="1"/>
+          <p:nvPr/>
+        </p:nvSpPr>
+        <p:spPr>
+          <a:xfrm>
+            <a:off x="3355848" y="1650492"/>
+            <a:ext cx="1328928" cy="155448"/>
+          </a:xfrm>
+          <a:prstGeom prst="rect">
+            <a:avLst/>
+          </a:prstGeom>
+          <a:noFill/>
+        </p:spPr>
+        <p:txBody>
+          <a:bodyPr wrap="square" lIns="0" tIns="0" rIns="0" bIns="0" anchor="t">
+            <a:noAutofit/>
+          </a:bodyPr>
+          <a:lstStyle/>
+          <a:p>
+            <a:pPr algn="l">
+              <a:lnSpc>
+                <a:spcPct val="100000"/>
+              </a:lnSpc>
+              <a:spcBef>
+                <a:spcPts val="0"/>
+              </a:spcBef>
+            </a:pPr>
+            <a:r>
+              <a:rPr lang="en-US" sz="800" b="1" i="0" spc="0" dirty="0">
                 <a:solidFill>
                   <a:srgbClr val="1A1A1E"/>
                 </a:solidFill>
@@ -14066,19 +12627,186 @@
       </p:sp>
       <p:sp>
         <p:nvSpPr>
-          <p:cNvPr id="96" name="RAG memory tag"/>
+          <p:cNvPr id="236" name="RAG memory detail"/>
+          <p:cNvSpPr txBox="1"/>
+          <p:nvPr/>
+        </p:nvSpPr>
+        <p:spPr>
+          <a:xfrm>
+            <a:off x="3136392" y="1856232"/>
+            <a:ext cx="1530096" cy="109728"/>
+          </a:xfrm>
+          <a:prstGeom prst="rect">
+            <a:avLst/>
+          </a:prstGeom>
+          <a:noFill/>
+        </p:spPr>
+        <p:txBody>
+          <a:bodyPr wrap="square" lIns="0" tIns="0" rIns="0" bIns="0" anchor="t">
+            <a:noAutofit/>
+          </a:bodyPr>
+          <a:lstStyle/>
+          <a:p>
+            <a:pPr algn="l">
+              <a:lnSpc>
+                <a:spcPct val="100000"/>
+              </a:lnSpc>
+              <a:spcBef>
+                <a:spcPts val="0"/>
+              </a:spcBef>
+            </a:pPr>
+            <a:r>
+              <a:rPr lang="en-US" sz="650" b="0" i="0" spc="0" dirty="0">
+                <a:solidFill>
+                  <a:srgbClr val="5A6472"/>
+                </a:solidFill>
+                <a:latin typeface="Inter"/>
+              </a:rPr>
+              <a:t>proven fixes · last-known-good</a:t>
+            </a:r>
+          </a:p>
+        </p:txBody>
+      </p:sp>
+      <p:sp>
+        <p:nvSpPr>
+          <p:cNvPr id="237" name="Tool: Fleet Memory"/>
           <p:cNvSpPr/>
           <p:nvPr/>
         </p:nvSpPr>
         <p:spPr>
           <a:xfrm>
-            <a:off x="4818888" y="1819656"/>
-            <a:ext cx="1024128" cy="155448"/>
+            <a:off x="3136392" y="2089404"/>
+            <a:ext cx="676656" cy="146304"/>
           </a:xfrm>
           <a:prstGeom prst="roundRect">
             <a:avLst>
               <a:gd name="adj" fmla="val 50000"/>
             </a:avLst>
+          </a:prstGeom>
+          <a:solidFill>
+            <a:srgbClr val="FFFFFF"/>
+          </a:solidFill>
+          <a:ln w="9525">
+            <a:solidFill>
+              <a:srgbClr val="4A6E24"/>
+            </a:solidFill>
+          </a:ln>
+          <a:effectLst/>
+        </p:spPr>
+        <p:txBody>
+          <a:bodyPr wrap="square" lIns="0" tIns="0" rIns="0" bIns="0" rtlCol="0" anchor="ctr">
+            <a:noAutofit/>
+          </a:bodyPr>
+          <a:lstStyle/>
+          <a:p>
+            <a:pPr algn="ctr">
+              <a:lnSpc>
+                <a:spcPct val="100000"/>
+              </a:lnSpc>
+              <a:spcBef>
+                <a:spcPts val="0"/>
+              </a:spcBef>
+            </a:pPr>
+            <a:r>
+              <a:rPr lang="en-US" sz="550" b="1" i="0" spc="0" dirty="0">
+                <a:solidFill>
+                  <a:srgbClr val="4A6E24"/>
+                </a:solidFill>
+                <a:latin typeface="Inter"/>
+              </a:rPr>
+              <a:t>Fleet Memory</a:t>
+            </a:r>
+          </a:p>
+        </p:txBody>
+      </p:sp>
+      <p:sp>
+        <p:nvSpPr>
+          <p:cNvPr id="238" name="Tool: Last-Good Compare"/>
+          <p:cNvSpPr/>
+          <p:nvPr/>
+        </p:nvSpPr>
+        <p:spPr>
+          <a:xfrm>
+            <a:off x="3858768" y="2089404"/>
+            <a:ext cx="804672" cy="146304"/>
+          </a:xfrm>
+          <a:prstGeom prst="roundRect">
+            <a:avLst>
+              <a:gd name="adj" fmla="val 50000"/>
+            </a:avLst>
+          </a:prstGeom>
+          <a:solidFill>
+            <a:srgbClr val="FFFFFF"/>
+          </a:solidFill>
+          <a:ln w="9525">
+            <a:solidFill>
+              <a:srgbClr val="4A6E24"/>
+            </a:solidFill>
+          </a:ln>
+          <a:effectLst/>
+        </p:spPr>
+        <p:txBody>
+          <a:bodyPr wrap="square" lIns="0" tIns="0" rIns="0" bIns="0" rtlCol="0" anchor="ctr">
+            <a:noAutofit/>
+          </a:bodyPr>
+          <a:lstStyle/>
+          <a:p>
+            <a:pPr algn="ctr">
+              <a:lnSpc>
+                <a:spcPct val="100000"/>
+              </a:lnSpc>
+              <a:spcBef>
+                <a:spcPts val="0"/>
+              </a:spcBef>
+            </a:pPr>
+            <a:r>
+              <a:rPr lang="en-US" sz="550" b="1" i="0" spc="0" dirty="0">
+                <a:solidFill>
+                  <a:srgbClr val="4A6E24"/>
+                </a:solidFill>
+                <a:latin typeface="Inter"/>
+              </a:rPr>
+              <a:t>Last-Good Compare</a:t>
+            </a:r>
+          </a:p>
+        </p:txBody>
+      </p:sp>
+      <p:cxnSp>
+        <p:nvCxnSpPr>
+          <p:cNvPr id="239" name="calls RAG memory"/>
+          <p:cNvCxnSpPr/>
+          <p:nvPr/>
+        </p:nvCxnSpPr>
+        <p:spPr>
+          <a:xfrm>
+            <a:off x="3892296" y="2340864"/>
+            <a:ext cx="0" cy="201168"/>
+          </a:xfrm>
+          <a:prstGeom prst="line">
+            <a:avLst/>
+          </a:prstGeom>
+          <a:ln w="12700">
+            <a:solidFill>
+              <a:srgbClr val="5A6472"/>
+            </a:solidFill>
+            <a:headEnd type="triangle" w="sm" len="sm"/>
+            <a:tailEnd type="triangle" w="sm" len="sm"/>
+          </a:ln>
+        </p:spPr>
+      </p:cxnSp>
+      <p:sp>
+        <p:nvSpPr>
+          <p:cNvPr id="240" name="Call 1"/>
+          <p:cNvSpPr/>
+          <p:nvPr/>
+        </p:nvSpPr>
+        <p:spPr>
+          <a:xfrm>
+            <a:off x="3947160" y="2372868"/>
+            <a:ext cx="137160" cy="137160"/>
+          </a:xfrm>
+          <a:prstGeom prst="ellipse">
+            <a:avLst/>
           </a:prstGeom>
           <a:solidFill>
             <a:srgbClr val="5F8B2F"/>
@@ -14088,140 +12816,2709 @@
           </a:ln>
           <a:effectLst/>
         </p:spPr>
-        <p:style>
-          <a:lnRef idx="1">
-            <a:schemeClr val="accent1"/>
-          </a:lnRef>
-          <a:fillRef idx="3">
-            <a:schemeClr val="accent1"/>
-          </a:fillRef>
-          <a:effectRef idx="2">
-            <a:schemeClr val="accent1"/>
-          </a:effectRef>
-          <a:fontRef idx="minor">
-            <a:schemeClr val="lt1"/>
-          </a:fontRef>
-        </p:style>
         <p:txBody>
           <a:bodyPr wrap="square" lIns="0" tIns="0" rIns="0" bIns="0" rtlCol="0" anchor="ctr">
             <a:noAutofit/>
           </a:bodyPr>
           <a:lstStyle/>
           <a:p>
-            <a:pPr algn="ctr"/>
-            <a:r>
-              <a:rPr lang="en-US" sz="550" b="1" i="0" spc="40" dirty="0">
+            <a:pPr algn="ctr">
+              <a:lnSpc>
+                <a:spcPct val="100000"/>
+              </a:lnSpc>
+              <a:spcBef>
+                <a:spcPts val="0"/>
+              </a:spcBef>
+            </a:pPr>
+            <a:r>
+              <a:rPr lang="en-US" sz="550" b="1" i="0" spc="0" dirty="0">
                 <a:solidFill>
                   <a:srgbClr val="FFFFFF"/>
                 </a:solidFill>
                 <a:latin typeface="Inter"/>
               </a:rPr>
-              <a:t>RETRIEVAL-AUGMENTED</a:t>
-            </a:r>
-          </a:p>
-        </p:txBody>
-      </p:sp>
-      <p:sp>
-        <p:nvSpPr>
-          <p:cNvPr id="97" name="RAG memory detail"/>
-          <p:cNvSpPr txBox="1"/>
-          <p:nvPr/>
-        </p:nvSpPr>
-        <p:spPr>
-          <a:xfrm>
-            <a:off x="3191256" y="2075688"/>
-            <a:ext cx="2670048" cy="146304"/>
-          </a:xfrm>
-          <a:prstGeom prst="rect">
-            <a:avLst/>
-          </a:prstGeom>
-          <a:noFill/>
-        </p:spPr>
-        <p:txBody>
-          <a:bodyPr wrap="square" lIns="0" tIns="0" rIns="0" bIns="0" anchor="t">
-            <a:noAutofit/>
-          </a:bodyPr>
-          <a:lstStyle/>
-          <a:p>
-            <a:pPr algn="l"/>
-            <a:r>
-              <a:rPr lang="en-US" sz="700" b="0" i="0" dirty="0">
+              <a:t>1</a:t>
+            </a:r>
+          </a:p>
+        </p:txBody>
+      </p:sp>
+      <p:sp>
+        <p:nvSpPr>
+          <p:cNvPr id="241" name="Similarity engine"/>
+          <p:cNvSpPr/>
+          <p:nvPr/>
+        </p:nvSpPr>
+        <p:spPr>
+          <a:xfrm>
+            <a:off x="4858512" y="1572768"/>
+            <a:ext cx="1694688" cy="768096"/>
+          </a:xfrm>
+          <a:prstGeom prst="roundRect">
+            <a:avLst>
+              <a:gd name="adj" fmla="val 12000"/>
+            </a:avLst>
+          </a:prstGeom>
+          <a:solidFill>
+            <a:srgbClr val="EEF3FA"/>
+          </a:solidFill>
+          <a:ln w="15875">
+            <a:solidFill>
+              <a:srgbClr val="2A5C9E"/>
+            </a:solidFill>
+          </a:ln>
+          <a:effectLst/>
+        </p:spPr>
+        <p:txBody>
+          <a:bodyPr wrap="square" lIns="0" tIns="0" rIns="0" bIns="0" rtlCol="0" anchor="ctr">
+            <a:noAutofit/>
+          </a:bodyPr>
+          <a:lstStyle/>
+          <a:p>
+            <a:endParaRPr lang="en-US"/>
+          </a:p>
+        </p:txBody>
+      </p:sp>
+      <p:pic>
+        <p:nvPicPr>
+          <p:cNvPr id="242" name="Similarity engine icon"/>
+          <p:cNvPicPr>
+            <a:picLocks noChangeAspect="1"/>
+          </p:cNvPicPr>
+          <p:nvPr/>
+        </p:nvPicPr>
+        <p:blipFill>
+          <a:blip r:embed="rId7"/>
+          <a:stretch>
+            <a:fillRect/>
+          </a:stretch>
+        </p:blipFill>
+        <p:spPr>
+          <a:xfrm>
+            <a:off x="4949952" y="1655064"/>
+            <a:ext cx="164592" cy="164592"/>
+          </a:xfrm>
+          <a:prstGeom prst="rect">
+            <a:avLst/>
+          </a:prstGeom>
+        </p:spPr>
+      </p:pic>
+      <p:sp>
+        <p:nvSpPr>
+          <p:cNvPr id="243" name="Similarity engine"/>
+          <p:cNvSpPr txBox="1"/>
+          <p:nvPr/>
+        </p:nvSpPr>
+        <p:spPr>
+          <a:xfrm>
+            <a:off x="5169408" y="1650492"/>
+            <a:ext cx="1328928" cy="155448"/>
+          </a:xfrm>
+          <a:prstGeom prst="rect">
+            <a:avLst/>
+          </a:prstGeom>
+          <a:noFill/>
+        </p:spPr>
+        <p:txBody>
+          <a:bodyPr wrap="square" lIns="0" tIns="0" rIns="0" bIns="0" anchor="t">
+            <a:noAutofit/>
+          </a:bodyPr>
+          <a:lstStyle/>
+          <a:p>
+            <a:pPr algn="l">
+              <a:lnSpc>
+                <a:spcPct val="100000"/>
+              </a:lnSpc>
+              <a:spcBef>
+                <a:spcPts val="0"/>
+              </a:spcBef>
+            </a:pPr>
+            <a:r>
+              <a:rPr lang="en-US" sz="800" b="1" i="0" spc="0" dirty="0">
+                <a:solidFill>
+                  <a:srgbClr val="1A1A1E"/>
+                </a:solidFill>
+                <a:latin typeface="Inter"/>
+              </a:rPr>
+              <a:t>Similarity engine</a:t>
+            </a:r>
+          </a:p>
+        </p:txBody>
+      </p:sp>
+      <p:sp>
+        <p:nvSpPr>
+          <p:cNvPr id="244" name="Similarity engine detail"/>
+          <p:cNvSpPr txBox="1"/>
+          <p:nvPr/>
+        </p:nvSpPr>
+        <p:spPr>
+          <a:xfrm>
+            <a:off x="4949952" y="1856232"/>
+            <a:ext cx="1530096" cy="109728"/>
+          </a:xfrm>
+          <a:prstGeom prst="rect">
+            <a:avLst/>
+          </a:prstGeom>
+          <a:noFill/>
+        </p:spPr>
+        <p:txBody>
+          <a:bodyPr wrap="square" lIns="0" tIns="0" rIns="0" bIns="0" anchor="t">
+            <a:noAutofit/>
+          </a:bodyPr>
+          <a:lstStyle/>
+          <a:p>
+            <a:pPr algn="l">
+              <a:lnSpc>
+                <a:spcPct val="100000"/>
+              </a:lnSpc>
+              <a:spcBef>
+                <a:spcPts val="0"/>
+              </a:spcBef>
+            </a:pPr>
+            <a:r>
+              <a:rPr lang="en-US" sz="650" b="0" i="0" spc="0" dirty="0">
                 <a:solidFill>
                   <a:srgbClr val="5A6472"/>
                 </a:solidFill>
                 <a:latin typeface="Inter"/>
               </a:rPr>
-              <a:t>proven fleet fixes  ·  last-known-good fingerprints</a:t>
-            </a:r>
-          </a:p>
-        </p:txBody>
-      </p:sp>
-      <p:sp>
-        <p:nvSpPr>
-          <p:cNvPr id="98" name="Learn label"/>
-          <p:cNvSpPr txBox="1"/>
-          <p:nvPr/>
-        </p:nvSpPr>
-        <p:spPr>
-          <a:xfrm>
-            <a:off x="3785616" y="2423160"/>
-            <a:ext cx="502920" cy="118872"/>
-          </a:xfrm>
-          <a:prstGeom prst="rect">
-            <a:avLst/>
-          </a:prstGeom>
-          <a:noFill/>
-        </p:spPr>
-        <p:txBody>
-          <a:bodyPr wrap="square" lIns="0" tIns="0" rIns="0" bIns="0" anchor="t">
-            <a:noAutofit/>
-          </a:bodyPr>
-          <a:lstStyle/>
-          <a:p>
-            <a:pPr algn="l"/>
-            <a:r>
-              <a:rPr lang="en-US" sz="600" b="0" i="0" dirty="0">
-                <a:solidFill>
-                  <a:srgbClr val="4A6E24"/>
+              <a:t>8 signals + sentence embeddings</a:t>
+            </a:r>
+          </a:p>
+        </p:txBody>
+      </p:sp>
+      <p:sp>
+        <p:nvSpPr>
+          <p:cNvPr id="245" name="Tool: Candidate Ranker"/>
+          <p:cNvSpPr/>
+          <p:nvPr/>
+        </p:nvSpPr>
+        <p:spPr>
+          <a:xfrm>
+            <a:off x="4949952" y="2089404"/>
+            <a:ext cx="731520" cy="146304"/>
+          </a:xfrm>
+          <a:prstGeom prst="roundRect">
+            <a:avLst>
+              <a:gd name="adj" fmla="val 50000"/>
+            </a:avLst>
+          </a:prstGeom>
+          <a:solidFill>
+            <a:srgbClr val="FFFFFF"/>
+          </a:solidFill>
+          <a:ln w="9525">
+            <a:solidFill>
+              <a:srgbClr val="2A5C9E"/>
+            </a:solidFill>
+          </a:ln>
+          <a:effectLst/>
+        </p:spPr>
+        <p:txBody>
+          <a:bodyPr wrap="square" lIns="0" tIns="0" rIns="0" bIns="0" rtlCol="0" anchor="ctr">
+            <a:noAutofit/>
+          </a:bodyPr>
+          <a:lstStyle/>
+          <a:p>
+            <a:pPr algn="ctr">
+              <a:lnSpc>
+                <a:spcPct val="100000"/>
+              </a:lnSpc>
+              <a:spcBef>
+                <a:spcPts val="0"/>
+              </a:spcBef>
+            </a:pPr>
+            <a:r>
+              <a:rPr lang="en-US" sz="550" b="1" i="0" spc="0" dirty="0">
+                <a:solidFill>
+                  <a:srgbClr val="2A5C9E"/>
+                </a:solidFill>
+                <a:latin typeface="Inter"/>
+              </a:rPr>
+              <a:t>Candidate Ranker</a:t>
+            </a:r>
+          </a:p>
+        </p:txBody>
+      </p:sp>
+      <p:sp>
+        <p:nvSpPr>
+          <p:cNvPr id="246" name="Tool: Element Inspector"/>
+          <p:cNvSpPr/>
+          <p:nvPr/>
+        </p:nvSpPr>
+        <p:spPr>
+          <a:xfrm>
+            <a:off x="5727192" y="2089404"/>
+            <a:ext cx="768096" cy="146304"/>
+          </a:xfrm>
+          <a:prstGeom prst="roundRect">
+            <a:avLst>
+              <a:gd name="adj" fmla="val 50000"/>
+            </a:avLst>
+          </a:prstGeom>
+          <a:solidFill>
+            <a:srgbClr val="FFFFFF"/>
+          </a:solidFill>
+          <a:ln w="9525">
+            <a:solidFill>
+              <a:srgbClr val="2A5C9E"/>
+            </a:solidFill>
+          </a:ln>
+          <a:effectLst/>
+        </p:spPr>
+        <p:txBody>
+          <a:bodyPr wrap="square" lIns="0" tIns="0" rIns="0" bIns="0" rtlCol="0" anchor="ctr">
+            <a:noAutofit/>
+          </a:bodyPr>
+          <a:lstStyle/>
+          <a:p>
+            <a:pPr algn="ctr">
+              <a:lnSpc>
+                <a:spcPct val="100000"/>
+              </a:lnSpc>
+              <a:spcBef>
+                <a:spcPts val="0"/>
+              </a:spcBef>
+            </a:pPr>
+            <a:r>
+              <a:rPr lang="en-US" sz="550" b="1" i="0" spc="0" dirty="0">
+                <a:solidFill>
+                  <a:srgbClr val="2A5C9E"/>
+                </a:solidFill>
+                <a:latin typeface="Inter"/>
+              </a:rPr>
+              <a:t>Element Inspector</a:t>
+            </a:r>
+          </a:p>
+        </p:txBody>
+      </p:sp>
+      <p:cxnSp>
+        <p:nvCxnSpPr>
+          <p:cNvPr id="247" name="calls Similarity engine"/>
+          <p:cNvCxnSpPr/>
+          <p:nvPr/>
+        </p:nvCxnSpPr>
+        <p:spPr>
+          <a:xfrm>
+            <a:off x="5705856" y="2340864"/>
+            <a:ext cx="0" cy="201168"/>
+          </a:xfrm>
+          <a:prstGeom prst="line">
+            <a:avLst/>
+          </a:prstGeom>
+          <a:ln w="12700">
+            <a:solidFill>
+              <a:srgbClr val="5A6472"/>
+            </a:solidFill>
+            <a:headEnd type="triangle" w="sm" len="sm"/>
+            <a:tailEnd type="triangle" w="sm" len="sm"/>
+          </a:ln>
+        </p:spPr>
+      </p:cxnSp>
+      <p:sp>
+        <p:nvSpPr>
+          <p:cNvPr id="248" name="Call 3"/>
+          <p:cNvSpPr/>
+          <p:nvPr/>
+        </p:nvSpPr>
+        <p:spPr>
+          <a:xfrm>
+            <a:off x="5760720" y="2372868"/>
+            <a:ext cx="137160" cy="137160"/>
+          </a:xfrm>
+          <a:prstGeom prst="ellipse">
+            <a:avLst/>
+          </a:prstGeom>
+          <a:solidFill>
+            <a:srgbClr val="2A5C9E"/>
+          </a:solidFill>
+          <a:ln>
+            <a:noFill/>
+          </a:ln>
+          <a:effectLst/>
+        </p:spPr>
+        <p:txBody>
+          <a:bodyPr wrap="square" lIns="0" tIns="0" rIns="0" bIns="0" rtlCol="0" anchor="ctr">
+            <a:noAutofit/>
+          </a:bodyPr>
+          <a:lstStyle/>
+          <a:p>
+            <a:pPr algn="ctr">
+              <a:lnSpc>
+                <a:spcPct val="100000"/>
+              </a:lnSpc>
+              <a:spcBef>
+                <a:spcPts val="0"/>
+              </a:spcBef>
+            </a:pPr>
+            <a:r>
+              <a:rPr lang="en-US" sz="550" b="1" i="0" spc="0" dirty="0">
+                <a:solidFill>
+                  <a:srgbClr val="FFFFFF"/>
+                </a:solidFill>
+                <a:latin typeface="Inter"/>
+              </a:rPr>
+              <a:t>3</a:t>
+            </a:r>
+          </a:p>
+        </p:txBody>
+      </p:sp>
+      <p:sp>
+        <p:nvSpPr>
+          <p:cNvPr id="249" name="Fine-tuned LLM"/>
+          <p:cNvSpPr/>
+          <p:nvPr/>
+        </p:nvSpPr>
+        <p:spPr>
+          <a:xfrm>
+            <a:off x="6672072" y="1572768"/>
+            <a:ext cx="1694688" cy="768096"/>
+          </a:xfrm>
+          <a:prstGeom prst="roundRect">
+            <a:avLst>
+              <a:gd name="adj" fmla="val 12000"/>
+            </a:avLst>
+          </a:prstGeom>
+          <a:solidFill>
+            <a:srgbClr val="FBF1E8"/>
+          </a:solidFill>
+          <a:ln w="15875">
+            <a:solidFill>
+              <a:srgbClr val="C1702D"/>
+            </a:solidFill>
+          </a:ln>
+          <a:effectLst/>
+        </p:spPr>
+        <p:txBody>
+          <a:bodyPr wrap="square" lIns="0" tIns="0" rIns="0" bIns="0" rtlCol="0" anchor="ctr">
+            <a:noAutofit/>
+          </a:bodyPr>
+          <a:lstStyle/>
+          <a:p>
+            <a:endParaRPr lang="en-US"/>
+          </a:p>
+        </p:txBody>
+      </p:sp>
+      <p:pic>
+        <p:nvPicPr>
+          <p:cNvPr id="250" name="Fine-tuned LLM icon"/>
+          <p:cNvPicPr>
+            <a:picLocks noChangeAspect="1"/>
+          </p:cNvPicPr>
+          <p:nvPr/>
+        </p:nvPicPr>
+        <p:blipFill>
+          <a:blip r:embed="rId9"/>
+          <a:stretch>
+            <a:fillRect/>
+          </a:stretch>
+        </p:blipFill>
+        <p:spPr>
+          <a:xfrm>
+            <a:off x="6763512" y="1655064"/>
+            <a:ext cx="164592" cy="164592"/>
+          </a:xfrm>
+          <a:prstGeom prst="rect">
+            <a:avLst/>
+          </a:prstGeom>
+        </p:spPr>
+      </p:pic>
+      <p:sp>
+        <p:nvSpPr>
+          <p:cNvPr id="251" name="Fine-tuned LLM"/>
+          <p:cNvSpPr txBox="1"/>
+          <p:nvPr/>
+        </p:nvSpPr>
+        <p:spPr>
+          <a:xfrm>
+            <a:off x="6982968" y="1650492"/>
+            <a:ext cx="1328928" cy="155448"/>
+          </a:xfrm>
+          <a:prstGeom prst="rect">
+            <a:avLst/>
+          </a:prstGeom>
+          <a:noFill/>
+        </p:spPr>
+        <p:txBody>
+          <a:bodyPr wrap="square" lIns="0" tIns="0" rIns="0" bIns="0" anchor="t">
+            <a:noAutofit/>
+          </a:bodyPr>
+          <a:lstStyle/>
+          <a:p>
+            <a:pPr algn="l">
+              <a:lnSpc>
+                <a:spcPct val="100000"/>
+              </a:lnSpc>
+              <a:spcBef>
+                <a:spcPts val="0"/>
+              </a:spcBef>
+            </a:pPr>
+            <a:r>
+              <a:rPr lang="en-US" sz="800" b="1" i="0" spc="0" dirty="0">
+                <a:solidFill>
+                  <a:srgbClr val="1A1A1E"/>
+                </a:solidFill>
+                <a:latin typeface="Inter"/>
+              </a:rPr>
+              <a:t>Fine-tuned LLM</a:t>
+            </a:r>
+          </a:p>
+        </p:txBody>
+      </p:sp>
+      <p:sp>
+        <p:nvSpPr>
+          <p:cNvPr id="252" name="Fine-tuned LLM detail"/>
+          <p:cNvSpPr txBox="1"/>
+          <p:nvPr/>
+        </p:nvSpPr>
+        <p:spPr>
+          <a:xfrm>
+            <a:off x="6763512" y="1856232"/>
+            <a:ext cx="1530096" cy="109728"/>
+          </a:xfrm>
+          <a:prstGeom prst="rect">
+            <a:avLst/>
+          </a:prstGeom>
+          <a:noFill/>
+        </p:spPr>
+        <p:txBody>
+          <a:bodyPr wrap="square" lIns="0" tIns="0" rIns="0" bIns="0" anchor="t">
+            <a:noAutofit/>
+          </a:bodyPr>
+          <a:lstStyle/>
+          <a:p>
+            <a:pPr algn="l">
+              <a:lnSpc>
+                <a:spcPct val="100000"/>
+              </a:lnSpc>
+              <a:spcBef>
+                <a:spcPts val="0"/>
+              </a:spcBef>
+            </a:pPr>
+            <a:r>
+              <a:rPr lang="en-US" sz="650" b="0" i="0" spc="0" dirty="0">
+                <a:solidFill>
+                  <a:srgbClr val="5A6472"/>
+                </a:solidFill>
+                <a:latin typeface="Inter"/>
+              </a:rPr>
+              <a:t>LLM judge + Laya checker</a:t>
+            </a:r>
+          </a:p>
+        </p:txBody>
+      </p:sp>
+      <p:sp>
+        <p:nvSpPr>
+          <p:cNvPr id="253" name="Tool: LLM Judge"/>
+          <p:cNvSpPr/>
+          <p:nvPr/>
+        </p:nvSpPr>
+        <p:spPr>
+          <a:xfrm>
+            <a:off x="6763512" y="2089404"/>
+            <a:ext cx="731520" cy="146304"/>
+          </a:xfrm>
+          <a:prstGeom prst="roundRect">
+            <a:avLst>
+              <a:gd name="adj" fmla="val 50000"/>
+            </a:avLst>
+          </a:prstGeom>
+          <a:solidFill>
+            <a:srgbClr val="FFFFFF"/>
+          </a:solidFill>
+          <a:ln w="9525">
+            <a:solidFill>
+              <a:srgbClr val="C1702D"/>
+            </a:solidFill>
+          </a:ln>
+          <a:effectLst/>
+        </p:spPr>
+        <p:txBody>
+          <a:bodyPr wrap="square" lIns="0" tIns="0" rIns="0" bIns="0" rtlCol="0" anchor="ctr">
+            <a:noAutofit/>
+          </a:bodyPr>
+          <a:lstStyle/>
+          <a:p>
+            <a:pPr algn="ctr">
+              <a:lnSpc>
+                <a:spcPct val="100000"/>
+              </a:lnSpc>
+              <a:spcBef>
+                <a:spcPts val="0"/>
+              </a:spcBef>
+            </a:pPr>
+            <a:r>
+              <a:rPr lang="en-US" sz="550" b="1" i="0" spc="0" dirty="0">
+                <a:solidFill>
+                  <a:srgbClr val="C1702D"/>
+                </a:solidFill>
+                <a:latin typeface="Inter"/>
+              </a:rPr>
+              <a:t>LLM Judge</a:t>
+            </a:r>
+          </a:p>
+        </p:txBody>
+      </p:sp>
+      <p:sp>
+        <p:nvSpPr>
+          <p:cNvPr id="254" name="Tool: Checker"/>
+          <p:cNvSpPr/>
+          <p:nvPr/>
+        </p:nvSpPr>
+        <p:spPr>
+          <a:xfrm>
+            <a:off x="7540752" y="2089404"/>
+            <a:ext cx="731520" cy="146304"/>
+          </a:xfrm>
+          <a:prstGeom prst="roundRect">
+            <a:avLst>
+              <a:gd name="adj" fmla="val 50000"/>
+            </a:avLst>
+          </a:prstGeom>
+          <a:solidFill>
+            <a:srgbClr val="FFFFFF"/>
+          </a:solidFill>
+          <a:ln w="9525">
+            <a:solidFill>
+              <a:srgbClr val="C1702D"/>
+            </a:solidFill>
+          </a:ln>
+          <a:effectLst/>
+        </p:spPr>
+        <p:txBody>
+          <a:bodyPr wrap="square" lIns="0" tIns="0" rIns="0" bIns="0" rtlCol="0" anchor="ctr">
+            <a:noAutofit/>
+          </a:bodyPr>
+          <a:lstStyle/>
+          <a:p>
+            <a:pPr algn="ctr">
+              <a:lnSpc>
+                <a:spcPct val="100000"/>
+              </a:lnSpc>
+              <a:spcBef>
+                <a:spcPts val="0"/>
+              </a:spcBef>
+            </a:pPr>
+            <a:r>
+              <a:rPr lang="en-US" sz="550" b="1" i="0" spc="0" dirty="0">
+                <a:solidFill>
+                  <a:srgbClr val="C1702D"/>
+                </a:solidFill>
+                <a:latin typeface="Inter"/>
+              </a:rPr>
+              <a:t>Checker</a:t>
+            </a:r>
+          </a:p>
+        </p:txBody>
+      </p:sp>
+      <p:cxnSp>
+        <p:nvCxnSpPr>
+          <p:cNvPr id="255" name="calls Fine-tuned LLM"/>
+          <p:cNvCxnSpPr/>
+          <p:nvPr/>
+        </p:nvCxnSpPr>
+        <p:spPr>
+          <a:xfrm>
+            <a:off x="7519416" y="2340864"/>
+            <a:ext cx="0" cy="201168"/>
+          </a:xfrm>
+          <a:prstGeom prst="line">
+            <a:avLst/>
+          </a:prstGeom>
+          <a:ln w="12700">
+            <a:solidFill>
+              <a:srgbClr val="5A6472"/>
+            </a:solidFill>
+            <a:headEnd type="triangle" w="sm" len="sm"/>
+            <a:tailEnd type="triangle" w="sm" len="sm"/>
+          </a:ln>
+        </p:spPr>
+      </p:cxnSp>
+      <p:sp>
+        <p:nvSpPr>
+          <p:cNvPr id="256" name="Call 4"/>
+          <p:cNvSpPr/>
+          <p:nvPr/>
+        </p:nvSpPr>
+        <p:spPr>
+          <a:xfrm>
+            <a:off x="7574280" y="2372868"/>
+            <a:ext cx="137160" cy="137160"/>
+          </a:xfrm>
+          <a:prstGeom prst="ellipse">
+            <a:avLst/>
+          </a:prstGeom>
+          <a:solidFill>
+            <a:srgbClr val="C1702D"/>
+          </a:solidFill>
+          <a:ln>
+            <a:noFill/>
+          </a:ln>
+          <a:effectLst/>
+        </p:spPr>
+        <p:txBody>
+          <a:bodyPr wrap="square" lIns="0" tIns="0" rIns="0" bIns="0" rtlCol="0" anchor="ctr">
+            <a:noAutofit/>
+          </a:bodyPr>
+          <a:lstStyle/>
+          <a:p>
+            <a:pPr algn="ctr">
+              <a:lnSpc>
+                <a:spcPct val="100000"/>
+              </a:lnSpc>
+              <a:spcBef>
+                <a:spcPts val="0"/>
+              </a:spcBef>
+            </a:pPr>
+            <a:r>
+              <a:rPr lang="en-US" sz="550" b="1" i="0" spc="0" dirty="0">
+                <a:solidFill>
+                  <a:srgbClr val="FFFFFF"/>
+                </a:solidFill>
+                <a:latin typeface="Inter"/>
+              </a:rPr>
+              <a:t>4</a:t>
+            </a:r>
+          </a:p>
+        </p:txBody>
+      </p:sp>
+      <p:sp>
+        <p:nvSpPr>
+          <p:cNvPr id="257" name="ReFlex Agent"/>
+          <p:cNvSpPr/>
+          <p:nvPr/>
+        </p:nvSpPr>
+        <p:spPr>
+          <a:xfrm>
+            <a:off x="3044952" y="2542032"/>
+            <a:ext cx="5321808" cy="804672"/>
+          </a:xfrm>
+          <a:prstGeom prst="roundRect">
+            <a:avLst>
+              <a:gd name="adj" fmla="val 8000"/>
+            </a:avLst>
+          </a:prstGeom>
+          <a:solidFill>
+            <a:srgbClr val="FFFFFF"/>
+          </a:solidFill>
+          <a:ln w="19050">
+            <a:solidFill>
+              <a:srgbClr val="1428A0"/>
+            </a:solidFill>
+          </a:ln>
+          <a:effectLst/>
+        </p:spPr>
+        <p:txBody>
+          <a:bodyPr wrap="square" lIns="0" tIns="0" rIns="0" bIns="0" rtlCol="0" anchor="ctr">
+            <a:noAutofit/>
+          </a:bodyPr>
+          <a:lstStyle/>
+          <a:p>
+            <a:endParaRPr lang="en-US"/>
+          </a:p>
+        </p:txBody>
+      </p:sp>
+      <p:sp>
+        <p:nvSpPr>
+          <p:cNvPr id="258" name="ReFlex Agent badge"/>
+          <p:cNvSpPr/>
+          <p:nvPr/>
+        </p:nvSpPr>
+        <p:spPr>
+          <a:xfrm>
+            <a:off x="3136392" y="2615184"/>
+            <a:ext cx="274320" cy="274320"/>
+          </a:xfrm>
+          <a:prstGeom prst="ellipse">
+            <a:avLst/>
+          </a:prstGeom>
+          <a:solidFill>
+            <a:srgbClr val="1428A0"/>
+          </a:solidFill>
+          <a:ln>
+            <a:noFill/>
+          </a:ln>
+          <a:effectLst/>
+        </p:spPr>
+        <p:txBody>
+          <a:bodyPr wrap="square" lIns="0" tIns="0" rIns="0" bIns="0" rtlCol="0" anchor="ctr">
+            <a:noAutofit/>
+          </a:bodyPr>
+          <a:lstStyle/>
+          <a:p>
+            <a:endParaRPr lang="en-US"/>
+          </a:p>
+        </p:txBody>
+      </p:sp>
+      <p:pic>
+        <p:nvPicPr>
+          <p:cNvPr id="259" name="ReFlex Agent icon"/>
+          <p:cNvPicPr>
+            <a:picLocks noChangeAspect="1"/>
+          </p:cNvPicPr>
+          <p:nvPr/>
+        </p:nvPicPr>
+        <p:blipFill>
+          <a:blip r:embed="rId10"/>
+          <a:stretch>
+            <a:fillRect/>
+          </a:stretch>
+        </p:blipFill>
+        <p:spPr>
+          <a:xfrm>
+            <a:off x="3200400" y="2679192"/>
+            <a:ext cx="146304" cy="146304"/>
+          </a:xfrm>
+          <a:prstGeom prst="rect">
+            <a:avLst/>
+          </a:prstGeom>
+        </p:spPr>
+      </p:pic>
+      <p:sp>
+        <p:nvSpPr>
+          <p:cNvPr id="260" name="ReFlex Agent title"/>
+          <p:cNvSpPr txBox="1"/>
+          <p:nvPr/>
+        </p:nvSpPr>
+        <p:spPr>
+          <a:xfrm>
+            <a:off x="3483864" y="2601468"/>
+            <a:ext cx="1828800" cy="164592"/>
+          </a:xfrm>
+          <a:prstGeom prst="rect">
+            <a:avLst/>
+          </a:prstGeom>
+          <a:noFill/>
+        </p:spPr>
+        <p:txBody>
+          <a:bodyPr wrap="square" lIns="0" tIns="0" rIns="0" bIns="0" anchor="t">
+            <a:noAutofit/>
+          </a:bodyPr>
+          <a:lstStyle/>
+          <a:p>
+            <a:pPr algn="l">
+              <a:lnSpc>
+                <a:spcPct val="100000"/>
+              </a:lnSpc>
+              <a:spcBef>
+                <a:spcPts val="0"/>
+              </a:spcBef>
+            </a:pPr>
+            <a:r>
+              <a:rPr lang="en-US" sz="900" b="1" i="0" spc="0" dirty="0">
+                <a:solidFill>
+                  <a:srgbClr val="1A1A1E"/>
+                </a:solidFill>
+                <a:latin typeface="Inter"/>
+              </a:rPr>
+              <a:t>ReFlex Agent</a:t>
+            </a:r>
+          </a:p>
+        </p:txBody>
+      </p:sp>
+      <p:sp>
+        <p:nvSpPr>
+          <p:cNvPr id="261" name="ReFlex Agent detail"/>
+          <p:cNvSpPr txBox="1"/>
+          <p:nvPr/>
+        </p:nvSpPr>
+        <p:spPr>
+          <a:xfrm>
+            <a:off x="3483864" y="2766060"/>
+            <a:ext cx="3657600" cy="109728"/>
+          </a:xfrm>
+          <a:prstGeom prst="rect">
+            <a:avLst/>
+          </a:prstGeom>
+          <a:noFill/>
+        </p:spPr>
+        <p:txBody>
+          <a:bodyPr wrap="square" lIns="0" tIns="0" rIns="0" bIns="0" anchor="t">
+            <a:noAutofit/>
+          </a:bodyPr>
+          <a:lstStyle/>
+          <a:p>
+            <a:pPr algn="l">
+              <a:lnSpc>
+                <a:spcPct val="100000"/>
+              </a:lnSpc>
+              <a:spcBef>
+                <a:spcPts val="0"/>
+              </a:spcBef>
+            </a:pPr>
+            <a:r>
+              <a:rPr lang="en-US" sz="650" b="0" i="0" spc="0" dirty="0">
+                <a:solidFill>
+                  <a:srgbClr val="5A6472"/>
+                </a:solidFill>
+                <a:latin typeface="Inter"/>
+              </a:rPr>
+              <a:t>LLM planner · picks the next tool, reads the result, decides again</a:t>
+            </a:r>
+          </a:p>
+        </p:txBody>
+      </p:sp>
+      <p:sp>
+        <p:nvSpPr>
+          <p:cNvPr id="262" name="AGENT LOOP  ·  UP TO 8 TOOL CALLS"/>
+          <p:cNvSpPr/>
+          <p:nvPr/>
+        </p:nvSpPr>
+        <p:spPr>
+          <a:xfrm>
+            <a:off x="6793992" y="2633472"/>
+            <a:ext cx="1481328" cy="146304"/>
+          </a:xfrm>
+          <a:prstGeom prst="roundRect">
+            <a:avLst>
+              <a:gd name="adj" fmla="val 50000"/>
+            </a:avLst>
+          </a:prstGeom>
+          <a:solidFill>
+            <a:srgbClr val="1428A0"/>
+          </a:solidFill>
+          <a:ln>
+            <a:noFill/>
+          </a:ln>
+          <a:effectLst/>
+        </p:spPr>
+        <p:txBody>
+          <a:bodyPr wrap="square" lIns="0" tIns="0" rIns="0" bIns="0" rtlCol="0" anchor="ctr">
+            <a:noAutofit/>
+          </a:bodyPr>
+          <a:lstStyle/>
+          <a:p>
+            <a:pPr algn="ctr">
+              <a:lnSpc>
+                <a:spcPct val="100000"/>
+              </a:lnSpc>
+              <a:spcBef>
+                <a:spcPts val="0"/>
+              </a:spcBef>
+            </a:pPr>
+            <a:r>
+              <a:rPr lang="en-US" sz="500" b="1" i="0" spc="60" dirty="0">
+                <a:solidFill>
+                  <a:srgbClr val="FFFFFF"/>
+                </a:solidFill>
+                <a:latin typeface="Inter"/>
+              </a:rPr>
+              <a:t>AGENT LOOP  ·  UP TO 8 TOOL CALLS</a:t>
+            </a:r>
+          </a:p>
+        </p:txBody>
+      </p:sp>
+      <p:sp>
+        <p:nvSpPr>
+          <p:cNvPr id="263" name="EXAMPLE REPAIR, CALL BY CALL"/>
+          <p:cNvSpPr txBox="1"/>
+          <p:nvPr/>
+        </p:nvSpPr>
+        <p:spPr>
+          <a:xfrm>
+            <a:off x="3136392" y="2935224"/>
+            <a:ext cx="2011680" cy="100584"/>
+          </a:xfrm>
+          <a:prstGeom prst="rect">
+            <a:avLst/>
+          </a:prstGeom>
+          <a:noFill/>
+        </p:spPr>
+        <p:txBody>
+          <a:bodyPr wrap="square" lIns="0" tIns="0" rIns="0" bIns="0" anchor="t">
+            <a:noAutofit/>
+          </a:bodyPr>
+          <a:lstStyle/>
+          <a:p>
+            <a:pPr algn="l">
+              <a:lnSpc>
+                <a:spcPct val="100000"/>
+              </a:lnSpc>
+              <a:spcBef>
+                <a:spcPts val="0"/>
+              </a:spcBef>
+            </a:pPr>
+            <a:r>
+              <a:rPr lang="en-US" sz="500" b="1" i="0" spc="120" dirty="0">
+                <a:solidFill>
+                  <a:srgbClr val="5A6472"/>
+                </a:solidFill>
+                <a:latin typeface="Inter"/>
+              </a:rPr>
+              <a:t>EXAMPLE REPAIR, CALL BY CALL</a:t>
+            </a:r>
+          </a:p>
+        </p:txBody>
+      </p:sp>
+      <p:sp>
+        <p:nvSpPr>
+          <p:cNvPr id="264" name="Tool: 1  Fleet Memory"/>
+          <p:cNvSpPr/>
+          <p:nvPr/>
+        </p:nvSpPr>
+        <p:spPr>
+          <a:xfrm>
+            <a:off x="3136392" y="3058668"/>
+            <a:ext cx="749808" cy="146304"/>
+          </a:xfrm>
+          <a:prstGeom prst="roundRect">
+            <a:avLst>
+              <a:gd name="adj" fmla="val 50000"/>
+            </a:avLst>
+          </a:prstGeom>
+          <a:solidFill>
+            <a:srgbClr val="5F8B2F"/>
+          </a:solidFill>
+          <a:ln>
+            <a:noFill/>
+          </a:ln>
+          <a:effectLst/>
+        </p:spPr>
+        <p:txBody>
+          <a:bodyPr wrap="square" lIns="0" tIns="0" rIns="0" bIns="0" rtlCol="0" anchor="ctr">
+            <a:noAutofit/>
+          </a:bodyPr>
+          <a:lstStyle/>
+          <a:p>
+            <a:pPr algn="ctr">
+              <a:lnSpc>
+                <a:spcPct val="100000"/>
+              </a:lnSpc>
+              <a:spcBef>
+                <a:spcPts val="0"/>
+              </a:spcBef>
+            </a:pPr>
+            <a:r>
+              <a:rPr lang="en-US" sz="550" b="1" i="0" spc="0" dirty="0">
+                <a:solidFill>
+                  <a:srgbClr val="FFFFFF"/>
+                </a:solidFill>
+                <a:latin typeface="Inter"/>
+              </a:rPr>
+              <a:t>1  Fleet Memory</a:t>
+            </a:r>
+          </a:p>
+        </p:txBody>
+      </p:sp>
+      <p:sp>
+        <p:nvSpPr>
+          <p:cNvPr id="265" name="Fleet Memory result"/>
+          <p:cNvSpPr txBox="1"/>
+          <p:nvPr/>
+        </p:nvSpPr>
+        <p:spPr>
+          <a:xfrm>
+            <a:off x="3136392" y="3227832"/>
+            <a:ext cx="749808" cy="100584"/>
+          </a:xfrm>
+          <a:prstGeom prst="rect">
+            <a:avLst/>
+          </a:prstGeom>
+          <a:noFill/>
+        </p:spPr>
+        <p:txBody>
+          <a:bodyPr wrap="square" lIns="0" tIns="0" rIns="0" bIns="0" anchor="t">
+            <a:noAutofit/>
+          </a:bodyPr>
+          <a:lstStyle/>
+          <a:p>
+            <a:pPr algn="ctr">
+              <a:lnSpc>
+                <a:spcPct val="100000"/>
+              </a:lnSpc>
+              <a:spcBef>
+                <a:spcPts val="0"/>
+              </a:spcBef>
+            </a:pPr>
+            <a:r>
+              <a:rPr lang="en-US" sz="550" b="0" i="0" spc="0" dirty="0">
+                <a:solidFill>
+                  <a:srgbClr val="5A6472"/>
                 </a:solidFill>
                 <a:latin typeface="JetBrains Mono"/>
               </a:rPr>
-              <a:t>learn</a:t>
-            </a:r>
-          </a:p>
-        </p:txBody>
-      </p:sp>
-      <p:sp>
-        <p:nvSpPr>
-          <p:cNvPr id="99" name="Retrieve label"/>
-          <p:cNvSpPr txBox="1"/>
-          <p:nvPr/>
-        </p:nvSpPr>
-        <p:spPr>
-          <a:xfrm>
-            <a:off x="5340096" y="2423160"/>
-            <a:ext cx="548640" cy="118872"/>
-          </a:xfrm>
-          <a:prstGeom prst="rect">
-            <a:avLst/>
-          </a:prstGeom>
-          <a:noFill/>
-        </p:spPr>
-        <p:txBody>
-          <a:bodyPr wrap="square" lIns="0" tIns="0" rIns="0" bIns="0" anchor="t">
-            <a:noAutofit/>
-          </a:bodyPr>
-          <a:lstStyle/>
-          <a:p>
-            <a:pPr algn="l"/>
-            <a:r>
-              <a:rPr lang="en-US" sz="600" b="0" i="0" dirty="0">
-                <a:solidFill>
-                  <a:srgbClr val="4A6E24"/>
+              <a:t>none</a:t>
+            </a:r>
+          </a:p>
+        </p:txBody>
+      </p:sp>
+      <p:cxnSp>
+        <p:nvCxnSpPr>
+          <p:cNvPr id="266" name="then"/>
+          <p:cNvCxnSpPr/>
+          <p:nvPr/>
+        </p:nvCxnSpPr>
+        <p:spPr>
+          <a:xfrm>
+            <a:off x="3931920" y="3131820"/>
+            <a:ext cx="155448" cy="0"/>
+          </a:xfrm>
+          <a:prstGeom prst="line">
+            <a:avLst/>
+          </a:prstGeom>
+          <a:ln w="9525">
+            <a:solidFill>
+              <a:srgbClr val="8A94A6"/>
+            </a:solidFill>
+            <a:tailEnd type="triangle" w="sm" len="sm"/>
+          </a:ln>
+        </p:spPr>
+      </p:cxnSp>
+      <p:sp>
+        <p:nvSpPr>
+          <p:cNvPr id="267" name="Tool: 2  Page Scanner"/>
+          <p:cNvSpPr/>
+          <p:nvPr/>
+        </p:nvSpPr>
+        <p:spPr>
+          <a:xfrm>
+            <a:off x="4133088" y="3058668"/>
+            <a:ext cx="749808" cy="146304"/>
+          </a:xfrm>
+          <a:prstGeom prst="roundRect">
+            <a:avLst>
+              <a:gd name="adj" fmla="val 50000"/>
+            </a:avLst>
+          </a:prstGeom>
+          <a:solidFill>
+            <a:srgbClr val="1428A0"/>
+          </a:solidFill>
+          <a:ln>
+            <a:noFill/>
+          </a:ln>
+          <a:effectLst/>
+        </p:spPr>
+        <p:txBody>
+          <a:bodyPr wrap="square" lIns="0" tIns="0" rIns="0" bIns="0" rtlCol="0" anchor="ctr">
+            <a:noAutofit/>
+          </a:bodyPr>
+          <a:lstStyle/>
+          <a:p>
+            <a:pPr algn="ctr">
+              <a:lnSpc>
+                <a:spcPct val="100000"/>
+              </a:lnSpc>
+              <a:spcBef>
+                <a:spcPts val="0"/>
+              </a:spcBef>
+            </a:pPr>
+            <a:r>
+              <a:rPr lang="en-US" sz="550" b="1" i="0" spc="0" dirty="0">
+                <a:solidFill>
+                  <a:srgbClr val="FFFFFF"/>
+                </a:solidFill>
+                <a:latin typeface="Inter"/>
+              </a:rPr>
+              <a:t>2  Page Scanner</a:t>
+            </a:r>
+          </a:p>
+        </p:txBody>
+      </p:sp>
+      <p:sp>
+        <p:nvSpPr>
+          <p:cNvPr id="268" name="Page Scanner result"/>
+          <p:cNvSpPr txBox="1"/>
+          <p:nvPr/>
+        </p:nvSpPr>
+        <p:spPr>
+          <a:xfrm>
+            <a:off x="4133088" y="3227832"/>
+            <a:ext cx="749808" cy="100584"/>
+          </a:xfrm>
+          <a:prstGeom prst="rect">
+            <a:avLst/>
+          </a:prstGeom>
+          <a:noFill/>
+        </p:spPr>
+        <p:txBody>
+          <a:bodyPr wrap="square" lIns="0" tIns="0" rIns="0" bIns="0" anchor="t">
+            <a:noAutofit/>
+          </a:bodyPr>
+          <a:lstStyle/>
+          <a:p>
+            <a:pPr algn="ctr">
+              <a:lnSpc>
+                <a:spcPct val="100000"/>
+              </a:lnSpc>
+              <a:spcBef>
+                <a:spcPts val="0"/>
+              </a:spcBef>
+            </a:pPr>
+            <a:r>
+              <a:rPr lang="en-US" sz="550" b="0" i="0" spc="0" dirty="0">
+                <a:solidFill>
+                  <a:srgbClr val="5A6472"/>
                 </a:solidFill>
                 <a:latin typeface="JetBrains Mono"/>
               </a:rPr>
-              <a:t>retrieve</a:t>
+              <a:t>812 found</a:t>
+            </a:r>
+          </a:p>
+        </p:txBody>
+      </p:sp>
+      <p:cxnSp>
+        <p:nvCxnSpPr>
+          <p:cNvPr id="269" name="then"/>
+          <p:cNvCxnSpPr/>
+          <p:nvPr/>
+        </p:nvCxnSpPr>
+        <p:spPr>
+          <a:xfrm>
+            <a:off x="4928616" y="3131820"/>
+            <a:ext cx="155448" cy="0"/>
+          </a:xfrm>
+          <a:prstGeom prst="line">
+            <a:avLst/>
+          </a:prstGeom>
+          <a:ln w="9525">
+            <a:solidFill>
+              <a:srgbClr val="8A94A6"/>
+            </a:solidFill>
+            <a:tailEnd type="triangle" w="sm" len="sm"/>
+          </a:ln>
+        </p:spPr>
+      </p:cxnSp>
+      <p:sp>
+        <p:nvSpPr>
+          <p:cNvPr id="270" name="Tool: 3  Candidate Ranker"/>
+          <p:cNvSpPr/>
+          <p:nvPr/>
+        </p:nvSpPr>
+        <p:spPr>
+          <a:xfrm>
+            <a:off x="5129784" y="3058668"/>
+            <a:ext cx="914400" cy="146304"/>
+          </a:xfrm>
+          <a:prstGeom prst="roundRect">
+            <a:avLst>
+              <a:gd name="adj" fmla="val 50000"/>
+            </a:avLst>
+          </a:prstGeom>
+          <a:solidFill>
+            <a:srgbClr val="2A5C9E"/>
+          </a:solidFill>
+          <a:ln>
+            <a:noFill/>
+          </a:ln>
+          <a:effectLst/>
+        </p:spPr>
+        <p:txBody>
+          <a:bodyPr wrap="square" lIns="0" tIns="0" rIns="0" bIns="0" rtlCol="0" anchor="ctr">
+            <a:noAutofit/>
+          </a:bodyPr>
+          <a:lstStyle/>
+          <a:p>
+            <a:pPr algn="ctr">
+              <a:lnSpc>
+                <a:spcPct val="100000"/>
+              </a:lnSpc>
+              <a:spcBef>
+                <a:spcPts val="0"/>
+              </a:spcBef>
+            </a:pPr>
+            <a:r>
+              <a:rPr lang="en-US" sz="550" b="1" i="0" spc="0" dirty="0">
+                <a:solidFill>
+                  <a:srgbClr val="FFFFFF"/>
+                </a:solidFill>
+                <a:latin typeface="Inter"/>
+              </a:rPr>
+              <a:t>3  Candidate Ranker</a:t>
+            </a:r>
+          </a:p>
+        </p:txBody>
+      </p:sp>
+      <p:sp>
+        <p:nvSpPr>
+          <p:cNvPr id="271" name="Candidate Ranker result"/>
+          <p:cNvSpPr txBox="1"/>
+          <p:nvPr/>
+        </p:nvSpPr>
+        <p:spPr>
+          <a:xfrm>
+            <a:off x="5129784" y="3227832"/>
+            <a:ext cx="914400" cy="100584"/>
+          </a:xfrm>
+          <a:prstGeom prst="rect">
+            <a:avLst/>
+          </a:prstGeom>
+          <a:noFill/>
+        </p:spPr>
+        <p:txBody>
+          <a:bodyPr wrap="square" lIns="0" tIns="0" rIns="0" bIns="0" anchor="t">
+            <a:noAutofit/>
+          </a:bodyPr>
+          <a:lstStyle/>
+          <a:p>
+            <a:pPr algn="ctr">
+              <a:lnSpc>
+                <a:spcPct val="100000"/>
+              </a:lnSpc>
+              <a:spcBef>
+                <a:spcPts val="0"/>
+              </a:spcBef>
+            </a:pPr>
+            <a:r>
+              <a:rPr lang="en-US" sz="550" b="0" i="0" spc="0" dirty="0">
+                <a:solidFill>
+                  <a:srgbClr val="5A6472"/>
+                </a:solidFill>
+                <a:latin typeface="JetBrains Mono"/>
+              </a:rPr>
+              <a:t>top 8</a:t>
+            </a:r>
+          </a:p>
+        </p:txBody>
+      </p:sp>
+      <p:cxnSp>
+        <p:nvCxnSpPr>
+          <p:cNvPr id="272" name="then"/>
+          <p:cNvCxnSpPr/>
+          <p:nvPr/>
+        </p:nvCxnSpPr>
+        <p:spPr>
+          <a:xfrm>
+            <a:off x="6089904" y="3131820"/>
+            <a:ext cx="155448" cy="0"/>
+          </a:xfrm>
+          <a:prstGeom prst="line">
+            <a:avLst/>
+          </a:prstGeom>
+          <a:ln w="9525">
+            <a:solidFill>
+              <a:srgbClr val="8A94A6"/>
+            </a:solidFill>
+            <a:tailEnd type="triangle" w="sm" len="sm"/>
+          </a:ln>
+        </p:spPr>
+      </p:cxnSp>
+      <p:sp>
+        <p:nvSpPr>
+          <p:cNvPr id="273" name="Tool: 4  LLM Judge"/>
+          <p:cNvSpPr/>
+          <p:nvPr/>
+        </p:nvSpPr>
+        <p:spPr>
+          <a:xfrm>
+            <a:off x="6291072" y="3058668"/>
+            <a:ext cx="640080" cy="146304"/>
+          </a:xfrm>
+          <a:prstGeom prst="roundRect">
+            <a:avLst>
+              <a:gd name="adj" fmla="val 50000"/>
+            </a:avLst>
+          </a:prstGeom>
+          <a:solidFill>
+            <a:srgbClr val="C1702D"/>
+          </a:solidFill>
+          <a:ln>
+            <a:noFill/>
+          </a:ln>
+          <a:effectLst/>
+        </p:spPr>
+        <p:txBody>
+          <a:bodyPr wrap="square" lIns="0" tIns="0" rIns="0" bIns="0" rtlCol="0" anchor="ctr">
+            <a:noAutofit/>
+          </a:bodyPr>
+          <a:lstStyle/>
+          <a:p>
+            <a:pPr algn="ctr">
+              <a:lnSpc>
+                <a:spcPct val="100000"/>
+              </a:lnSpc>
+              <a:spcBef>
+                <a:spcPts val="0"/>
+              </a:spcBef>
+            </a:pPr>
+            <a:r>
+              <a:rPr lang="en-US" sz="550" b="1" i="0" spc="0" dirty="0">
+                <a:solidFill>
+                  <a:srgbClr val="FFFFFF"/>
+                </a:solidFill>
+                <a:latin typeface="Inter"/>
+              </a:rPr>
+              <a:t>4  LLM Judge</a:t>
+            </a:r>
+          </a:p>
+        </p:txBody>
+      </p:sp>
+      <p:sp>
+        <p:nvSpPr>
+          <p:cNvPr id="274" name="LLM Judge result"/>
+          <p:cNvSpPr txBox="1"/>
+          <p:nvPr/>
+        </p:nvSpPr>
+        <p:spPr>
+          <a:xfrm>
+            <a:off x="6291072" y="3227832"/>
+            <a:ext cx="640080" cy="100584"/>
+          </a:xfrm>
+          <a:prstGeom prst="rect">
+            <a:avLst/>
+          </a:prstGeom>
+          <a:noFill/>
+        </p:spPr>
+        <p:txBody>
+          <a:bodyPr wrap="square" lIns="0" tIns="0" rIns="0" bIns="0" anchor="t">
+            <a:noAutofit/>
+          </a:bodyPr>
+          <a:lstStyle/>
+          <a:p>
+            <a:pPr algn="ctr">
+              <a:lnSpc>
+                <a:spcPct val="100000"/>
+              </a:lnSpc>
+              <a:spcBef>
+                <a:spcPts val="0"/>
+              </a:spcBef>
+            </a:pPr>
+            <a:r>
+              <a:rPr lang="en-US" sz="550" b="0" i="0" spc="0" dirty="0">
+                <a:solidFill>
+                  <a:srgbClr val="5A6472"/>
+                </a:solidFill>
+                <a:latin typeface="JetBrains Mono"/>
+              </a:rPr>
+              <a:t>0.93</a:t>
+            </a:r>
+          </a:p>
+        </p:txBody>
+      </p:sp>
+      <p:cxnSp>
+        <p:nvCxnSpPr>
+          <p:cNvPr id="275" name="then"/>
+          <p:cNvCxnSpPr/>
+          <p:nvPr/>
+        </p:nvCxnSpPr>
+        <p:spPr>
+          <a:xfrm>
+            <a:off x="6976872" y="3131820"/>
+            <a:ext cx="155448" cy="0"/>
+          </a:xfrm>
+          <a:prstGeom prst="line">
+            <a:avLst/>
+          </a:prstGeom>
+          <a:ln w="9525">
+            <a:solidFill>
+              <a:srgbClr val="8A94A6"/>
+            </a:solidFill>
+            <a:tailEnd type="triangle" w="sm" len="sm"/>
+          </a:ln>
+        </p:spPr>
+      </p:cxnSp>
+      <p:sp>
+        <p:nvSpPr>
+          <p:cNvPr id="276" name="Tool: 5  Commit Repair"/>
+          <p:cNvSpPr/>
+          <p:nvPr/>
+        </p:nvSpPr>
+        <p:spPr>
+          <a:xfrm>
+            <a:off x="7178040" y="3058668"/>
+            <a:ext cx="786384" cy="146304"/>
+          </a:xfrm>
+          <a:prstGeom prst="roundRect">
+            <a:avLst>
+              <a:gd name="adj" fmla="val 50000"/>
+            </a:avLst>
+          </a:prstGeom>
+          <a:solidFill>
+            <a:srgbClr val="1A2340"/>
+          </a:solidFill>
+          <a:ln>
+            <a:noFill/>
+          </a:ln>
+          <a:effectLst/>
+        </p:spPr>
+        <p:txBody>
+          <a:bodyPr wrap="square" lIns="0" tIns="0" rIns="0" bIns="0" rtlCol="0" anchor="ctr">
+            <a:noAutofit/>
+          </a:bodyPr>
+          <a:lstStyle/>
+          <a:p>
+            <a:pPr algn="ctr">
+              <a:lnSpc>
+                <a:spcPct val="100000"/>
+              </a:lnSpc>
+              <a:spcBef>
+                <a:spcPts val="0"/>
+              </a:spcBef>
+            </a:pPr>
+            <a:r>
+              <a:rPr lang="en-US" sz="550" b="1" i="0" spc="0" dirty="0">
+                <a:solidFill>
+                  <a:srgbClr val="FFFFFF"/>
+                </a:solidFill>
+                <a:latin typeface="Inter"/>
+              </a:rPr>
+              <a:t>5  Commit Repair</a:t>
+            </a:r>
+          </a:p>
+        </p:txBody>
+      </p:sp>
+      <p:sp>
+        <p:nvSpPr>
+          <p:cNvPr id="277" name="Commit Repair result"/>
+          <p:cNvSpPr txBox="1"/>
+          <p:nvPr/>
+        </p:nvSpPr>
+        <p:spPr>
+          <a:xfrm>
+            <a:off x="7178040" y="3227832"/>
+            <a:ext cx="786384" cy="100584"/>
+          </a:xfrm>
+          <a:prstGeom prst="rect">
+            <a:avLst/>
+          </a:prstGeom>
+          <a:noFill/>
+        </p:spPr>
+        <p:txBody>
+          <a:bodyPr wrap="square" lIns="0" tIns="0" rIns="0" bIns="0" anchor="t">
+            <a:noAutofit/>
+          </a:bodyPr>
+          <a:lstStyle/>
+          <a:p>
+            <a:pPr algn="ctr">
+              <a:lnSpc>
+                <a:spcPct val="100000"/>
+              </a:lnSpc>
+              <a:spcBef>
+                <a:spcPts val="0"/>
+              </a:spcBef>
+            </a:pPr>
+            <a:r>
+              <a:rPr lang="en-US" sz="550" b="0" i="0" spc="0" dirty="0">
+                <a:solidFill>
+                  <a:srgbClr val="5A6472"/>
+                </a:solidFill>
+                <a:latin typeface="JetBrains Mono"/>
+              </a:rPr>
+              <a:t>apply</a:t>
+            </a:r>
+          </a:p>
+        </p:txBody>
+      </p:sp>
+      <p:sp>
+        <p:nvSpPr>
+          <p:cNvPr id="278" name="Execution policy"/>
+          <p:cNvSpPr/>
+          <p:nvPr/>
+        </p:nvSpPr>
+        <p:spPr>
+          <a:xfrm>
+            <a:off x="3044952" y="3474720"/>
+            <a:ext cx="5321808" cy="420624"/>
+          </a:xfrm>
+          <a:prstGeom prst="roundRect">
+            <a:avLst>
+              <a:gd name="adj" fmla="val 10000"/>
+            </a:avLst>
+          </a:prstGeom>
+          <a:solidFill>
+            <a:srgbClr val="FFFFFF"/>
+          </a:solidFill>
+          <a:ln w="12700">
+            <a:solidFill>
+              <a:srgbClr val="1A2340"/>
+            </a:solidFill>
+          </a:ln>
+          <a:effectLst/>
+        </p:spPr>
+        <p:txBody>
+          <a:bodyPr wrap="square" lIns="0" tIns="0" rIns="0" bIns="0" rtlCol="0" anchor="ctr">
+            <a:noAutofit/>
+          </a:bodyPr>
+          <a:lstStyle/>
+          <a:p>
+            <a:endParaRPr lang="en-US"/>
+          </a:p>
+        </p:txBody>
+      </p:sp>
+      <p:pic>
+        <p:nvPicPr>
+          <p:cNvPr id="279" name="Execution policy icon"/>
+          <p:cNvPicPr>
+            <a:picLocks noChangeAspect="1"/>
+          </p:cNvPicPr>
+          <p:nvPr/>
+        </p:nvPicPr>
+        <p:blipFill>
+          <a:blip r:embed="rId8"/>
+          <a:stretch>
+            <a:fillRect/>
+          </a:stretch>
+        </p:blipFill>
+        <p:spPr>
+          <a:xfrm>
+            <a:off x="3136392" y="3552444"/>
+            <a:ext cx="164592" cy="164592"/>
+          </a:xfrm>
+          <a:prstGeom prst="rect">
+            <a:avLst/>
+          </a:prstGeom>
+        </p:spPr>
+      </p:pic>
+      <p:sp>
+        <p:nvSpPr>
+          <p:cNvPr id="280" name="Execution policy title"/>
+          <p:cNvSpPr txBox="1"/>
+          <p:nvPr/>
+        </p:nvSpPr>
+        <p:spPr>
+          <a:xfrm>
+            <a:off x="3355848" y="3543300"/>
+            <a:ext cx="1097280" cy="155448"/>
+          </a:xfrm>
+          <a:prstGeom prst="rect">
+            <a:avLst/>
+          </a:prstGeom>
+          <a:noFill/>
+        </p:spPr>
+        <p:txBody>
+          <a:bodyPr wrap="square" lIns="0" tIns="0" rIns="0" bIns="0" anchor="t">
+            <a:noAutofit/>
+          </a:bodyPr>
+          <a:lstStyle/>
+          <a:p>
+            <a:pPr algn="l">
+              <a:lnSpc>
+                <a:spcPct val="100000"/>
+              </a:lnSpc>
+              <a:spcBef>
+                <a:spcPts val="0"/>
+              </a:spcBef>
+            </a:pPr>
+            <a:r>
+              <a:rPr lang="en-US" sz="800" b="1" i="0" spc="0" dirty="0">
+                <a:solidFill>
+                  <a:srgbClr val="1A1A1E"/>
+                </a:solidFill>
+                <a:latin typeface="Inter"/>
+              </a:rPr>
+              <a:t>Execution policy</a:t>
+            </a:r>
+          </a:p>
+        </p:txBody>
+      </p:sp>
+      <p:sp>
+        <p:nvSpPr>
+          <p:cNvPr id="281" name="GUARDRAIL"/>
+          <p:cNvSpPr/>
+          <p:nvPr/>
+        </p:nvSpPr>
+        <p:spPr>
+          <a:xfrm>
+            <a:off x="4325112" y="3557016"/>
+            <a:ext cx="731520" cy="137160"/>
+          </a:xfrm>
+          <a:prstGeom prst="roundRect">
+            <a:avLst>
+              <a:gd name="adj" fmla="val 50000"/>
+            </a:avLst>
+          </a:prstGeom>
+          <a:solidFill>
+            <a:srgbClr val="1A2340"/>
+          </a:solidFill>
+          <a:ln>
+            <a:noFill/>
+          </a:ln>
+          <a:effectLst/>
+        </p:spPr>
+        <p:txBody>
+          <a:bodyPr wrap="square" lIns="0" tIns="0" rIns="0" bIns="0" rtlCol="0" anchor="ctr">
+            <a:noAutofit/>
+          </a:bodyPr>
+          <a:lstStyle/>
+          <a:p>
+            <a:pPr algn="ctr">
+              <a:lnSpc>
+                <a:spcPct val="100000"/>
+              </a:lnSpc>
+              <a:spcBef>
+                <a:spcPts val="0"/>
+              </a:spcBef>
+            </a:pPr>
+            <a:r>
+              <a:rPr lang="en-US" sz="500" b="1" i="0" spc="60" dirty="0">
+                <a:solidFill>
+                  <a:srgbClr val="FFFFFF"/>
+                </a:solidFill>
+                <a:latin typeface="Inter"/>
+              </a:rPr>
+              <a:t>GUARDRAIL</a:t>
+            </a:r>
+          </a:p>
+        </p:txBody>
+      </p:sp>
+      <p:sp>
+        <p:nvSpPr>
+          <p:cNvPr id="282" name="Tool: Commit Repair"/>
+          <p:cNvSpPr/>
+          <p:nvPr/>
+        </p:nvSpPr>
+        <p:spPr>
+          <a:xfrm>
+            <a:off x="5148072" y="3557016"/>
+            <a:ext cx="786384" cy="137160"/>
+          </a:xfrm>
+          <a:prstGeom prst="roundRect">
+            <a:avLst>
+              <a:gd name="adj" fmla="val 50000"/>
+            </a:avLst>
+          </a:prstGeom>
+          <a:solidFill>
+            <a:srgbClr val="FFFFFF"/>
+          </a:solidFill>
+          <a:ln w="9525">
+            <a:solidFill>
+              <a:srgbClr val="1A2340"/>
+            </a:solidFill>
+          </a:ln>
+          <a:effectLst/>
+        </p:spPr>
+        <p:txBody>
+          <a:bodyPr wrap="square" lIns="0" tIns="0" rIns="0" bIns="0" rtlCol="0" anchor="ctr">
+            <a:noAutofit/>
+          </a:bodyPr>
+          <a:lstStyle/>
+          <a:p>
+            <a:pPr algn="ctr">
+              <a:lnSpc>
+                <a:spcPct val="100000"/>
+              </a:lnSpc>
+              <a:spcBef>
+                <a:spcPts val="0"/>
+              </a:spcBef>
+            </a:pPr>
+            <a:r>
+              <a:rPr lang="en-US" sz="550" b="1" i="0" spc="0" dirty="0">
+                <a:solidFill>
+                  <a:srgbClr val="1A2340"/>
+                </a:solidFill>
+                <a:latin typeface="Inter"/>
+              </a:rPr>
+              <a:t>Commit Repair</a:t>
+            </a:r>
+          </a:p>
+        </p:txBody>
+      </p:sp>
+      <p:sp>
+        <p:nvSpPr>
+          <p:cNvPr id="283" name="Execution policy detail"/>
+          <p:cNvSpPr txBox="1"/>
+          <p:nvPr/>
+        </p:nvSpPr>
+        <p:spPr>
+          <a:xfrm>
+            <a:off x="3355848" y="3730752"/>
+            <a:ext cx="4937760" cy="109728"/>
+          </a:xfrm>
+          <a:prstGeom prst="rect">
+            <a:avLst/>
+          </a:prstGeom>
+          <a:noFill/>
+        </p:spPr>
+        <p:txBody>
+          <a:bodyPr wrap="square" lIns="0" tIns="0" rIns="0" bIns="0" anchor="t">
+            <a:noAutofit/>
+          </a:bodyPr>
+          <a:lstStyle/>
+          <a:p>
+            <a:pPr algn="l">
+              <a:lnSpc>
+                <a:spcPct val="100000"/>
+              </a:lnSpc>
+              <a:spcBef>
+                <a:spcPts val="0"/>
+              </a:spcBef>
+            </a:pPr>
+            <a:r>
+              <a:rPr lang="en-US" sz="650" b="0" i="0" spc="0" dirty="0">
+                <a:solidFill>
+                  <a:srgbClr val="5A6472"/>
+                </a:solidFill>
+                <a:latin typeface="Inter"/>
+              </a:rPr>
+              <a:t>commits only on calibrated confidence:  apply · review · refuse     ·     the LLM never writes a selector</a:t>
+            </a:r>
+          </a:p>
+        </p:txBody>
+      </p:sp>
+      <p:cxnSp>
+        <p:nvCxnSpPr>
+          <p:cNvPr id="284" name="commit"/>
+          <p:cNvCxnSpPr/>
+          <p:nvPr/>
+        </p:nvCxnSpPr>
+        <p:spPr>
+          <a:xfrm>
+            <a:off x="5541264" y="3346704"/>
+            <a:ext cx="0" cy="128016"/>
+          </a:xfrm>
+          <a:prstGeom prst="line">
+            <a:avLst/>
+          </a:prstGeom>
+          <a:ln w="12700">
+            <a:solidFill>
+              <a:srgbClr val="5A6472"/>
+            </a:solidFill>
+            <a:tailEnd type="triangle" w="sm" len="sm"/>
+          </a:ln>
+        </p:spPr>
+      </p:cxnSp>
+      <p:sp>
+        <p:nvSpPr>
+          <p:cNvPr id="285" name="Call 5"/>
+          <p:cNvSpPr/>
+          <p:nvPr/>
+        </p:nvSpPr>
+        <p:spPr>
+          <a:xfrm>
+            <a:off x="5596128" y="3342132"/>
+            <a:ext cx="128016" cy="128016"/>
+          </a:xfrm>
+          <a:prstGeom prst="ellipse">
+            <a:avLst/>
+          </a:prstGeom>
+          <a:solidFill>
+            <a:srgbClr val="1A2340"/>
+          </a:solidFill>
+          <a:ln>
+            <a:noFill/>
+          </a:ln>
+          <a:effectLst/>
+        </p:spPr>
+        <p:txBody>
+          <a:bodyPr wrap="square" lIns="0" tIns="0" rIns="0" bIns="0" rtlCol="0" anchor="ctr">
+            <a:noAutofit/>
+          </a:bodyPr>
+          <a:lstStyle/>
+          <a:p>
+            <a:pPr algn="ctr">
+              <a:lnSpc>
+                <a:spcPct val="100000"/>
+              </a:lnSpc>
+              <a:spcBef>
+                <a:spcPts val="0"/>
+              </a:spcBef>
+            </a:pPr>
+            <a:r>
+              <a:rPr lang="en-US" sz="550" b="1" i="0" spc="0" dirty="0">
+                <a:solidFill>
+                  <a:srgbClr val="FFFFFF"/>
+                </a:solidFill>
+                <a:latin typeface="Inter"/>
+              </a:rPr>
+              <a:t>5</a:t>
+            </a:r>
+          </a:p>
+        </p:txBody>
+      </p:sp>
+      <p:sp>
+        <p:nvSpPr>
+          <p:cNvPr id="286" name="Technology stack"/>
+          <p:cNvSpPr/>
+          <p:nvPr/>
+        </p:nvSpPr>
+        <p:spPr>
+          <a:xfrm>
+            <a:off x="667512" y="4059936"/>
+            <a:ext cx="7808976" cy="566928"/>
+          </a:xfrm>
+          <a:prstGeom prst="roundRect">
+            <a:avLst>
+              <a:gd name="adj" fmla="val 10000"/>
+            </a:avLst>
+          </a:prstGeom>
+          <a:solidFill>
+            <a:srgbClr val="F7F9FC"/>
+          </a:solidFill>
+          <a:ln w="9525">
+            <a:solidFill>
+              <a:srgbClr val="D7DEEA"/>
+            </a:solidFill>
+          </a:ln>
+          <a:effectLst/>
+        </p:spPr>
+        <p:txBody>
+          <a:bodyPr wrap="square" lIns="0" tIns="0" rIns="0" bIns="0" rtlCol="0" anchor="ctr">
+            <a:noAutofit/>
+          </a:bodyPr>
+          <a:lstStyle/>
+          <a:p>
+            <a:endParaRPr lang="en-US"/>
+          </a:p>
+        </p:txBody>
+      </p:sp>
+      <p:sp>
+        <p:nvSpPr>
+          <p:cNvPr id="287" name="Technology stack label"/>
+          <p:cNvSpPr txBox="1"/>
+          <p:nvPr/>
+        </p:nvSpPr>
+        <p:spPr>
+          <a:xfrm>
+            <a:off x="777240" y="4233672"/>
+            <a:ext cx="777240" cy="237744"/>
+          </a:xfrm>
+          <a:prstGeom prst="rect">
+            <a:avLst/>
+          </a:prstGeom>
+          <a:noFill/>
+        </p:spPr>
+        <p:txBody>
+          <a:bodyPr wrap="square" lIns="0" tIns="0" rIns="0" bIns="0" anchor="t">
+            <a:noAutofit/>
+          </a:bodyPr>
+          <a:lstStyle/>
+          <a:p>
+            <a:pPr algn="l">
+              <a:lnSpc>
+                <a:spcPct val="100000"/>
+              </a:lnSpc>
+              <a:spcBef>
+                <a:spcPts val="0"/>
+              </a:spcBef>
+            </a:pPr>
+            <a:r>
+              <a:rPr lang="en-US" sz="600" b="1" i="0" spc="150" dirty="0">
+                <a:solidFill>
+                  <a:srgbClr val="1428A0"/>
+                </a:solidFill>
+                <a:latin typeface="Inter"/>
+              </a:rPr>
+              <a:t>TECHNOLOGY</a:t>
+            </a:r>
+          </a:p>
+          <a:p>
+            <a:pPr algn="l">
+              <a:lnSpc>
+                <a:spcPct val="100000"/>
+              </a:lnSpc>
+              <a:spcBef>
+                <a:spcPts val="0"/>
+              </a:spcBef>
+            </a:pPr>
+            <a:r>
+              <a:rPr lang="en-US" sz="600" b="1" i="0" spc="150" dirty="0">
+                <a:solidFill>
+                  <a:srgbClr val="1428A0"/>
+                </a:solidFill>
+                <a:latin typeface="Inter"/>
+              </a:rPr>
+              <a:t>STACK</a:t>
+            </a:r>
+          </a:p>
+        </p:txBody>
+      </p:sp>
+      <p:sp>
+        <p:nvSpPr>
+          <p:cNvPr id="288" name="ROBOT badge"/>
+          <p:cNvSpPr/>
+          <p:nvPr/>
+        </p:nvSpPr>
+        <p:spPr>
+          <a:xfrm>
+            <a:off x="1572768" y="4215384"/>
+            <a:ext cx="256032" cy="256032"/>
+          </a:xfrm>
+          <a:prstGeom prst="ellipse">
+            <a:avLst/>
+          </a:prstGeom>
+          <a:solidFill>
+            <a:srgbClr val="1428A0"/>
+          </a:solidFill>
+          <a:ln>
+            <a:noFill/>
+          </a:ln>
+          <a:effectLst/>
+        </p:spPr>
+        <p:txBody>
+          <a:bodyPr wrap="square" lIns="0" tIns="0" rIns="0" bIns="0" rtlCol="0" anchor="ctr">
+            <a:noAutofit/>
+          </a:bodyPr>
+          <a:lstStyle/>
+          <a:p>
+            <a:endParaRPr lang="en-US"/>
+          </a:p>
+        </p:txBody>
+      </p:sp>
+      <p:pic>
+        <p:nvPicPr>
+          <p:cNvPr id="289" name="ROBOT icon"/>
+          <p:cNvPicPr>
+            <a:picLocks noChangeAspect="1"/>
+          </p:cNvPicPr>
+          <p:nvPr/>
+        </p:nvPicPr>
+        <p:blipFill>
+          <a:blip r:embed="rId16"/>
+          <a:stretch>
+            <a:fillRect/>
+          </a:stretch>
+        </p:blipFill>
+        <p:spPr>
+          <a:xfrm>
+            <a:off x="1636776" y="4279392"/>
+            <a:ext cx="128016" cy="128016"/>
+          </a:xfrm>
+          <a:prstGeom prst="rect">
+            <a:avLst/>
+          </a:prstGeom>
+        </p:spPr>
+      </p:pic>
+      <p:sp>
+        <p:nvSpPr>
+          <p:cNvPr id="290" name="ROBOT"/>
+          <p:cNvSpPr txBox="1"/>
+          <p:nvPr/>
+        </p:nvSpPr>
+        <p:spPr>
+          <a:xfrm>
+            <a:off x="1901952" y="4142232"/>
+            <a:ext cx="813816" cy="100584"/>
+          </a:xfrm>
+          <a:prstGeom prst="rect">
+            <a:avLst/>
+          </a:prstGeom>
+          <a:noFill/>
+        </p:spPr>
+        <p:txBody>
+          <a:bodyPr wrap="square" lIns="0" tIns="0" rIns="0" bIns="0" anchor="t">
+            <a:noAutofit/>
+          </a:bodyPr>
+          <a:lstStyle/>
+          <a:p>
+            <a:pPr algn="l">
+              <a:lnSpc>
+                <a:spcPct val="100000"/>
+              </a:lnSpc>
+              <a:spcBef>
+                <a:spcPts val="0"/>
+              </a:spcBef>
+            </a:pPr>
+            <a:r>
+              <a:rPr lang="en-US" sz="550" b="1" i="0" spc="100" dirty="0">
+                <a:solidFill>
+                  <a:srgbClr val="1428A0"/>
+                </a:solidFill>
+                <a:latin typeface="Inter"/>
+              </a:rPr>
+              <a:t>ROBOT</a:t>
+            </a:r>
+          </a:p>
+        </p:txBody>
+      </p:sp>
+      <p:sp>
+        <p:nvSpPr>
+          <p:cNvPr id="291" name="ROBOT detail"/>
+          <p:cNvSpPr txBox="1"/>
+          <p:nvPr/>
+        </p:nvSpPr>
+        <p:spPr>
+          <a:xfrm>
+            <a:off x="1901952" y="4247388"/>
+            <a:ext cx="795528" cy="329184"/>
+          </a:xfrm>
+          <a:prstGeom prst="rect">
+            <a:avLst/>
+          </a:prstGeom>
+          <a:noFill/>
+        </p:spPr>
+        <p:txBody>
+          <a:bodyPr wrap="square" lIns="0" tIns="0" rIns="0" bIns="0" anchor="t">
+            <a:noAutofit/>
+          </a:bodyPr>
+          <a:lstStyle/>
+          <a:p>
+            <a:pPr algn="l">
+              <a:lnSpc>
+                <a:spcPct val="100000"/>
+              </a:lnSpc>
+              <a:spcBef>
+                <a:spcPts val="0"/>
+              </a:spcBef>
+            </a:pPr>
+            <a:r>
+              <a:rPr lang="en-US" sz="650" b="0" i="0" spc="0" dirty="0">
+                <a:solidFill>
+                  <a:srgbClr val="1A1A1E"/>
+                </a:solidFill>
+                <a:latin typeface="Inter"/>
+              </a:rPr>
+              <a:t>Python · Selenium</a:t>
+            </a:r>
+          </a:p>
+          <a:p>
+            <a:pPr algn="l">
+              <a:lnSpc>
+                <a:spcPct val="100000"/>
+              </a:lnSpc>
+              <a:spcBef>
+                <a:spcPts val="0"/>
+              </a:spcBef>
+            </a:pPr>
+            <a:r>
+              <a:rPr lang="en-US" sz="650" b="0" i="0" spc="0" dirty="0">
+                <a:solidFill>
+                  <a:srgbClr val="1A1A1E"/>
+                </a:solidFill>
+                <a:latin typeface="Inter"/>
+              </a:rPr>
+              <a:t>Playwright</a:t>
+            </a:r>
+          </a:p>
+        </p:txBody>
+      </p:sp>
+      <p:sp>
+        <p:nvSpPr>
+          <p:cNvPr id="292" name="REFLEX AGENT badge"/>
+          <p:cNvSpPr/>
+          <p:nvPr/>
+        </p:nvSpPr>
+        <p:spPr>
+          <a:xfrm>
+            <a:off x="2715768" y="4215384"/>
+            <a:ext cx="256032" cy="256032"/>
+          </a:xfrm>
+          <a:prstGeom prst="ellipse">
+            <a:avLst/>
+          </a:prstGeom>
+          <a:solidFill>
+            <a:srgbClr val="2A5C9E"/>
+          </a:solidFill>
+          <a:ln>
+            <a:noFill/>
+          </a:ln>
+          <a:effectLst/>
+        </p:spPr>
+        <p:txBody>
+          <a:bodyPr wrap="square" lIns="0" tIns="0" rIns="0" bIns="0" rtlCol="0" anchor="ctr">
+            <a:noAutofit/>
+          </a:bodyPr>
+          <a:lstStyle/>
+          <a:p>
+            <a:endParaRPr lang="en-US"/>
+          </a:p>
+        </p:txBody>
+      </p:sp>
+      <p:pic>
+        <p:nvPicPr>
+          <p:cNvPr id="293" name="REFLEX AGENT icon"/>
+          <p:cNvPicPr>
+            <a:picLocks noChangeAspect="1"/>
+          </p:cNvPicPr>
+          <p:nvPr/>
+        </p:nvPicPr>
+        <p:blipFill>
+          <a:blip r:embed="rId11"/>
+          <a:stretch>
+            <a:fillRect/>
+          </a:stretch>
+        </p:blipFill>
+        <p:spPr>
+          <a:xfrm>
+            <a:off x="2779776" y="4279392"/>
+            <a:ext cx="128016" cy="128016"/>
+          </a:xfrm>
+          <a:prstGeom prst="rect">
+            <a:avLst/>
+          </a:prstGeom>
+        </p:spPr>
+      </p:pic>
+      <p:sp>
+        <p:nvSpPr>
+          <p:cNvPr id="294" name="REFLEX AGENT"/>
+          <p:cNvSpPr txBox="1"/>
+          <p:nvPr/>
+        </p:nvSpPr>
+        <p:spPr>
+          <a:xfrm>
+            <a:off x="3044952" y="4142232"/>
+            <a:ext cx="905256" cy="100584"/>
+          </a:xfrm>
+          <a:prstGeom prst="rect">
+            <a:avLst/>
+          </a:prstGeom>
+          <a:noFill/>
+        </p:spPr>
+        <p:txBody>
+          <a:bodyPr wrap="square" lIns="0" tIns="0" rIns="0" bIns="0" anchor="t">
+            <a:noAutofit/>
+          </a:bodyPr>
+          <a:lstStyle/>
+          <a:p>
+            <a:pPr algn="l">
+              <a:lnSpc>
+                <a:spcPct val="100000"/>
+              </a:lnSpc>
+              <a:spcBef>
+                <a:spcPts val="0"/>
+              </a:spcBef>
+            </a:pPr>
+            <a:r>
+              <a:rPr lang="en-US" sz="550" b="1" i="0" spc="100" dirty="0">
+                <a:solidFill>
+                  <a:srgbClr val="2A5C9E"/>
+                </a:solidFill>
+                <a:latin typeface="Inter"/>
+              </a:rPr>
+              <a:t>REFLEX AGENT</a:t>
+            </a:r>
+          </a:p>
+        </p:txBody>
+      </p:sp>
+      <p:sp>
+        <p:nvSpPr>
+          <p:cNvPr id="295" name="REFLEX AGENT detail"/>
+          <p:cNvSpPr txBox="1"/>
+          <p:nvPr/>
+        </p:nvSpPr>
+        <p:spPr>
+          <a:xfrm>
+            <a:off x="3044952" y="4247388"/>
+            <a:ext cx="886968" cy="329184"/>
+          </a:xfrm>
+          <a:prstGeom prst="rect">
+            <a:avLst/>
+          </a:prstGeom>
+          <a:noFill/>
+        </p:spPr>
+        <p:txBody>
+          <a:bodyPr wrap="square" lIns="0" tIns="0" rIns="0" bIns="0" anchor="t">
+            <a:noAutofit/>
+          </a:bodyPr>
+          <a:lstStyle/>
+          <a:p>
+            <a:pPr algn="l">
+              <a:lnSpc>
+                <a:spcPct val="100000"/>
+              </a:lnSpc>
+              <a:spcBef>
+                <a:spcPts val="0"/>
+              </a:spcBef>
+            </a:pPr>
+            <a:r>
+              <a:rPr lang="en-US" sz="650" b="0" i="0" spc="0" dirty="0">
+                <a:solidFill>
+                  <a:srgbClr val="1A1A1E"/>
+                </a:solidFill>
+                <a:latin typeface="Inter"/>
+              </a:rPr>
+              <a:t>FastAPI · Uvicorn</a:t>
+            </a:r>
+          </a:p>
+          <a:p>
+            <a:pPr algn="l">
+              <a:lnSpc>
+                <a:spcPct val="100000"/>
+              </a:lnSpc>
+              <a:spcBef>
+                <a:spcPts val="0"/>
+              </a:spcBef>
+            </a:pPr>
+            <a:r>
+              <a:rPr lang="en-US" sz="650" b="0" i="0" spc="0" dirty="0">
+                <a:solidFill>
+                  <a:srgbClr val="1A1A1E"/>
+                </a:solidFill>
+                <a:latin typeface="Inter"/>
+              </a:rPr>
+              <a:t>LLM tool calling</a:t>
+            </a:r>
+          </a:p>
+        </p:txBody>
+      </p:sp>
+      <p:sp>
+        <p:nvSpPr>
+          <p:cNvPr id="296" name="AI MODELS badge"/>
+          <p:cNvSpPr/>
+          <p:nvPr/>
+        </p:nvSpPr>
+        <p:spPr>
+          <a:xfrm>
+            <a:off x="3950208" y="4215384"/>
+            <a:ext cx="256032" cy="256032"/>
+          </a:xfrm>
+          <a:prstGeom prst="ellipse">
+            <a:avLst/>
+          </a:prstGeom>
+          <a:solidFill>
+            <a:srgbClr val="C1702D"/>
+          </a:solidFill>
+          <a:ln>
+            <a:noFill/>
+          </a:ln>
+          <a:effectLst/>
+        </p:spPr>
+        <p:txBody>
+          <a:bodyPr wrap="square" lIns="0" tIns="0" rIns="0" bIns="0" rtlCol="0" anchor="ctr">
+            <a:noAutofit/>
+          </a:bodyPr>
+          <a:lstStyle/>
+          <a:p>
+            <a:endParaRPr lang="en-US"/>
+          </a:p>
+        </p:txBody>
+      </p:sp>
+      <p:pic>
+        <p:nvPicPr>
+          <p:cNvPr id="297" name="AI MODELS icon"/>
+          <p:cNvPicPr>
+            <a:picLocks noChangeAspect="1"/>
+          </p:cNvPicPr>
+          <p:nvPr/>
+        </p:nvPicPr>
+        <p:blipFill>
+          <a:blip r:embed="rId12"/>
+          <a:stretch>
+            <a:fillRect/>
+          </a:stretch>
+        </p:blipFill>
+        <p:spPr>
+          <a:xfrm>
+            <a:off x="4014216" y="4279392"/>
+            <a:ext cx="128016" cy="128016"/>
+          </a:xfrm>
+          <a:prstGeom prst="rect">
+            <a:avLst/>
+          </a:prstGeom>
+        </p:spPr>
+      </p:pic>
+      <p:sp>
+        <p:nvSpPr>
+          <p:cNvPr id="298" name="AI MODELS"/>
+          <p:cNvSpPr txBox="1"/>
+          <p:nvPr/>
+        </p:nvSpPr>
+        <p:spPr>
+          <a:xfrm>
+            <a:off x="4279392" y="4142232"/>
+            <a:ext cx="1591056" cy="100584"/>
+          </a:xfrm>
+          <a:prstGeom prst="rect">
+            <a:avLst/>
+          </a:prstGeom>
+          <a:noFill/>
+        </p:spPr>
+        <p:txBody>
+          <a:bodyPr wrap="square" lIns="0" tIns="0" rIns="0" bIns="0" anchor="t">
+            <a:noAutofit/>
+          </a:bodyPr>
+          <a:lstStyle/>
+          <a:p>
+            <a:pPr algn="l">
+              <a:lnSpc>
+                <a:spcPct val="100000"/>
+              </a:lnSpc>
+              <a:spcBef>
+                <a:spcPts val="0"/>
+              </a:spcBef>
+            </a:pPr>
+            <a:r>
+              <a:rPr lang="en-US" sz="550" b="1" i="0" spc="100" dirty="0">
+                <a:solidFill>
+                  <a:srgbClr val="C1702D"/>
+                </a:solidFill>
+                <a:latin typeface="Inter"/>
+              </a:rPr>
+              <a:t>AI MODELS</a:t>
+            </a:r>
+          </a:p>
+        </p:txBody>
+      </p:sp>
+      <p:sp>
+        <p:nvSpPr>
+          <p:cNvPr id="299" name="AI MODELS detail"/>
+          <p:cNvSpPr txBox="1"/>
+          <p:nvPr/>
+        </p:nvSpPr>
+        <p:spPr>
+          <a:xfrm>
+            <a:off x="4279392" y="4247388"/>
+            <a:ext cx="1572768" cy="329184"/>
+          </a:xfrm>
+          <a:prstGeom prst="rect">
+            <a:avLst/>
+          </a:prstGeom>
+          <a:noFill/>
+        </p:spPr>
+        <p:txBody>
+          <a:bodyPr wrap="square" lIns="0" tIns="0" rIns="0" bIns="0" anchor="t">
+            <a:noAutofit/>
+          </a:bodyPr>
+          <a:lstStyle/>
+          <a:p>
+            <a:pPr algn="l">
+              <a:lnSpc>
+                <a:spcPct val="100000"/>
+              </a:lnSpc>
+              <a:spcBef>
+                <a:spcPts val="0"/>
+              </a:spcBef>
+            </a:pPr>
+            <a:r>
+              <a:rPr lang="en-US" sz="650" b="0" i="0" spc="0" dirty="0">
+                <a:solidFill>
+                  <a:srgbClr val="1A1A1E"/>
+                </a:solidFill>
+                <a:latin typeface="Inter"/>
+              </a:rPr>
+              <a:t>Qwen3-4B-Instruct-2507 · agent</a:t>
+            </a:r>
+          </a:p>
+          <a:p>
+            <a:pPr algn="l">
+              <a:lnSpc>
+                <a:spcPct val="100000"/>
+              </a:lnSpc>
+              <a:spcBef>
+                <a:spcPts val="0"/>
+              </a:spcBef>
+            </a:pPr>
+            <a:r>
+              <a:rPr lang="en-US" sz="650" b="0" i="0" spc="0" dirty="0">
+                <a:solidFill>
+                  <a:srgbClr val="1A1A1E"/>
+                </a:solidFill>
+                <a:latin typeface="Inter"/>
+              </a:rPr>
+              <a:t>Qwen3-4B fine-tuned · LLM judge</a:t>
+            </a:r>
+          </a:p>
+          <a:p>
+            <a:pPr algn="l">
+              <a:lnSpc>
+                <a:spcPct val="100000"/>
+              </a:lnSpc>
+              <a:spcBef>
+                <a:spcPts val="0"/>
+              </a:spcBef>
+            </a:pPr>
+            <a:r>
+              <a:rPr lang="en-US" sz="650" b="0" i="0" spc="0" dirty="0">
+                <a:solidFill>
+                  <a:srgbClr val="1A1A1E"/>
+                </a:solidFill>
+                <a:latin typeface="Inter"/>
+              </a:rPr>
+              <a:t>Laya-421M checker · MiniLM-L6</a:t>
+            </a:r>
+          </a:p>
+        </p:txBody>
+      </p:sp>
+      <p:sp>
+        <p:nvSpPr>
+          <p:cNvPr id="300" name="RAG MEMORY badge"/>
+          <p:cNvSpPr/>
+          <p:nvPr/>
+        </p:nvSpPr>
+        <p:spPr>
+          <a:xfrm>
+            <a:off x="5870448" y="4215384"/>
+            <a:ext cx="256032" cy="256032"/>
+          </a:xfrm>
+          <a:prstGeom prst="ellipse">
+            <a:avLst/>
+          </a:prstGeom>
+          <a:solidFill>
+            <a:srgbClr val="5F8B2F"/>
+          </a:solidFill>
+          <a:ln>
+            <a:noFill/>
+          </a:ln>
+          <a:effectLst/>
+        </p:spPr>
+        <p:txBody>
+          <a:bodyPr wrap="square" lIns="0" tIns="0" rIns="0" bIns="0" rtlCol="0" anchor="ctr">
+            <a:noAutofit/>
+          </a:bodyPr>
+          <a:lstStyle/>
+          <a:p>
+            <a:endParaRPr lang="en-US"/>
+          </a:p>
+        </p:txBody>
+      </p:sp>
+      <p:pic>
+        <p:nvPicPr>
+          <p:cNvPr id="301" name="RAG MEMORY icon"/>
+          <p:cNvPicPr>
+            <a:picLocks noChangeAspect="1"/>
+          </p:cNvPicPr>
+          <p:nvPr/>
+        </p:nvPicPr>
+        <p:blipFill>
+          <a:blip r:embed="rId13"/>
+          <a:stretch>
+            <a:fillRect/>
+          </a:stretch>
+        </p:blipFill>
+        <p:spPr>
+          <a:xfrm>
+            <a:off x="5934456" y="4279392"/>
+            <a:ext cx="128016" cy="128016"/>
+          </a:xfrm>
+          <a:prstGeom prst="rect">
+            <a:avLst/>
+          </a:prstGeom>
+        </p:spPr>
+      </p:pic>
+      <p:sp>
+        <p:nvSpPr>
+          <p:cNvPr id="302" name="RAG MEMORY"/>
+          <p:cNvSpPr txBox="1"/>
+          <p:nvPr/>
+        </p:nvSpPr>
+        <p:spPr>
+          <a:xfrm>
+            <a:off x="6199632" y="4142232"/>
+            <a:ext cx="859536" cy="100584"/>
+          </a:xfrm>
+          <a:prstGeom prst="rect">
+            <a:avLst/>
+          </a:prstGeom>
+          <a:noFill/>
+        </p:spPr>
+        <p:txBody>
+          <a:bodyPr wrap="square" lIns="0" tIns="0" rIns="0" bIns="0" anchor="t">
+            <a:noAutofit/>
+          </a:bodyPr>
+          <a:lstStyle/>
+          <a:p>
+            <a:pPr algn="l">
+              <a:lnSpc>
+                <a:spcPct val="100000"/>
+              </a:lnSpc>
+              <a:spcBef>
+                <a:spcPts val="0"/>
+              </a:spcBef>
+            </a:pPr>
+            <a:r>
+              <a:rPr lang="en-US" sz="550" b="1" i="0" spc="100" dirty="0">
+                <a:solidFill>
+                  <a:srgbClr val="5F8B2F"/>
+                </a:solidFill>
+                <a:latin typeface="Inter"/>
+              </a:rPr>
+              <a:t>RAG MEMORY</a:t>
+            </a:r>
+          </a:p>
+        </p:txBody>
+      </p:sp>
+      <p:sp>
+        <p:nvSpPr>
+          <p:cNvPr id="303" name="RAG MEMORY detail"/>
+          <p:cNvSpPr txBox="1"/>
+          <p:nvPr/>
+        </p:nvSpPr>
+        <p:spPr>
+          <a:xfrm>
+            <a:off x="6199632" y="4247388"/>
+            <a:ext cx="841248" cy="329184"/>
+          </a:xfrm>
+          <a:prstGeom prst="rect">
+            <a:avLst/>
+          </a:prstGeom>
+          <a:noFill/>
+        </p:spPr>
+        <p:txBody>
+          <a:bodyPr wrap="square" lIns="0" tIns="0" rIns="0" bIns="0" anchor="t">
+            <a:noAutofit/>
+          </a:bodyPr>
+          <a:lstStyle/>
+          <a:p>
+            <a:pPr algn="l">
+              <a:lnSpc>
+                <a:spcPct val="100000"/>
+              </a:lnSpc>
+              <a:spcBef>
+                <a:spcPts val="0"/>
+              </a:spcBef>
+            </a:pPr>
+            <a:r>
+              <a:rPr lang="en-US" sz="650" b="0" i="0" spc="0" dirty="0">
+                <a:solidFill>
+                  <a:srgbClr val="1A1A1E"/>
+                </a:solidFill>
+                <a:latin typeface="Inter"/>
+              </a:rPr>
+              <a:t>SQL fixes</a:t>
+            </a:r>
+          </a:p>
+          <a:p>
+            <a:pPr algn="l">
+              <a:lnSpc>
+                <a:spcPct val="100000"/>
+              </a:lnSpc>
+              <a:spcBef>
+                <a:spcPts val="0"/>
+              </a:spcBef>
+            </a:pPr>
+            <a:r>
+              <a:rPr lang="en-US" sz="650" b="0" i="0" spc="0" dirty="0">
+                <a:solidFill>
+                  <a:srgbClr val="1A1A1E"/>
+                </a:solidFill>
+                <a:latin typeface="Inter"/>
+              </a:rPr>
+              <a:t>JSON fingerprints</a:t>
+            </a:r>
+          </a:p>
+        </p:txBody>
+      </p:sp>
+      <p:sp>
+        <p:nvSpPr>
+          <p:cNvPr id="304" name="INFRASTRUCTURE badge"/>
+          <p:cNvSpPr/>
+          <p:nvPr/>
+        </p:nvSpPr>
+        <p:spPr>
+          <a:xfrm>
+            <a:off x="7059168" y="4215384"/>
+            <a:ext cx="256032" cy="256032"/>
+          </a:xfrm>
+          <a:prstGeom prst="ellipse">
+            <a:avLst/>
+          </a:prstGeom>
+          <a:solidFill>
+            <a:srgbClr val="1A2340"/>
+          </a:solidFill>
+          <a:ln>
+            <a:noFill/>
+          </a:ln>
+          <a:effectLst/>
+        </p:spPr>
+        <p:txBody>
+          <a:bodyPr wrap="square" lIns="0" tIns="0" rIns="0" bIns="0" rtlCol="0" anchor="ctr">
+            <a:noAutofit/>
+          </a:bodyPr>
+          <a:lstStyle/>
+          <a:p>
+            <a:endParaRPr lang="en-US"/>
+          </a:p>
+        </p:txBody>
+      </p:sp>
+      <p:pic>
+        <p:nvPicPr>
+          <p:cNvPr id="305" name="INFRASTRUCTURE icon"/>
+          <p:cNvPicPr>
+            <a:picLocks noChangeAspect="1"/>
+          </p:cNvPicPr>
+          <p:nvPr/>
+        </p:nvPicPr>
+        <p:blipFill>
+          <a:blip r:embed="rId14"/>
+          <a:stretch>
+            <a:fillRect/>
+          </a:stretch>
+        </p:blipFill>
+        <p:spPr>
+          <a:xfrm>
+            <a:off x="7123176" y="4279392"/>
+            <a:ext cx="128016" cy="128016"/>
+          </a:xfrm>
+          <a:prstGeom prst="rect">
+            <a:avLst/>
+          </a:prstGeom>
+        </p:spPr>
+      </p:pic>
+      <p:sp>
+        <p:nvSpPr>
+          <p:cNvPr id="306" name="INFRASTRUCTURE"/>
+          <p:cNvSpPr txBox="1"/>
+          <p:nvPr/>
+        </p:nvSpPr>
+        <p:spPr>
+          <a:xfrm>
+            <a:off x="7388352" y="4142232"/>
+            <a:ext cx="978408" cy="100584"/>
+          </a:xfrm>
+          <a:prstGeom prst="rect">
+            <a:avLst/>
+          </a:prstGeom>
+          <a:noFill/>
+        </p:spPr>
+        <p:txBody>
+          <a:bodyPr wrap="square" lIns="0" tIns="0" rIns="0" bIns="0" anchor="t">
+            <a:noAutofit/>
+          </a:bodyPr>
+          <a:lstStyle/>
+          <a:p>
+            <a:pPr algn="l">
+              <a:lnSpc>
+                <a:spcPct val="100000"/>
+              </a:lnSpc>
+              <a:spcBef>
+                <a:spcPts val="0"/>
+              </a:spcBef>
+            </a:pPr>
+            <a:r>
+              <a:rPr lang="en-US" sz="550" b="1" i="0" spc="100" dirty="0">
+                <a:solidFill>
+                  <a:srgbClr val="1A2340"/>
+                </a:solidFill>
+                <a:latin typeface="Inter"/>
+              </a:rPr>
+              <a:t>INFRASTRUCTURE</a:t>
+            </a:r>
+          </a:p>
+        </p:txBody>
+      </p:sp>
+      <p:sp>
+        <p:nvSpPr>
+          <p:cNvPr id="307" name="INFRASTRUCTURE detail"/>
+          <p:cNvSpPr txBox="1"/>
+          <p:nvPr/>
+        </p:nvSpPr>
+        <p:spPr>
+          <a:xfrm>
+            <a:off x="7388352" y="4247388"/>
+            <a:ext cx="960120" cy="329184"/>
+          </a:xfrm>
+          <a:prstGeom prst="rect">
+            <a:avLst/>
+          </a:prstGeom>
+          <a:noFill/>
+        </p:spPr>
+        <p:txBody>
+          <a:bodyPr wrap="square" lIns="0" tIns="0" rIns="0" bIns="0" anchor="t">
+            <a:noAutofit/>
+          </a:bodyPr>
+          <a:lstStyle/>
+          <a:p>
+            <a:pPr algn="l">
+              <a:lnSpc>
+                <a:spcPct val="100000"/>
+              </a:lnSpc>
+              <a:spcBef>
+                <a:spcPts val="0"/>
+              </a:spcBef>
+            </a:pPr>
+            <a:r>
+              <a:rPr lang="en-US" sz="650" b="0" i="0" spc="0" dirty="0">
+                <a:solidFill>
+                  <a:srgbClr val="1A1A1E"/>
+                </a:solidFill>
+                <a:latin typeface="Inter"/>
+              </a:rPr>
+              <a:t>24 GB GPU server</a:t>
+            </a:r>
+          </a:p>
+          <a:p>
+            <a:pPr algn="l">
+              <a:lnSpc>
+                <a:spcPct val="100000"/>
+              </a:lnSpc>
+              <a:spcBef>
+                <a:spcPts val="0"/>
+              </a:spcBef>
+            </a:pPr>
+            <a:r>
+              <a:rPr lang="en-US" sz="650" b="0" i="0" spc="0" dirty="0">
+                <a:solidFill>
+                  <a:srgbClr val="1A1A1E"/>
+                </a:solidFill>
+                <a:latin typeface="Inter"/>
+              </a:rPr>
+              <a:t>llama.cpp · HTTPS</a:t>
             </a:r>
           </a:p>
         </p:txBody>
